--- a/docs/Containers-Usuario.pptx
+++ b/docs/Containers-Usuario.pptx
@@ -6,7 +6,6 @@
   </p:sldMasterIdLst>
   <p:sldIdLst>
     <p:sldId id="256" r:id="rId3"/>
-    <p:sldId id="257" r:id="rId4"/>
   </p:sldIdLst>
   <p:sldSz cx="12192000" cy="6858000"/>
   <p:notesSz cx="7559675" cy="10691813"/>
@@ -14,8 +13,8 @@
 </file>
 
 <file path=ppt/slideLayouts/slideLayout1.xml><?xml version="1.0" encoding="utf-8"?>
-<p:sldLayout xmlns:a="http://schemas.openxmlformats.org/drawingml/2006/main" xmlns:p="http://schemas.openxmlformats.org/presentationml/2006/main" xmlns:r="http://schemas.openxmlformats.org/officeDocument/2006/relationships" xmlns:p14="http://schemas.microsoft.com/office/powerpoint/2010/main" xmlns:p15="http://schemas.microsoft.com/office/powerpoint/2012/main" xmlns:mc="http://schemas.openxmlformats.org/markup-compatibility/2006" type="blank" preserve="1">
-  <p:cSld name="Imagen con título">
+<p:sldLayout xmlns:a="http://schemas.openxmlformats.org/drawingml/2006/main" xmlns:p="http://schemas.openxmlformats.org/presentationml/2006/main" xmlns:r="http://schemas.openxmlformats.org/officeDocument/2006/relationships" xmlns:p14="http://schemas.microsoft.com/office/powerpoint/2010/main" xmlns:p15="http://schemas.microsoft.com/office/powerpoint/2012/main" xmlns:mc="http://schemas.openxmlformats.org/markup-compatibility/2006" type="titleOnly" preserve="1">
+  <p:cSld name="Solo el título">
     <p:bg>
       <p:bgPr>
         <a:solidFill>
@@ -49,8 +48,8 @@
         </p:nvSpPr>
         <p:spPr>
           <a:xfrm>
-            <a:off x="839880" y="457200"/>
-            <a:ext cx="3930480" cy="1598400"/>
+            <a:off x="838080" y="365040"/>
+            <a:ext cx="10513440" cy="1323360"/>
           </a:xfrm>
           <a:prstGeom prst="rect">
             <a:avLst/>
@@ -61,7 +60,7 @@
           </a:ln>
         </p:spPr>
         <p:txBody>
-          <a:bodyPr lIns="91440" rIns="91440" tIns="45720" bIns="45720" anchor="b">
+          <a:bodyPr lIns="91440" rIns="91440" tIns="45720" bIns="45720" anchor="ctr">
             <a:noAutofit/>
           </a:bodyPr>
           <a:p>
@@ -75,7 +74,7 @@
               </a:tabLst>
             </a:pPr>
             <a:r>
-              <a:rPr b="0" lang="es-ES" sz="3200" strike="noStrike" u="none">
+              <a:rPr b="0" lang="es-ES" sz="4400" strike="noStrike" u="none">
                 <a:solidFill>
                   <a:schemeClr val="dk1"/>
                 </a:solidFill>
@@ -85,7 +84,7 @@
               </a:rPr>
               <a:t>Haga clic para modificar el estilo de título del patrón</a:t>
             </a:r>
-            <a:endParaRPr b="0" lang="es-ES" sz="3200" strike="noStrike" u="none">
+            <a:endParaRPr b="0" lang="es-ES" sz="4400" strike="noStrike" u="none">
               <a:solidFill>
                 <a:srgbClr val="000000"/>
               </a:solidFill>
@@ -99,342 +98,6 @@
       <p:sp>
         <p:nvSpPr>
           <p:cNvPr id="1" name="PlaceHolder 2"/>
-          <p:cNvSpPr>
-            <a:spLocks noGrp="1"/>
-          </p:cNvSpPr>
-          <p:nvPr>
-            <p:ph type="body"/>
-          </p:nvPr>
-        </p:nvSpPr>
-        <p:spPr>
-          <a:xfrm>
-            <a:off x="5183280" y="987480"/>
-            <a:ext cx="6170400" cy="4871880"/>
-          </a:xfrm>
-          <a:prstGeom prst="rect">
-            <a:avLst/>
-          </a:prstGeom>
-          <a:noFill/>
-          <a:ln w="0">
-            <a:noFill/>
-          </a:ln>
-        </p:spPr>
-        <p:txBody>
-          <a:bodyPr lIns="90000" rIns="90000" tIns="45000" bIns="45000" anchor="t">
-            <a:noAutofit/>
-          </a:bodyPr>
-          <a:p>
-            <a:pPr marL="432000" indent="-324000">
-              <a:lnSpc>
-                <a:spcPct val="90000"/>
-              </a:lnSpc>
-              <a:spcBef>
-                <a:spcPts val="1417"/>
-              </a:spcBef>
-              <a:buClr>
-                <a:srgbClr val="000000"/>
-              </a:buClr>
-              <a:buSzPct val="45000"/>
-              <a:buFont typeface="Wingdings" charset="2"/>
-              <a:buChar char=""/>
-            </a:pPr>
-            <a:r>
-              <a:rPr b="0" lang="es-ES" sz="3200" strike="noStrike" u="none">
-                <a:solidFill>
-                  <a:schemeClr val="dk1"/>
-                </a:solidFill>
-                <a:effectLst/>
-                <a:uFillTx/>
-                <a:latin typeface="Calibri"/>
-              </a:rPr>
-              <a:t>Pulse para editar el formato de texto del esquema</a:t>
-            </a:r>
-            <a:endParaRPr b="0" lang="es-ES" sz="3200" strike="noStrike" u="none">
-              <a:solidFill>
-                <a:srgbClr val="000000"/>
-              </a:solidFill>
-              <a:effectLst/>
-              <a:uFillTx/>
-              <a:latin typeface="Arial"/>
-            </a:endParaRPr>
-          </a:p>
-          <a:p>
-            <a:pPr lvl="1" marL="864000" indent="-324000">
-              <a:lnSpc>
-                <a:spcPct val="90000"/>
-              </a:lnSpc>
-              <a:spcBef>
-                <a:spcPts val="1134"/>
-              </a:spcBef>
-              <a:buClr>
-                <a:srgbClr val="000000"/>
-              </a:buClr>
-              <a:buSzPct val="75000"/>
-              <a:buFont typeface="Symbol" charset="2"/>
-              <a:buChar char=""/>
-            </a:pPr>
-            <a:r>
-              <a:rPr b="0" lang="es-ES" sz="3200" strike="noStrike" u="none">
-                <a:solidFill>
-                  <a:schemeClr val="dk1"/>
-                </a:solidFill>
-                <a:effectLst/>
-                <a:uFillTx/>
-                <a:latin typeface="Calibri"/>
-              </a:rPr>
-              <a:t>Segundo nivel del esquema</a:t>
-            </a:r>
-            <a:endParaRPr b="0" lang="es-ES" sz="3200" strike="noStrike" u="none">
-              <a:solidFill>
-                <a:srgbClr val="000000"/>
-              </a:solidFill>
-              <a:effectLst/>
-              <a:uFillTx/>
-              <a:latin typeface="Arial"/>
-            </a:endParaRPr>
-          </a:p>
-          <a:p>
-            <a:pPr lvl="2" marL="1296000" indent="-288000">
-              <a:lnSpc>
-                <a:spcPct val="90000"/>
-              </a:lnSpc>
-              <a:spcBef>
-                <a:spcPts val="850"/>
-              </a:spcBef>
-              <a:buClr>
-                <a:srgbClr val="000000"/>
-              </a:buClr>
-              <a:buSzPct val="45000"/>
-              <a:buFont typeface="Wingdings" charset="2"/>
-              <a:buChar char=""/>
-            </a:pPr>
-            <a:r>
-              <a:rPr b="0" lang="es-ES" sz="3200" strike="noStrike" u="none">
-                <a:solidFill>
-                  <a:schemeClr val="dk1"/>
-                </a:solidFill>
-                <a:effectLst/>
-                <a:uFillTx/>
-                <a:latin typeface="Calibri"/>
-              </a:rPr>
-              <a:t>Tercer nivel del esquema</a:t>
-            </a:r>
-            <a:endParaRPr b="0" lang="es-ES" sz="3200" strike="noStrike" u="none">
-              <a:solidFill>
-                <a:srgbClr val="000000"/>
-              </a:solidFill>
-              <a:effectLst/>
-              <a:uFillTx/>
-              <a:latin typeface="Arial"/>
-            </a:endParaRPr>
-          </a:p>
-          <a:p>
-            <a:pPr lvl="3" marL="1728000" indent="-216000">
-              <a:lnSpc>
-                <a:spcPct val="90000"/>
-              </a:lnSpc>
-              <a:spcBef>
-                <a:spcPts val="567"/>
-              </a:spcBef>
-              <a:buClr>
-                <a:srgbClr val="000000"/>
-              </a:buClr>
-              <a:buSzPct val="75000"/>
-              <a:buFont typeface="Symbol" charset="2"/>
-              <a:buChar char=""/>
-            </a:pPr>
-            <a:r>
-              <a:rPr b="0" lang="es-ES" sz="3200" strike="noStrike" u="none">
-                <a:solidFill>
-                  <a:schemeClr val="dk1"/>
-                </a:solidFill>
-                <a:effectLst/>
-                <a:uFillTx/>
-                <a:latin typeface="Calibri"/>
-              </a:rPr>
-              <a:t>Cuarto nivel del esquema</a:t>
-            </a:r>
-            <a:endParaRPr b="0" lang="es-ES" sz="3200" strike="noStrike" u="none">
-              <a:solidFill>
-                <a:srgbClr val="000000"/>
-              </a:solidFill>
-              <a:effectLst/>
-              <a:uFillTx/>
-              <a:latin typeface="Arial"/>
-            </a:endParaRPr>
-          </a:p>
-          <a:p>
-            <a:pPr lvl="4" marL="2160000" indent="-216000">
-              <a:lnSpc>
-                <a:spcPct val="90000"/>
-              </a:lnSpc>
-              <a:spcBef>
-                <a:spcPts val="283"/>
-              </a:spcBef>
-              <a:buClr>
-                <a:srgbClr val="000000"/>
-              </a:buClr>
-              <a:buSzPct val="45000"/>
-              <a:buFont typeface="Wingdings" charset="2"/>
-              <a:buChar char=""/>
-            </a:pPr>
-            <a:r>
-              <a:rPr b="0" lang="es-ES" sz="3200" strike="noStrike" u="none">
-                <a:solidFill>
-                  <a:schemeClr val="dk1"/>
-                </a:solidFill>
-                <a:effectLst/>
-                <a:uFillTx/>
-                <a:latin typeface="Calibri"/>
-              </a:rPr>
-              <a:t>Quinto nivel del esquema</a:t>
-            </a:r>
-            <a:endParaRPr b="0" lang="es-ES" sz="3200" strike="noStrike" u="none">
-              <a:solidFill>
-                <a:srgbClr val="000000"/>
-              </a:solidFill>
-              <a:effectLst/>
-              <a:uFillTx/>
-              <a:latin typeface="Arial"/>
-            </a:endParaRPr>
-          </a:p>
-          <a:p>
-            <a:pPr lvl="5" marL="2592000" indent="-216000">
-              <a:lnSpc>
-                <a:spcPct val="90000"/>
-              </a:lnSpc>
-              <a:spcBef>
-                <a:spcPts val="283"/>
-              </a:spcBef>
-              <a:buClr>
-                <a:srgbClr val="000000"/>
-              </a:buClr>
-              <a:buSzPct val="45000"/>
-              <a:buFont typeface="Wingdings" charset="2"/>
-              <a:buChar char=""/>
-            </a:pPr>
-            <a:r>
-              <a:rPr b="0" lang="es-ES" sz="3200" strike="noStrike" u="none">
-                <a:solidFill>
-                  <a:schemeClr val="dk1"/>
-                </a:solidFill>
-                <a:effectLst/>
-                <a:uFillTx/>
-                <a:latin typeface="Calibri"/>
-              </a:rPr>
-              <a:t>Sexto nivel del esquema</a:t>
-            </a:r>
-            <a:endParaRPr b="0" lang="es-ES" sz="3200" strike="noStrike" u="none">
-              <a:solidFill>
-                <a:srgbClr val="000000"/>
-              </a:solidFill>
-              <a:effectLst/>
-              <a:uFillTx/>
-              <a:latin typeface="Arial"/>
-            </a:endParaRPr>
-          </a:p>
-          <a:p>
-            <a:pPr lvl="6" marL="3024000" indent="-216000">
-              <a:lnSpc>
-                <a:spcPct val="90000"/>
-              </a:lnSpc>
-              <a:spcBef>
-                <a:spcPts val="283"/>
-              </a:spcBef>
-              <a:buClr>
-                <a:srgbClr val="000000"/>
-              </a:buClr>
-              <a:buSzPct val="45000"/>
-              <a:buFont typeface="Wingdings" charset="2"/>
-              <a:buChar char=""/>
-            </a:pPr>
-            <a:r>
-              <a:rPr b="0" lang="es-ES" sz="3200" strike="noStrike" u="none">
-                <a:solidFill>
-                  <a:schemeClr val="dk1"/>
-                </a:solidFill>
-                <a:effectLst/>
-                <a:uFillTx/>
-                <a:latin typeface="Calibri"/>
-              </a:rPr>
-              <a:t>Séptimo nivel del esquema</a:t>
-            </a:r>
-            <a:endParaRPr b="0" lang="es-ES" sz="3200" strike="noStrike" u="none">
-              <a:solidFill>
-                <a:srgbClr val="000000"/>
-              </a:solidFill>
-              <a:effectLst/>
-              <a:uFillTx/>
-              <a:latin typeface="Arial"/>
-            </a:endParaRPr>
-          </a:p>
-        </p:txBody>
-      </p:sp>
-      <p:sp>
-        <p:nvSpPr>
-          <p:cNvPr id="2" name="PlaceHolder 3"/>
-          <p:cNvSpPr>
-            <a:spLocks noGrp="1"/>
-          </p:cNvSpPr>
-          <p:nvPr>
-            <p:ph type="body"/>
-          </p:nvPr>
-        </p:nvSpPr>
-        <p:spPr>
-          <a:xfrm>
-            <a:off x="839880" y="2057400"/>
-            <a:ext cx="3930480" cy="3809880"/>
-          </a:xfrm>
-          <a:prstGeom prst="rect">
-            <a:avLst/>
-          </a:prstGeom>
-          <a:noFill/>
-          <a:ln w="0">
-            <a:noFill/>
-          </a:ln>
-        </p:spPr>
-        <p:txBody>
-          <a:bodyPr lIns="91440" rIns="91440" tIns="45720" bIns="45720" anchor="t">
-            <a:noAutofit/>
-          </a:bodyPr>
-          <a:p>
-            <a:pPr indent="0" defTabSz="914400">
-              <a:lnSpc>
-                <a:spcPct val="90000"/>
-              </a:lnSpc>
-              <a:spcBef>
-                <a:spcPts val="1001"/>
-              </a:spcBef>
-              <a:buNone/>
-              <a:tabLst>
-                <a:tab algn="l" pos="0"/>
-              </a:tabLst>
-            </a:pPr>
-            <a:r>
-              <a:rPr b="0" lang="es-ES" sz="1600" strike="noStrike" u="none">
-                <a:solidFill>
-                  <a:schemeClr val="dk1"/>
-                </a:solidFill>
-                <a:effectLst/>
-                <a:uFillTx/>
-                <a:latin typeface="Calibri"/>
-              </a:rPr>
-              <a:t>Haga clic para modificar los estilos de texto del patrón</a:t>
-            </a:r>
-            <a:endParaRPr b="0" lang="es-ES" sz="1600" strike="noStrike" u="none">
-              <a:solidFill>
-                <a:srgbClr val="000000"/>
-              </a:solidFill>
-              <a:effectLst/>
-              <a:uFillTx/>
-              <a:latin typeface="Arial"/>
-            </a:endParaRPr>
-          </a:p>
-        </p:txBody>
-      </p:sp>
-      <p:sp>
-        <p:nvSpPr>
-          <p:cNvPr id="3" name="PlaceHolder 4"/>
           <p:cNvSpPr>
             <a:spLocks noGrp="1"/>
           </p:cNvSpPr>
@@ -445,7 +108,7 @@
         <p:spPr>
           <a:xfrm>
             <a:off x="838080" y="6356520"/>
-            <a:ext cx="2741400" cy="363240"/>
+            <a:ext cx="2741040" cy="362880"/>
           </a:xfrm>
           <a:prstGeom prst="rect">
             <a:avLst/>
@@ -501,7 +164,7 @@
                 <a:uFillTx/>
                 <a:latin typeface="Calibri"/>
               </a:rPr>
-              <a:t>&lt;fecha/hora&gt;</a:t>
+              <a:t> </a:t>
             </a:r>
             <a:endParaRPr b="0" lang="es-ES" sz="1200" strike="noStrike" u="none">
               <a:solidFill>
@@ -516,7 +179,7 @@
       </p:sp>
       <p:sp>
         <p:nvSpPr>
-          <p:cNvPr id="4" name="PlaceHolder 5"/>
+          <p:cNvPr id="2" name="PlaceHolder 3"/>
           <p:cNvSpPr>
             <a:spLocks noGrp="1"/>
           </p:cNvSpPr>
@@ -527,7 +190,7 @@
         <p:spPr>
           <a:xfrm>
             <a:off x="4038480" y="6356520"/>
-            <a:ext cx="4113000" cy="363240"/>
+            <a:ext cx="4112640" cy="362880"/>
           </a:xfrm>
           <a:prstGeom prst="rect">
             <a:avLst/>
@@ -579,7 +242,7 @@
                 <a:uFillTx/>
                 <a:latin typeface="Times New Roman"/>
               </a:rPr>
-              <a:t>&lt;pie de página&gt;</a:t>
+              <a:t> </a:t>
             </a:r>
             <a:endParaRPr b="0" lang="es-ES" sz="1400" strike="noStrike" u="none">
               <a:solidFill>
@@ -594,7 +257,7 @@
       </p:sp>
       <p:sp>
         <p:nvSpPr>
-          <p:cNvPr id="5" name="PlaceHolder 6"/>
+          <p:cNvPr id="3" name="PlaceHolder 4"/>
           <p:cNvSpPr>
             <a:spLocks noGrp="1"/>
           </p:cNvSpPr>
@@ -605,7 +268,7 @@
         <p:spPr>
           <a:xfrm>
             <a:off x="8610480" y="6356520"/>
-            <a:ext cx="2741400" cy="363240"/>
+            <a:ext cx="2741040" cy="362880"/>
           </a:xfrm>
           <a:prstGeom prst="rect">
             <a:avLst/>
@@ -650,7 +313,7 @@
                 <a:tab algn="l" pos="0"/>
               </a:tabLst>
             </a:pPr>
-            <a:fld id="{588A4B37-216D-4DEB-AF6F-7FE0000DFB67}" type="slidenum">
+            <a:fld id="{5074CB3B-9B5A-4758-B038-B971D0C585DB}" type="slidenum">
               <a:rPr b="0" lang="en-GB" sz="1200" strike="noStrike" u="none">
                 <a:solidFill>
                   <a:schemeClr val="dk1">
@@ -661,7 +324,7 @@
                 <a:uFillTx/>
                 <a:latin typeface="Calibri"/>
               </a:rPr>
-              <a:t>&lt;número&gt;</a:t>
+              <a:t>1</a:t>
             </a:fld>
             <a:endParaRPr b="0" lang="es-ES" sz="1200" strike="noStrike" u="none">
               <a:solidFill>
@@ -680,6 +343,1586 @@
 </file>
 
 <file path=ppt/slideLayouts/slideLayout10.xml><?xml version="1.0" encoding="utf-8"?>
+<p:sldLayout xmlns:a="http://schemas.openxmlformats.org/drawingml/2006/main" xmlns:p="http://schemas.openxmlformats.org/presentationml/2006/main" xmlns:r="http://schemas.openxmlformats.org/officeDocument/2006/relationships" xmlns:p14="http://schemas.microsoft.com/office/powerpoint/2010/main" xmlns:p15="http://schemas.microsoft.com/office/powerpoint/2012/main" xmlns:mc="http://schemas.openxmlformats.org/markup-compatibility/2006" type="twoObj" preserve="1">
+  <p:cSld name="Dos objetos">
+    <p:bg>
+      <p:bgPr>
+        <a:solidFill>
+          <a:srgbClr val="ffffff"/>
+        </a:solidFill>
+      </p:bgPr>
+    </p:bg>
+    <p:spTree>
+      <p:nvGrpSpPr>
+        <p:cNvPr id="1" name=""/>
+        <p:cNvGrpSpPr/>
+        <p:nvPr/>
+      </p:nvGrpSpPr>
+      <p:grpSpPr>
+        <a:xfrm>
+          <a:off x="0" y="0"/>
+          <a:ext cx="0" cy="0"/>
+          <a:chOff x="0" y="0"/>
+          <a:chExt cx="0" cy="0"/>
+        </a:xfrm>
+      </p:grpSpPr>
+      <p:sp>
+        <p:nvSpPr>
+          <p:cNvPr id="45" name="PlaceHolder 1"/>
+          <p:cNvSpPr>
+            <a:spLocks noGrp="1"/>
+          </p:cNvSpPr>
+          <p:nvPr>
+            <p:ph type="title"/>
+          </p:nvPr>
+        </p:nvSpPr>
+        <p:spPr>
+          <a:xfrm>
+            <a:off x="838080" y="365040"/>
+            <a:ext cx="10513440" cy="1323360"/>
+          </a:xfrm>
+          <a:prstGeom prst="rect">
+            <a:avLst/>
+          </a:prstGeom>
+          <a:noFill/>
+          <a:ln w="0">
+            <a:noFill/>
+          </a:ln>
+        </p:spPr>
+        <p:txBody>
+          <a:bodyPr lIns="91440" rIns="91440" tIns="45720" bIns="45720" anchor="ctr">
+            <a:noAutofit/>
+          </a:bodyPr>
+          <a:p>
+            <a:pPr indent="0" defTabSz="914400">
+              <a:lnSpc>
+                <a:spcPct val="90000"/>
+              </a:lnSpc>
+              <a:buNone/>
+              <a:tabLst>
+                <a:tab algn="l" pos="0"/>
+              </a:tabLst>
+            </a:pPr>
+            <a:r>
+              <a:rPr b="0" lang="es-ES" sz="4400" strike="noStrike" u="none">
+                <a:solidFill>
+                  <a:schemeClr val="dk1"/>
+                </a:solidFill>
+                <a:effectLst/>
+                <a:uFillTx/>
+                <a:latin typeface="Calibri Light"/>
+              </a:rPr>
+              <a:t>Haga clic para modificar el estilo de título del patrón</a:t>
+            </a:r>
+            <a:endParaRPr b="0" lang="es-ES" sz="4400" strike="noStrike" u="none">
+              <a:solidFill>
+                <a:srgbClr val="000000"/>
+              </a:solidFill>
+              <a:effectLst/>
+              <a:uFillTx/>
+              <a:latin typeface="Arial"/>
+            </a:endParaRPr>
+          </a:p>
+        </p:txBody>
+      </p:sp>
+      <p:sp>
+        <p:nvSpPr>
+          <p:cNvPr id="46" name="PlaceHolder 2"/>
+          <p:cNvSpPr>
+            <a:spLocks noGrp="1"/>
+          </p:cNvSpPr>
+          <p:nvPr>
+            <p:ph type="body"/>
+          </p:nvPr>
+        </p:nvSpPr>
+        <p:spPr>
+          <a:xfrm>
+            <a:off x="838080" y="1825560"/>
+            <a:ext cx="5179320" cy="4349160"/>
+          </a:xfrm>
+          <a:prstGeom prst="rect">
+            <a:avLst/>
+          </a:prstGeom>
+          <a:noFill/>
+          <a:ln w="0">
+            <a:noFill/>
+          </a:ln>
+        </p:spPr>
+        <p:txBody>
+          <a:bodyPr lIns="91440" rIns="91440" tIns="45720" bIns="45720" anchor="t">
+            <a:noAutofit/>
+          </a:bodyPr>
+          <a:p>
+            <a:pPr marL="228600" indent="-228600" defTabSz="914400">
+              <a:lnSpc>
+                <a:spcPct val="90000"/>
+              </a:lnSpc>
+              <a:spcBef>
+                <a:spcPts val="1001"/>
+              </a:spcBef>
+              <a:buClr>
+                <a:srgbClr val="000000"/>
+              </a:buClr>
+              <a:buFont typeface="Arial"/>
+              <a:buChar char="•"/>
+            </a:pPr>
+            <a:r>
+              <a:rPr b="0" lang="es-ES" sz="2800" strike="noStrike" u="none">
+                <a:solidFill>
+                  <a:schemeClr val="dk1"/>
+                </a:solidFill>
+                <a:effectLst/>
+                <a:uFillTx/>
+                <a:latin typeface="Calibri"/>
+              </a:rPr>
+              <a:t>Haga clic para modificar los estilos de texto del patrón</a:t>
+            </a:r>
+            <a:endParaRPr b="0" lang="es-ES" sz="2800" strike="noStrike" u="none">
+              <a:solidFill>
+                <a:srgbClr val="000000"/>
+              </a:solidFill>
+              <a:effectLst/>
+              <a:uFillTx/>
+              <a:latin typeface="Arial"/>
+            </a:endParaRPr>
+          </a:p>
+          <a:p>
+            <a:pPr lvl="1" marL="685800" indent="-228600" defTabSz="914400">
+              <a:lnSpc>
+                <a:spcPct val="90000"/>
+              </a:lnSpc>
+              <a:spcBef>
+                <a:spcPts val="499"/>
+              </a:spcBef>
+              <a:buClr>
+                <a:srgbClr val="000000"/>
+              </a:buClr>
+              <a:buFont typeface="Arial"/>
+              <a:buChar char="•"/>
+            </a:pPr>
+            <a:r>
+              <a:rPr b="0" lang="es-ES" sz="2400" strike="noStrike" u="none">
+                <a:solidFill>
+                  <a:schemeClr val="dk1"/>
+                </a:solidFill>
+                <a:effectLst/>
+                <a:uFillTx/>
+                <a:latin typeface="Calibri"/>
+              </a:rPr>
+              <a:t>Segundo nivel</a:t>
+            </a:r>
+            <a:endParaRPr b="0" lang="es-ES" sz="2400" strike="noStrike" u="none">
+              <a:solidFill>
+                <a:srgbClr val="000000"/>
+              </a:solidFill>
+              <a:effectLst/>
+              <a:uFillTx/>
+              <a:latin typeface="Arial"/>
+            </a:endParaRPr>
+          </a:p>
+          <a:p>
+            <a:pPr lvl="2" marL="1143000" indent="-228600" defTabSz="914400">
+              <a:lnSpc>
+                <a:spcPct val="90000"/>
+              </a:lnSpc>
+              <a:spcBef>
+                <a:spcPts val="499"/>
+              </a:spcBef>
+              <a:buClr>
+                <a:srgbClr val="000000"/>
+              </a:buClr>
+              <a:buFont typeface="Arial"/>
+              <a:buChar char="•"/>
+            </a:pPr>
+            <a:r>
+              <a:rPr b="0" lang="es-ES" sz="2000" strike="noStrike" u="none">
+                <a:solidFill>
+                  <a:schemeClr val="dk1"/>
+                </a:solidFill>
+                <a:effectLst/>
+                <a:uFillTx/>
+                <a:latin typeface="Calibri"/>
+              </a:rPr>
+              <a:t>Tercer nivel</a:t>
+            </a:r>
+            <a:endParaRPr b="0" lang="es-ES" sz="2000" strike="noStrike" u="none">
+              <a:solidFill>
+                <a:srgbClr val="000000"/>
+              </a:solidFill>
+              <a:effectLst/>
+              <a:uFillTx/>
+              <a:latin typeface="Arial"/>
+            </a:endParaRPr>
+          </a:p>
+          <a:p>
+            <a:pPr lvl="3" marL="1600200" indent="-228600" defTabSz="914400">
+              <a:lnSpc>
+                <a:spcPct val="90000"/>
+              </a:lnSpc>
+              <a:spcBef>
+                <a:spcPts val="499"/>
+              </a:spcBef>
+              <a:buClr>
+                <a:srgbClr val="000000"/>
+              </a:buClr>
+              <a:buFont typeface="Arial"/>
+              <a:buChar char="•"/>
+            </a:pPr>
+            <a:r>
+              <a:rPr b="0" lang="es-ES" sz="1800" strike="noStrike" u="none">
+                <a:solidFill>
+                  <a:schemeClr val="dk1"/>
+                </a:solidFill>
+                <a:effectLst/>
+                <a:uFillTx/>
+                <a:latin typeface="Calibri"/>
+              </a:rPr>
+              <a:t>Cuarto nivel</a:t>
+            </a:r>
+            <a:endParaRPr b="0" lang="es-ES" sz="1800" strike="noStrike" u="none">
+              <a:solidFill>
+                <a:srgbClr val="000000"/>
+              </a:solidFill>
+              <a:effectLst/>
+              <a:uFillTx/>
+              <a:latin typeface="Arial"/>
+            </a:endParaRPr>
+          </a:p>
+          <a:p>
+            <a:pPr lvl="4" marL="2057400" indent="-228600" defTabSz="914400">
+              <a:lnSpc>
+                <a:spcPct val="90000"/>
+              </a:lnSpc>
+              <a:spcBef>
+                <a:spcPts val="499"/>
+              </a:spcBef>
+              <a:buClr>
+                <a:srgbClr val="000000"/>
+              </a:buClr>
+              <a:buFont typeface="Arial"/>
+              <a:buChar char="•"/>
+            </a:pPr>
+            <a:r>
+              <a:rPr b="0" lang="es-ES" sz="1800" strike="noStrike" u="none">
+                <a:solidFill>
+                  <a:schemeClr val="dk1"/>
+                </a:solidFill>
+                <a:effectLst/>
+                <a:uFillTx/>
+                <a:latin typeface="Calibri"/>
+              </a:rPr>
+              <a:t>Quinto nivel</a:t>
+            </a:r>
+            <a:endParaRPr b="0" lang="es-ES" sz="1800" strike="noStrike" u="none">
+              <a:solidFill>
+                <a:srgbClr val="000000"/>
+              </a:solidFill>
+              <a:effectLst/>
+              <a:uFillTx/>
+              <a:latin typeface="Arial"/>
+            </a:endParaRPr>
+          </a:p>
+        </p:txBody>
+      </p:sp>
+      <p:sp>
+        <p:nvSpPr>
+          <p:cNvPr id="47" name="PlaceHolder 3"/>
+          <p:cNvSpPr>
+            <a:spLocks noGrp="1"/>
+          </p:cNvSpPr>
+          <p:nvPr>
+            <p:ph type="body"/>
+          </p:nvPr>
+        </p:nvSpPr>
+        <p:spPr>
+          <a:xfrm>
+            <a:off x="6172200" y="1825560"/>
+            <a:ext cx="5179320" cy="4349160"/>
+          </a:xfrm>
+          <a:prstGeom prst="rect">
+            <a:avLst/>
+          </a:prstGeom>
+          <a:noFill/>
+          <a:ln w="0">
+            <a:noFill/>
+          </a:ln>
+        </p:spPr>
+        <p:txBody>
+          <a:bodyPr lIns="91440" rIns="91440" tIns="45720" bIns="45720" anchor="t">
+            <a:noAutofit/>
+          </a:bodyPr>
+          <a:p>
+            <a:pPr marL="228600" indent="-228600" defTabSz="914400">
+              <a:lnSpc>
+                <a:spcPct val="90000"/>
+              </a:lnSpc>
+              <a:spcBef>
+                <a:spcPts val="1001"/>
+              </a:spcBef>
+              <a:buClr>
+                <a:srgbClr val="000000"/>
+              </a:buClr>
+              <a:buFont typeface="Arial"/>
+              <a:buChar char="•"/>
+            </a:pPr>
+            <a:r>
+              <a:rPr b="0" lang="es-ES" sz="2800" strike="noStrike" u="none">
+                <a:solidFill>
+                  <a:schemeClr val="dk1"/>
+                </a:solidFill>
+                <a:effectLst/>
+                <a:uFillTx/>
+                <a:latin typeface="Calibri"/>
+              </a:rPr>
+              <a:t>Haga clic para modificar los estilos de texto del patrón</a:t>
+            </a:r>
+            <a:endParaRPr b="0" lang="es-ES" sz="2800" strike="noStrike" u="none">
+              <a:solidFill>
+                <a:srgbClr val="000000"/>
+              </a:solidFill>
+              <a:effectLst/>
+              <a:uFillTx/>
+              <a:latin typeface="Arial"/>
+            </a:endParaRPr>
+          </a:p>
+          <a:p>
+            <a:pPr lvl="1" marL="685800" indent="-228600" defTabSz="914400">
+              <a:lnSpc>
+                <a:spcPct val="90000"/>
+              </a:lnSpc>
+              <a:spcBef>
+                <a:spcPts val="499"/>
+              </a:spcBef>
+              <a:buClr>
+                <a:srgbClr val="000000"/>
+              </a:buClr>
+              <a:buFont typeface="Arial"/>
+              <a:buChar char="•"/>
+            </a:pPr>
+            <a:r>
+              <a:rPr b="0" lang="es-ES" sz="2400" strike="noStrike" u="none">
+                <a:solidFill>
+                  <a:schemeClr val="dk1"/>
+                </a:solidFill>
+                <a:effectLst/>
+                <a:uFillTx/>
+                <a:latin typeface="Calibri"/>
+              </a:rPr>
+              <a:t>Segundo nivel</a:t>
+            </a:r>
+            <a:endParaRPr b="0" lang="es-ES" sz="2400" strike="noStrike" u="none">
+              <a:solidFill>
+                <a:srgbClr val="000000"/>
+              </a:solidFill>
+              <a:effectLst/>
+              <a:uFillTx/>
+              <a:latin typeface="Arial"/>
+            </a:endParaRPr>
+          </a:p>
+          <a:p>
+            <a:pPr lvl="2" marL="1143000" indent="-228600" defTabSz="914400">
+              <a:lnSpc>
+                <a:spcPct val="90000"/>
+              </a:lnSpc>
+              <a:spcBef>
+                <a:spcPts val="499"/>
+              </a:spcBef>
+              <a:buClr>
+                <a:srgbClr val="000000"/>
+              </a:buClr>
+              <a:buFont typeface="Arial"/>
+              <a:buChar char="•"/>
+            </a:pPr>
+            <a:r>
+              <a:rPr b="0" lang="es-ES" sz="2000" strike="noStrike" u="none">
+                <a:solidFill>
+                  <a:schemeClr val="dk1"/>
+                </a:solidFill>
+                <a:effectLst/>
+                <a:uFillTx/>
+                <a:latin typeface="Calibri"/>
+              </a:rPr>
+              <a:t>Tercer nivel</a:t>
+            </a:r>
+            <a:endParaRPr b="0" lang="es-ES" sz="2000" strike="noStrike" u="none">
+              <a:solidFill>
+                <a:srgbClr val="000000"/>
+              </a:solidFill>
+              <a:effectLst/>
+              <a:uFillTx/>
+              <a:latin typeface="Arial"/>
+            </a:endParaRPr>
+          </a:p>
+          <a:p>
+            <a:pPr lvl="3" marL="1600200" indent="-228600" defTabSz="914400">
+              <a:lnSpc>
+                <a:spcPct val="90000"/>
+              </a:lnSpc>
+              <a:spcBef>
+                <a:spcPts val="499"/>
+              </a:spcBef>
+              <a:buClr>
+                <a:srgbClr val="000000"/>
+              </a:buClr>
+              <a:buFont typeface="Arial"/>
+              <a:buChar char="•"/>
+            </a:pPr>
+            <a:r>
+              <a:rPr b="0" lang="es-ES" sz="1800" strike="noStrike" u="none">
+                <a:solidFill>
+                  <a:schemeClr val="dk1"/>
+                </a:solidFill>
+                <a:effectLst/>
+                <a:uFillTx/>
+                <a:latin typeface="Calibri"/>
+              </a:rPr>
+              <a:t>Cuarto nivel</a:t>
+            </a:r>
+            <a:endParaRPr b="0" lang="es-ES" sz="1800" strike="noStrike" u="none">
+              <a:solidFill>
+                <a:srgbClr val="000000"/>
+              </a:solidFill>
+              <a:effectLst/>
+              <a:uFillTx/>
+              <a:latin typeface="Arial"/>
+            </a:endParaRPr>
+          </a:p>
+          <a:p>
+            <a:pPr lvl="4" marL="2057400" indent="-228600" defTabSz="914400">
+              <a:lnSpc>
+                <a:spcPct val="90000"/>
+              </a:lnSpc>
+              <a:spcBef>
+                <a:spcPts val="499"/>
+              </a:spcBef>
+              <a:buClr>
+                <a:srgbClr val="000000"/>
+              </a:buClr>
+              <a:buFont typeface="Arial"/>
+              <a:buChar char="•"/>
+            </a:pPr>
+            <a:r>
+              <a:rPr b="0" lang="es-ES" sz="1800" strike="noStrike" u="none">
+                <a:solidFill>
+                  <a:schemeClr val="dk1"/>
+                </a:solidFill>
+                <a:effectLst/>
+                <a:uFillTx/>
+                <a:latin typeface="Calibri"/>
+              </a:rPr>
+              <a:t>Quinto nivel</a:t>
+            </a:r>
+            <a:endParaRPr b="0" lang="es-ES" sz="1800" strike="noStrike" u="none">
+              <a:solidFill>
+                <a:srgbClr val="000000"/>
+              </a:solidFill>
+              <a:effectLst/>
+              <a:uFillTx/>
+              <a:latin typeface="Arial"/>
+            </a:endParaRPr>
+          </a:p>
+        </p:txBody>
+      </p:sp>
+      <p:sp>
+        <p:nvSpPr>
+          <p:cNvPr id="48" name="PlaceHolder 4"/>
+          <p:cNvSpPr>
+            <a:spLocks noGrp="1"/>
+          </p:cNvSpPr>
+          <p:nvPr>
+            <p:ph type="dt" idx="28"/>
+          </p:nvPr>
+        </p:nvSpPr>
+        <p:spPr>
+          <a:xfrm>
+            <a:off x="838080" y="6356520"/>
+            <a:ext cx="2741040" cy="362880"/>
+          </a:xfrm>
+          <a:prstGeom prst="rect">
+            <a:avLst/>
+          </a:prstGeom>
+          <a:noFill/>
+          <a:ln w="0">
+            <a:noFill/>
+          </a:ln>
+        </p:spPr>
+        <p:txBody>
+          <a:bodyPr lIns="91440" rIns="91440" tIns="45720" bIns="45720" anchor="ctr">
+            <a:noAutofit/>
+          </a:bodyPr>
+          <a:lstStyle>
+            <a:lvl1pPr indent="0" defTabSz="914400">
+              <a:lnSpc>
+                <a:spcPct val="100000"/>
+              </a:lnSpc>
+              <a:buNone/>
+              <a:tabLst>
+                <a:tab algn="l" pos="0"/>
+              </a:tabLst>
+              <a:defRPr b="0" lang="en-GB" sz="1200" strike="noStrike" u="none">
+                <a:solidFill>
+                  <a:schemeClr val="dk1">
+                    <a:tint val="75000"/>
+                  </a:schemeClr>
+                </a:solidFill>
+                <a:effectLst/>
+                <a:uFillTx/>
+                <a:latin typeface="Calibri"/>
+              </a:defRPr>
+            </a:lvl1pPr>
+          </a:lstStyle>
+          <a:p>
+            <a:pPr indent="0" defTabSz="914400">
+              <a:lnSpc>
+                <a:spcPct val="100000"/>
+              </a:lnSpc>
+              <a:buNone/>
+              <a:tabLst>
+                <a:tab algn="l" pos="0"/>
+              </a:tabLst>
+            </a:pPr>
+            <a:r>
+              <a:rPr b="0" lang="en-GB" sz="1200" strike="noStrike" u="none">
+                <a:solidFill>
+                  <a:schemeClr val="dk1">
+                    <a:tint val="75000"/>
+                  </a:schemeClr>
+                </a:solidFill>
+                <a:effectLst/>
+                <a:uFillTx/>
+                <a:latin typeface="Calibri"/>
+              </a:rPr>
+              <a:t>&lt;fecha/hora&gt;</a:t>
+            </a:r>
+            <a:endParaRPr b="0" lang="es-ES" sz="1200" strike="noStrike" u="none">
+              <a:solidFill>
+                <a:srgbClr val="000000"/>
+              </a:solidFill>
+              <a:effectLst/>
+              <a:uFillTx/>
+              <a:latin typeface="Times New Roman"/>
+            </a:endParaRPr>
+          </a:p>
+        </p:txBody>
+      </p:sp>
+      <p:sp>
+        <p:nvSpPr>
+          <p:cNvPr id="49" name="PlaceHolder 5"/>
+          <p:cNvSpPr>
+            <a:spLocks noGrp="1"/>
+          </p:cNvSpPr>
+          <p:nvPr>
+            <p:ph type="ftr" idx="29"/>
+          </p:nvPr>
+        </p:nvSpPr>
+        <p:spPr>
+          <a:xfrm>
+            <a:off x="4038480" y="6356520"/>
+            <a:ext cx="4112640" cy="362880"/>
+          </a:xfrm>
+          <a:prstGeom prst="rect">
+            <a:avLst/>
+          </a:prstGeom>
+          <a:noFill/>
+          <a:ln w="0">
+            <a:noFill/>
+          </a:ln>
+        </p:spPr>
+        <p:txBody>
+          <a:bodyPr lIns="91440" rIns="91440" tIns="45720" bIns="45720" anchor="ctr">
+            <a:noAutofit/>
+          </a:bodyPr>
+          <a:lstStyle>
+            <a:lvl1pPr indent="0" algn="ctr">
+              <a:lnSpc>
+                <a:spcPct val="100000"/>
+              </a:lnSpc>
+              <a:buNone/>
+              <a:tabLst>
+                <a:tab algn="l" pos="0"/>
+              </a:tabLst>
+              <a:defRPr b="0" lang="es-ES" sz="1400" strike="noStrike" u="none">
+                <a:solidFill>
+                  <a:srgbClr val="000000"/>
+                </a:solidFill>
+                <a:effectLst/>
+                <a:uFillTx/>
+                <a:latin typeface="Times New Roman"/>
+              </a:defRPr>
+            </a:lvl1pPr>
+          </a:lstStyle>
+          <a:p>
+            <a:pPr indent="0" algn="ctr">
+              <a:lnSpc>
+                <a:spcPct val="100000"/>
+              </a:lnSpc>
+              <a:buNone/>
+              <a:tabLst>
+                <a:tab algn="l" pos="0"/>
+              </a:tabLst>
+            </a:pPr>
+            <a:r>
+              <a:rPr b="0" lang="es-ES" sz="1400" strike="noStrike" u="none">
+                <a:solidFill>
+                  <a:srgbClr val="000000"/>
+                </a:solidFill>
+                <a:effectLst/>
+                <a:uFillTx/>
+                <a:latin typeface="Times New Roman"/>
+              </a:rPr>
+              <a:t>&lt;pie de página&gt;</a:t>
+            </a:r>
+            <a:endParaRPr b="0" lang="es-ES" sz="1400" strike="noStrike" u="none">
+              <a:solidFill>
+                <a:srgbClr val="000000"/>
+              </a:solidFill>
+              <a:effectLst/>
+              <a:uFillTx/>
+              <a:latin typeface="Times New Roman"/>
+            </a:endParaRPr>
+          </a:p>
+        </p:txBody>
+      </p:sp>
+      <p:sp>
+        <p:nvSpPr>
+          <p:cNvPr id="50" name="PlaceHolder 6"/>
+          <p:cNvSpPr>
+            <a:spLocks noGrp="1"/>
+          </p:cNvSpPr>
+          <p:nvPr>
+            <p:ph type="sldNum" idx="30"/>
+          </p:nvPr>
+        </p:nvSpPr>
+        <p:spPr>
+          <a:xfrm>
+            <a:off x="8610480" y="6356520"/>
+            <a:ext cx="2741040" cy="362880"/>
+          </a:xfrm>
+          <a:prstGeom prst="rect">
+            <a:avLst/>
+          </a:prstGeom>
+          <a:noFill/>
+          <a:ln w="0">
+            <a:noFill/>
+          </a:ln>
+        </p:spPr>
+        <p:txBody>
+          <a:bodyPr lIns="91440" rIns="91440" tIns="45720" bIns="45720" anchor="ctr">
+            <a:noAutofit/>
+          </a:bodyPr>
+          <a:lstStyle>
+            <a:lvl1pPr indent="0" algn="r" defTabSz="914400">
+              <a:lnSpc>
+                <a:spcPct val="100000"/>
+              </a:lnSpc>
+              <a:buNone/>
+              <a:tabLst>
+                <a:tab algn="l" pos="0"/>
+              </a:tabLst>
+              <a:defRPr b="0" lang="en-GB" sz="1200" strike="noStrike" u="none">
+                <a:solidFill>
+                  <a:schemeClr val="dk1">
+                    <a:tint val="75000"/>
+                  </a:schemeClr>
+                </a:solidFill>
+                <a:effectLst/>
+                <a:uFillTx/>
+                <a:latin typeface="Calibri"/>
+              </a:defRPr>
+            </a:lvl1pPr>
+          </a:lstStyle>
+          <a:p>
+            <a:pPr indent="0" algn="r" defTabSz="914400">
+              <a:lnSpc>
+                <a:spcPct val="100000"/>
+              </a:lnSpc>
+              <a:buNone/>
+              <a:tabLst>
+                <a:tab algn="l" pos="0"/>
+              </a:tabLst>
+            </a:pPr>
+            <a:fld id="{7E2AE8A8-DDAD-4B1F-9423-E76B041B3AB7}" type="slidenum">
+              <a:rPr b="0" lang="en-GB" sz="1200" strike="noStrike" u="none">
+                <a:solidFill>
+                  <a:schemeClr val="dk1">
+                    <a:tint val="75000"/>
+                  </a:schemeClr>
+                </a:solidFill>
+                <a:effectLst/>
+                <a:uFillTx/>
+                <a:latin typeface="Calibri"/>
+              </a:rPr>
+              <a:t>&lt;número&gt;</a:t>
+            </a:fld>
+            <a:endParaRPr b="0" lang="es-ES" sz="1200" strike="noStrike" u="none">
+              <a:solidFill>
+                <a:srgbClr val="000000"/>
+              </a:solidFill>
+              <a:effectLst/>
+              <a:uFillTx/>
+              <a:latin typeface="Times New Roman"/>
+            </a:endParaRPr>
+          </a:p>
+        </p:txBody>
+      </p:sp>
+    </p:spTree>
+  </p:cSld>
+</p:sldLayout>
+</file>
+
+<file path=ppt/slideLayouts/slideLayout11.xml><?xml version="1.0" encoding="utf-8"?>
+<p:sldLayout xmlns:a="http://schemas.openxmlformats.org/drawingml/2006/main" xmlns:p="http://schemas.openxmlformats.org/presentationml/2006/main" xmlns:r="http://schemas.openxmlformats.org/officeDocument/2006/relationships" xmlns:p14="http://schemas.microsoft.com/office/powerpoint/2010/main" xmlns:p15="http://schemas.microsoft.com/office/powerpoint/2012/main" xmlns:mc="http://schemas.openxmlformats.org/markup-compatibility/2006" type="blank" preserve="1">
+  <p:cSld name="Comparación">
+    <p:bg>
+      <p:bgPr>
+        <a:solidFill>
+          <a:srgbClr val="ffffff"/>
+        </a:solidFill>
+      </p:bgPr>
+    </p:bg>
+    <p:spTree>
+      <p:nvGrpSpPr>
+        <p:cNvPr id="1" name=""/>
+        <p:cNvGrpSpPr/>
+        <p:nvPr/>
+      </p:nvGrpSpPr>
+      <p:grpSpPr>
+        <a:xfrm>
+          <a:off x="0" y="0"/>
+          <a:ext cx="0" cy="0"/>
+          <a:chOff x="0" y="0"/>
+          <a:chExt cx="0" cy="0"/>
+        </a:xfrm>
+      </p:grpSpPr>
+      <p:sp>
+        <p:nvSpPr>
+          <p:cNvPr id="51" name="PlaceHolder 1"/>
+          <p:cNvSpPr>
+            <a:spLocks noGrp="1"/>
+          </p:cNvSpPr>
+          <p:nvPr>
+            <p:ph type="title"/>
+          </p:nvPr>
+        </p:nvSpPr>
+        <p:spPr>
+          <a:xfrm>
+            <a:off x="839880" y="365040"/>
+            <a:ext cx="10513440" cy="1323360"/>
+          </a:xfrm>
+          <a:prstGeom prst="rect">
+            <a:avLst/>
+          </a:prstGeom>
+          <a:noFill/>
+          <a:ln w="0">
+            <a:noFill/>
+          </a:ln>
+        </p:spPr>
+        <p:txBody>
+          <a:bodyPr lIns="91440" rIns="91440" tIns="45720" bIns="45720" anchor="ctr">
+            <a:noAutofit/>
+          </a:bodyPr>
+          <a:p>
+            <a:pPr indent="0" defTabSz="914400">
+              <a:lnSpc>
+                <a:spcPct val="90000"/>
+              </a:lnSpc>
+              <a:buNone/>
+              <a:tabLst>
+                <a:tab algn="l" pos="0"/>
+              </a:tabLst>
+            </a:pPr>
+            <a:r>
+              <a:rPr b="0" lang="es-ES" sz="4400" strike="noStrike" u="none">
+                <a:solidFill>
+                  <a:schemeClr val="dk1"/>
+                </a:solidFill>
+                <a:effectLst/>
+                <a:uFillTx/>
+                <a:latin typeface="Calibri Light"/>
+              </a:rPr>
+              <a:t>Haga clic para modificar el estilo de título del patrón</a:t>
+            </a:r>
+            <a:endParaRPr b="0" lang="es-ES" sz="4400" strike="noStrike" u="none">
+              <a:solidFill>
+                <a:srgbClr val="000000"/>
+              </a:solidFill>
+              <a:effectLst/>
+              <a:uFillTx/>
+              <a:latin typeface="Arial"/>
+            </a:endParaRPr>
+          </a:p>
+        </p:txBody>
+      </p:sp>
+      <p:sp>
+        <p:nvSpPr>
+          <p:cNvPr id="52" name="PlaceHolder 2"/>
+          <p:cNvSpPr>
+            <a:spLocks noGrp="1"/>
+          </p:cNvSpPr>
+          <p:nvPr>
+            <p:ph type="body"/>
+          </p:nvPr>
+        </p:nvSpPr>
+        <p:spPr>
+          <a:xfrm>
+            <a:off x="839880" y="1681200"/>
+            <a:ext cx="5155560" cy="821880"/>
+          </a:xfrm>
+          <a:prstGeom prst="rect">
+            <a:avLst/>
+          </a:prstGeom>
+          <a:noFill/>
+          <a:ln w="0">
+            <a:noFill/>
+          </a:ln>
+        </p:spPr>
+        <p:txBody>
+          <a:bodyPr lIns="91440" rIns="91440" tIns="45720" bIns="45720" anchor="b">
+            <a:noAutofit/>
+          </a:bodyPr>
+          <a:p>
+            <a:pPr indent="0" defTabSz="914400">
+              <a:lnSpc>
+                <a:spcPct val="90000"/>
+              </a:lnSpc>
+              <a:spcBef>
+                <a:spcPts val="1001"/>
+              </a:spcBef>
+              <a:buNone/>
+              <a:tabLst>
+                <a:tab algn="l" pos="0"/>
+              </a:tabLst>
+            </a:pPr>
+            <a:r>
+              <a:rPr b="1" lang="es-ES" sz="2400" strike="noStrike" u="none">
+                <a:solidFill>
+                  <a:schemeClr val="dk1"/>
+                </a:solidFill>
+                <a:effectLst/>
+                <a:uFillTx/>
+                <a:latin typeface="Calibri"/>
+              </a:rPr>
+              <a:t>Haga clic para modificar los estilos de texto del patrón</a:t>
+            </a:r>
+            <a:endParaRPr b="0" lang="es-ES" sz="2400" strike="noStrike" u="none">
+              <a:solidFill>
+                <a:srgbClr val="000000"/>
+              </a:solidFill>
+              <a:effectLst/>
+              <a:uFillTx/>
+              <a:latin typeface="Arial"/>
+            </a:endParaRPr>
+          </a:p>
+        </p:txBody>
+      </p:sp>
+      <p:sp>
+        <p:nvSpPr>
+          <p:cNvPr id="53" name="PlaceHolder 3"/>
+          <p:cNvSpPr>
+            <a:spLocks noGrp="1"/>
+          </p:cNvSpPr>
+          <p:nvPr>
+            <p:ph type="body"/>
+          </p:nvPr>
+        </p:nvSpPr>
+        <p:spPr>
+          <a:xfrm>
+            <a:off x="839880" y="2505240"/>
+            <a:ext cx="5155560" cy="3682440"/>
+          </a:xfrm>
+          <a:prstGeom prst="rect">
+            <a:avLst/>
+          </a:prstGeom>
+          <a:noFill/>
+          <a:ln w="0">
+            <a:noFill/>
+          </a:ln>
+        </p:spPr>
+        <p:txBody>
+          <a:bodyPr lIns="91440" rIns="91440" tIns="45720" bIns="45720" anchor="t">
+            <a:noAutofit/>
+          </a:bodyPr>
+          <a:p>
+            <a:pPr marL="228600" indent="-228600" defTabSz="914400">
+              <a:lnSpc>
+                <a:spcPct val="90000"/>
+              </a:lnSpc>
+              <a:spcBef>
+                <a:spcPts val="1001"/>
+              </a:spcBef>
+              <a:buClr>
+                <a:srgbClr val="000000"/>
+              </a:buClr>
+              <a:buFont typeface="Arial"/>
+              <a:buChar char="•"/>
+            </a:pPr>
+            <a:r>
+              <a:rPr b="0" lang="es-ES" sz="2800" strike="noStrike" u="none">
+                <a:solidFill>
+                  <a:schemeClr val="dk1"/>
+                </a:solidFill>
+                <a:effectLst/>
+                <a:uFillTx/>
+                <a:latin typeface="Calibri"/>
+              </a:rPr>
+              <a:t>Haga clic para modificar los estilos de texto del patrón</a:t>
+            </a:r>
+            <a:endParaRPr b="0" lang="es-ES" sz="2800" strike="noStrike" u="none">
+              <a:solidFill>
+                <a:srgbClr val="000000"/>
+              </a:solidFill>
+              <a:effectLst/>
+              <a:uFillTx/>
+              <a:latin typeface="Arial"/>
+            </a:endParaRPr>
+          </a:p>
+          <a:p>
+            <a:pPr lvl="1" marL="685800" indent="-228600" defTabSz="914400">
+              <a:lnSpc>
+                <a:spcPct val="90000"/>
+              </a:lnSpc>
+              <a:spcBef>
+                <a:spcPts val="499"/>
+              </a:spcBef>
+              <a:buClr>
+                <a:srgbClr val="000000"/>
+              </a:buClr>
+              <a:buFont typeface="Arial"/>
+              <a:buChar char="•"/>
+            </a:pPr>
+            <a:r>
+              <a:rPr b="0" lang="es-ES" sz="2400" strike="noStrike" u="none">
+                <a:solidFill>
+                  <a:schemeClr val="dk1"/>
+                </a:solidFill>
+                <a:effectLst/>
+                <a:uFillTx/>
+                <a:latin typeface="Calibri"/>
+              </a:rPr>
+              <a:t>Segundo nivel</a:t>
+            </a:r>
+            <a:endParaRPr b="0" lang="es-ES" sz="2400" strike="noStrike" u="none">
+              <a:solidFill>
+                <a:srgbClr val="000000"/>
+              </a:solidFill>
+              <a:effectLst/>
+              <a:uFillTx/>
+              <a:latin typeface="Arial"/>
+            </a:endParaRPr>
+          </a:p>
+          <a:p>
+            <a:pPr lvl="2" marL="1143000" indent="-228600" defTabSz="914400">
+              <a:lnSpc>
+                <a:spcPct val="90000"/>
+              </a:lnSpc>
+              <a:spcBef>
+                <a:spcPts val="499"/>
+              </a:spcBef>
+              <a:buClr>
+                <a:srgbClr val="000000"/>
+              </a:buClr>
+              <a:buFont typeface="Arial"/>
+              <a:buChar char="•"/>
+            </a:pPr>
+            <a:r>
+              <a:rPr b="0" lang="es-ES" sz="2000" strike="noStrike" u="none">
+                <a:solidFill>
+                  <a:schemeClr val="dk1"/>
+                </a:solidFill>
+                <a:effectLst/>
+                <a:uFillTx/>
+                <a:latin typeface="Calibri"/>
+              </a:rPr>
+              <a:t>Tercer nivel</a:t>
+            </a:r>
+            <a:endParaRPr b="0" lang="es-ES" sz="2000" strike="noStrike" u="none">
+              <a:solidFill>
+                <a:srgbClr val="000000"/>
+              </a:solidFill>
+              <a:effectLst/>
+              <a:uFillTx/>
+              <a:latin typeface="Arial"/>
+            </a:endParaRPr>
+          </a:p>
+          <a:p>
+            <a:pPr lvl="3" marL="1600200" indent="-228600" defTabSz="914400">
+              <a:lnSpc>
+                <a:spcPct val="90000"/>
+              </a:lnSpc>
+              <a:spcBef>
+                <a:spcPts val="499"/>
+              </a:spcBef>
+              <a:buClr>
+                <a:srgbClr val="000000"/>
+              </a:buClr>
+              <a:buFont typeface="Arial"/>
+              <a:buChar char="•"/>
+            </a:pPr>
+            <a:r>
+              <a:rPr b="0" lang="es-ES" sz="1800" strike="noStrike" u="none">
+                <a:solidFill>
+                  <a:schemeClr val="dk1"/>
+                </a:solidFill>
+                <a:effectLst/>
+                <a:uFillTx/>
+                <a:latin typeface="Calibri"/>
+              </a:rPr>
+              <a:t>Cuarto nivel</a:t>
+            </a:r>
+            <a:endParaRPr b="0" lang="es-ES" sz="1800" strike="noStrike" u="none">
+              <a:solidFill>
+                <a:srgbClr val="000000"/>
+              </a:solidFill>
+              <a:effectLst/>
+              <a:uFillTx/>
+              <a:latin typeface="Arial"/>
+            </a:endParaRPr>
+          </a:p>
+          <a:p>
+            <a:pPr lvl="4" marL="2057400" indent="-228600" defTabSz="914400">
+              <a:lnSpc>
+                <a:spcPct val="90000"/>
+              </a:lnSpc>
+              <a:spcBef>
+                <a:spcPts val="499"/>
+              </a:spcBef>
+              <a:buClr>
+                <a:srgbClr val="000000"/>
+              </a:buClr>
+              <a:buFont typeface="Arial"/>
+              <a:buChar char="•"/>
+            </a:pPr>
+            <a:r>
+              <a:rPr b="0" lang="es-ES" sz="1800" strike="noStrike" u="none">
+                <a:solidFill>
+                  <a:schemeClr val="dk1"/>
+                </a:solidFill>
+                <a:effectLst/>
+                <a:uFillTx/>
+                <a:latin typeface="Calibri"/>
+              </a:rPr>
+              <a:t>Quinto nivel</a:t>
+            </a:r>
+            <a:endParaRPr b="0" lang="es-ES" sz="1800" strike="noStrike" u="none">
+              <a:solidFill>
+                <a:srgbClr val="000000"/>
+              </a:solidFill>
+              <a:effectLst/>
+              <a:uFillTx/>
+              <a:latin typeface="Arial"/>
+            </a:endParaRPr>
+          </a:p>
+        </p:txBody>
+      </p:sp>
+      <p:sp>
+        <p:nvSpPr>
+          <p:cNvPr id="54" name="PlaceHolder 4"/>
+          <p:cNvSpPr>
+            <a:spLocks noGrp="1"/>
+          </p:cNvSpPr>
+          <p:nvPr>
+            <p:ph type="body"/>
+          </p:nvPr>
+        </p:nvSpPr>
+        <p:spPr>
+          <a:xfrm>
+            <a:off x="6172200" y="1681200"/>
+            <a:ext cx="5181120" cy="821880"/>
+          </a:xfrm>
+          <a:prstGeom prst="rect">
+            <a:avLst/>
+          </a:prstGeom>
+          <a:noFill/>
+          <a:ln w="0">
+            <a:noFill/>
+          </a:ln>
+        </p:spPr>
+        <p:txBody>
+          <a:bodyPr lIns="91440" rIns="91440" tIns="45720" bIns="45720" anchor="b">
+            <a:noAutofit/>
+          </a:bodyPr>
+          <a:p>
+            <a:pPr indent="0" defTabSz="914400">
+              <a:lnSpc>
+                <a:spcPct val="90000"/>
+              </a:lnSpc>
+              <a:spcBef>
+                <a:spcPts val="1001"/>
+              </a:spcBef>
+              <a:buNone/>
+              <a:tabLst>
+                <a:tab algn="l" pos="0"/>
+              </a:tabLst>
+            </a:pPr>
+            <a:r>
+              <a:rPr b="1" lang="es-ES" sz="2400" strike="noStrike" u="none">
+                <a:solidFill>
+                  <a:schemeClr val="dk1"/>
+                </a:solidFill>
+                <a:effectLst/>
+                <a:uFillTx/>
+                <a:latin typeface="Calibri"/>
+              </a:rPr>
+              <a:t>Haga clic para modificar los estilos de texto del patrón</a:t>
+            </a:r>
+            <a:endParaRPr b="0" lang="es-ES" sz="2400" strike="noStrike" u="none">
+              <a:solidFill>
+                <a:srgbClr val="000000"/>
+              </a:solidFill>
+              <a:effectLst/>
+              <a:uFillTx/>
+              <a:latin typeface="Arial"/>
+            </a:endParaRPr>
+          </a:p>
+        </p:txBody>
+      </p:sp>
+      <p:sp>
+        <p:nvSpPr>
+          <p:cNvPr id="55" name="PlaceHolder 5"/>
+          <p:cNvSpPr>
+            <a:spLocks noGrp="1"/>
+          </p:cNvSpPr>
+          <p:nvPr>
+            <p:ph type="body"/>
+          </p:nvPr>
+        </p:nvSpPr>
+        <p:spPr>
+          <a:xfrm>
+            <a:off x="6172200" y="2505240"/>
+            <a:ext cx="5181120" cy="3682440"/>
+          </a:xfrm>
+          <a:prstGeom prst="rect">
+            <a:avLst/>
+          </a:prstGeom>
+          <a:noFill/>
+          <a:ln w="0">
+            <a:noFill/>
+          </a:ln>
+        </p:spPr>
+        <p:txBody>
+          <a:bodyPr lIns="91440" rIns="91440" tIns="45720" bIns="45720" anchor="t">
+            <a:noAutofit/>
+          </a:bodyPr>
+          <a:p>
+            <a:pPr marL="228600" indent="-228600" defTabSz="914400">
+              <a:lnSpc>
+                <a:spcPct val="90000"/>
+              </a:lnSpc>
+              <a:spcBef>
+                <a:spcPts val="1001"/>
+              </a:spcBef>
+              <a:buClr>
+                <a:srgbClr val="000000"/>
+              </a:buClr>
+              <a:buFont typeface="Arial"/>
+              <a:buChar char="•"/>
+            </a:pPr>
+            <a:r>
+              <a:rPr b="0" lang="es-ES" sz="2800" strike="noStrike" u="none">
+                <a:solidFill>
+                  <a:schemeClr val="dk1"/>
+                </a:solidFill>
+                <a:effectLst/>
+                <a:uFillTx/>
+                <a:latin typeface="Calibri"/>
+              </a:rPr>
+              <a:t>Haga clic para modificar los estilos de texto del patrón</a:t>
+            </a:r>
+            <a:endParaRPr b="0" lang="es-ES" sz="2800" strike="noStrike" u="none">
+              <a:solidFill>
+                <a:srgbClr val="000000"/>
+              </a:solidFill>
+              <a:effectLst/>
+              <a:uFillTx/>
+              <a:latin typeface="Arial"/>
+            </a:endParaRPr>
+          </a:p>
+          <a:p>
+            <a:pPr lvl="1" marL="685800" indent="-228600" defTabSz="914400">
+              <a:lnSpc>
+                <a:spcPct val="90000"/>
+              </a:lnSpc>
+              <a:spcBef>
+                <a:spcPts val="499"/>
+              </a:spcBef>
+              <a:buClr>
+                <a:srgbClr val="000000"/>
+              </a:buClr>
+              <a:buFont typeface="Arial"/>
+              <a:buChar char="•"/>
+            </a:pPr>
+            <a:r>
+              <a:rPr b="0" lang="es-ES" sz="2400" strike="noStrike" u="none">
+                <a:solidFill>
+                  <a:schemeClr val="dk1"/>
+                </a:solidFill>
+                <a:effectLst/>
+                <a:uFillTx/>
+                <a:latin typeface="Calibri"/>
+              </a:rPr>
+              <a:t>Segundo nivel</a:t>
+            </a:r>
+            <a:endParaRPr b="0" lang="es-ES" sz="2400" strike="noStrike" u="none">
+              <a:solidFill>
+                <a:srgbClr val="000000"/>
+              </a:solidFill>
+              <a:effectLst/>
+              <a:uFillTx/>
+              <a:latin typeface="Arial"/>
+            </a:endParaRPr>
+          </a:p>
+          <a:p>
+            <a:pPr lvl="2" marL="1143000" indent="-228600" defTabSz="914400">
+              <a:lnSpc>
+                <a:spcPct val="90000"/>
+              </a:lnSpc>
+              <a:spcBef>
+                <a:spcPts val="499"/>
+              </a:spcBef>
+              <a:buClr>
+                <a:srgbClr val="000000"/>
+              </a:buClr>
+              <a:buFont typeface="Arial"/>
+              <a:buChar char="•"/>
+            </a:pPr>
+            <a:r>
+              <a:rPr b="0" lang="es-ES" sz="2000" strike="noStrike" u="none">
+                <a:solidFill>
+                  <a:schemeClr val="dk1"/>
+                </a:solidFill>
+                <a:effectLst/>
+                <a:uFillTx/>
+                <a:latin typeface="Calibri"/>
+              </a:rPr>
+              <a:t>Tercer nivel</a:t>
+            </a:r>
+            <a:endParaRPr b="0" lang="es-ES" sz="2000" strike="noStrike" u="none">
+              <a:solidFill>
+                <a:srgbClr val="000000"/>
+              </a:solidFill>
+              <a:effectLst/>
+              <a:uFillTx/>
+              <a:latin typeface="Arial"/>
+            </a:endParaRPr>
+          </a:p>
+          <a:p>
+            <a:pPr lvl="3" marL="1600200" indent="-228600" defTabSz="914400">
+              <a:lnSpc>
+                <a:spcPct val="90000"/>
+              </a:lnSpc>
+              <a:spcBef>
+                <a:spcPts val="499"/>
+              </a:spcBef>
+              <a:buClr>
+                <a:srgbClr val="000000"/>
+              </a:buClr>
+              <a:buFont typeface="Arial"/>
+              <a:buChar char="•"/>
+            </a:pPr>
+            <a:r>
+              <a:rPr b="0" lang="es-ES" sz="1800" strike="noStrike" u="none">
+                <a:solidFill>
+                  <a:schemeClr val="dk1"/>
+                </a:solidFill>
+                <a:effectLst/>
+                <a:uFillTx/>
+                <a:latin typeface="Calibri"/>
+              </a:rPr>
+              <a:t>Cuarto nivel</a:t>
+            </a:r>
+            <a:endParaRPr b="0" lang="es-ES" sz="1800" strike="noStrike" u="none">
+              <a:solidFill>
+                <a:srgbClr val="000000"/>
+              </a:solidFill>
+              <a:effectLst/>
+              <a:uFillTx/>
+              <a:latin typeface="Arial"/>
+            </a:endParaRPr>
+          </a:p>
+          <a:p>
+            <a:pPr lvl="4" marL="2057400" indent="-228600" defTabSz="914400">
+              <a:lnSpc>
+                <a:spcPct val="90000"/>
+              </a:lnSpc>
+              <a:spcBef>
+                <a:spcPts val="499"/>
+              </a:spcBef>
+              <a:buClr>
+                <a:srgbClr val="000000"/>
+              </a:buClr>
+              <a:buFont typeface="Arial"/>
+              <a:buChar char="•"/>
+            </a:pPr>
+            <a:r>
+              <a:rPr b="0" lang="es-ES" sz="1800" strike="noStrike" u="none">
+                <a:solidFill>
+                  <a:schemeClr val="dk1"/>
+                </a:solidFill>
+                <a:effectLst/>
+                <a:uFillTx/>
+                <a:latin typeface="Calibri"/>
+              </a:rPr>
+              <a:t>Quinto nivel</a:t>
+            </a:r>
+            <a:endParaRPr b="0" lang="es-ES" sz="1800" strike="noStrike" u="none">
+              <a:solidFill>
+                <a:srgbClr val="000000"/>
+              </a:solidFill>
+              <a:effectLst/>
+              <a:uFillTx/>
+              <a:latin typeface="Arial"/>
+            </a:endParaRPr>
+          </a:p>
+        </p:txBody>
+      </p:sp>
+      <p:sp>
+        <p:nvSpPr>
+          <p:cNvPr id="56" name="PlaceHolder 6"/>
+          <p:cNvSpPr>
+            <a:spLocks noGrp="1"/>
+          </p:cNvSpPr>
+          <p:nvPr>
+            <p:ph type="dt" idx="31"/>
+          </p:nvPr>
+        </p:nvSpPr>
+        <p:spPr>
+          <a:xfrm>
+            <a:off x="838080" y="6356520"/>
+            <a:ext cx="2741040" cy="362880"/>
+          </a:xfrm>
+          <a:prstGeom prst="rect">
+            <a:avLst/>
+          </a:prstGeom>
+          <a:noFill/>
+          <a:ln w="0">
+            <a:noFill/>
+          </a:ln>
+        </p:spPr>
+        <p:txBody>
+          <a:bodyPr lIns="91440" rIns="91440" tIns="45720" bIns="45720" anchor="ctr">
+            <a:noAutofit/>
+          </a:bodyPr>
+          <a:lstStyle>
+            <a:lvl1pPr indent="0" defTabSz="914400">
+              <a:lnSpc>
+                <a:spcPct val="100000"/>
+              </a:lnSpc>
+              <a:buNone/>
+              <a:tabLst>
+                <a:tab algn="l" pos="0"/>
+              </a:tabLst>
+              <a:defRPr b="0" lang="en-GB" sz="1200" strike="noStrike" u="none">
+                <a:solidFill>
+                  <a:schemeClr val="dk1">
+                    <a:tint val="75000"/>
+                  </a:schemeClr>
+                </a:solidFill>
+                <a:effectLst/>
+                <a:uFillTx/>
+                <a:latin typeface="Calibri"/>
+              </a:defRPr>
+            </a:lvl1pPr>
+          </a:lstStyle>
+          <a:p>
+            <a:pPr indent="0" defTabSz="914400">
+              <a:lnSpc>
+                <a:spcPct val="100000"/>
+              </a:lnSpc>
+              <a:buNone/>
+              <a:tabLst>
+                <a:tab algn="l" pos="0"/>
+              </a:tabLst>
+            </a:pPr>
+            <a:r>
+              <a:rPr b="0" lang="en-GB" sz="1200" strike="noStrike" u="none">
+                <a:solidFill>
+                  <a:schemeClr val="dk1">
+                    <a:tint val="75000"/>
+                  </a:schemeClr>
+                </a:solidFill>
+                <a:effectLst/>
+                <a:uFillTx/>
+                <a:latin typeface="Calibri"/>
+              </a:rPr>
+              <a:t>&lt;fecha/hora&gt;</a:t>
+            </a:r>
+            <a:endParaRPr b="0" lang="es-ES" sz="1200" strike="noStrike" u="none">
+              <a:solidFill>
+                <a:srgbClr val="000000"/>
+              </a:solidFill>
+              <a:effectLst/>
+              <a:uFillTx/>
+              <a:latin typeface="Times New Roman"/>
+            </a:endParaRPr>
+          </a:p>
+        </p:txBody>
+      </p:sp>
+      <p:sp>
+        <p:nvSpPr>
+          <p:cNvPr id="57" name="PlaceHolder 7"/>
+          <p:cNvSpPr>
+            <a:spLocks noGrp="1"/>
+          </p:cNvSpPr>
+          <p:nvPr>
+            <p:ph type="ftr" idx="32"/>
+          </p:nvPr>
+        </p:nvSpPr>
+        <p:spPr>
+          <a:xfrm>
+            <a:off x="4038480" y="6356520"/>
+            <a:ext cx="4112640" cy="362880"/>
+          </a:xfrm>
+          <a:prstGeom prst="rect">
+            <a:avLst/>
+          </a:prstGeom>
+          <a:noFill/>
+          <a:ln w="0">
+            <a:noFill/>
+          </a:ln>
+        </p:spPr>
+        <p:txBody>
+          <a:bodyPr lIns="91440" rIns="91440" tIns="45720" bIns="45720" anchor="ctr">
+            <a:noAutofit/>
+          </a:bodyPr>
+          <a:lstStyle>
+            <a:lvl1pPr indent="0" algn="ctr">
+              <a:lnSpc>
+                <a:spcPct val="100000"/>
+              </a:lnSpc>
+              <a:buNone/>
+              <a:tabLst>
+                <a:tab algn="l" pos="0"/>
+              </a:tabLst>
+              <a:defRPr b="0" lang="es-ES" sz="1400" strike="noStrike" u="none">
+                <a:solidFill>
+                  <a:srgbClr val="000000"/>
+                </a:solidFill>
+                <a:effectLst/>
+                <a:uFillTx/>
+                <a:latin typeface="Times New Roman"/>
+              </a:defRPr>
+            </a:lvl1pPr>
+          </a:lstStyle>
+          <a:p>
+            <a:pPr indent="0" algn="ctr">
+              <a:lnSpc>
+                <a:spcPct val="100000"/>
+              </a:lnSpc>
+              <a:buNone/>
+              <a:tabLst>
+                <a:tab algn="l" pos="0"/>
+              </a:tabLst>
+            </a:pPr>
+            <a:r>
+              <a:rPr b="0" lang="es-ES" sz="1400" strike="noStrike" u="none">
+                <a:solidFill>
+                  <a:srgbClr val="000000"/>
+                </a:solidFill>
+                <a:effectLst/>
+                <a:uFillTx/>
+                <a:latin typeface="Times New Roman"/>
+              </a:rPr>
+              <a:t>&lt;pie de página&gt;</a:t>
+            </a:r>
+            <a:endParaRPr b="0" lang="es-ES" sz="1400" strike="noStrike" u="none">
+              <a:solidFill>
+                <a:srgbClr val="000000"/>
+              </a:solidFill>
+              <a:effectLst/>
+              <a:uFillTx/>
+              <a:latin typeface="Times New Roman"/>
+            </a:endParaRPr>
+          </a:p>
+        </p:txBody>
+      </p:sp>
+      <p:sp>
+        <p:nvSpPr>
+          <p:cNvPr id="58" name="PlaceHolder 8"/>
+          <p:cNvSpPr>
+            <a:spLocks noGrp="1"/>
+          </p:cNvSpPr>
+          <p:nvPr>
+            <p:ph type="sldNum" idx="33"/>
+          </p:nvPr>
+        </p:nvSpPr>
+        <p:spPr>
+          <a:xfrm>
+            <a:off x="8610480" y="6356520"/>
+            <a:ext cx="2741040" cy="362880"/>
+          </a:xfrm>
+          <a:prstGeom prst="rect">
+            <a:avLst/>
+          </a:prstGeom>
+          <a:noFill/>
+          <a:ln w="0">
+            <a:noFill/>
+          </a:ln>
+        </p:spPr>
+        <p:txBody>
+          <a:bodyPr lIns="91440" rIns="91440" tIns="45720" bIns="45720" anchor="ctr">
+            <a:noAutofit/>
+          </a:bodyPr>
+          <a:lstStyle>
+            <a:lvl1pPr indent="0" algn="r" defTabSz="914400">
+              <a:lnSpc>
+                <a:spcPct val="100000"/>
+              </a:lnSpc>
+              <a:buNone/>
+              <a:tabLst>
+                <a:tab algn="l" pos="0"/>
+              </a:tabLst>
+              <a:defRPr b="0" lang="en-GB" sz="1200" strike="noStrike" u="none">
+                <a:solidFill>
+                  <a:schemeClr val="dk1">
+                    <a:tint val="75000"/>
+                  </a:schemeClr>
+                </a:solidFill>
+                <a:effectLst/>
+                <a:uFillTx/>
+                <a:latin typeface="Calibri"/>
+              </a:defRPr>
+            </a:lvl1pPr>
+          </a:lstStyle>
+          <a:p>
+            <a:pPr indent="0" algn="r" defTabSz="914400">
+              <a:lnSpc>
+                <a:spcPct val="100000"/>
+              </a:lnSpc>
+              <a:buNone/>
+              <a:tabLst>
+                <a:tab algn="l" pos="0"/>
+              </a:tabLst>
+            </a:pPr>
+            <a:fld id="{46CCA55B-73DC-402B-A265-F78F2B1C889B}" type="slidenum">
+              <a:rPr b="0" lang="en-GB" sz="1200" strike="noStrike" u="none">
+                <a:solidFill>
+                  <a:schemeClr val="dk1">
+                    <a:tint val="75000"/>
+                  </a:schemeClr>
+                </a:solidFill>
+                <a:effectLst/>
+                <a:uFillTx/>
+                <a:latin typeface="Calibri"/>
+              </a:rPr>
+              <a:t>&lt;número&gt;</a:t>
+            </a:fld>
+            <a:endParaRPr b="0" lang="es-ES" sz="1200" strike="noStrike" u="none">
+              <a:solidFill>
+                <a:srgbClr val="000000"/>
+              </a:solidFill>
+              <a:effectLst/>
+              <a:uFillTx/>
+              <a:latin typeface="Times New Roman"/>
+            </a:endParaRPr>
+          </a:p>
+        </p:txBody>
+      </p:sp>
+    </p:spTree>
+  </p:cSld>
+</p:sldLayout>
+</file>
+
+<file path=ppt/slideLayouts/slideLayout2.xml><?xml version="1.0" encoding="utf-8"?>
 <p:sldLayout xmlns:a="http://schemas.openxmlformats.org/drawingml/2006/main" xmlns:p="http://schemas.openxmlformats.org/presentationml/2006/main" xmlns:r="http://schemas.openxmlformats.org/officeDocument/2006/relationships" xmlns:p14="http://schemas.microsoft.com/office/powerpoint/2010/main" xmlns:p15="http://schemas.microsoft.com/office/powerpoint/2012/main" xmlns:mc="http://schemas.openxmlformats.org/markup-compatibility/2006" type="blank" preserve="1">
   <p:cSld name="En blanco">
     <p:bg>
@@ -705,18 +1948,18 @@
       </p:grpSpPr>
       <p:sp>
         <p:nvSpPr>
-          <p:cNvPr id="48" name="PlaceHolder 1"/>
+          <p:cNvPr id="4" name="PlaceHolder 1"/>
           <p:cNvSpPr>
             <a:spLocks noGrp="1"/>
           </p:cNvSpPr>
           <p:nvPr>
-            <p:ph type="dt" idx="28"/>
+            <p:ph type="dt" idx="4"/>
           </p:nvPr>
         </p:nvSpPr>
         <p:spPr>
           <a:xfrm>
             <a:off x="838080" y="6356520"/>
-            <a:ext cx="2741400" cy="363240"/>
+            <a:ext cx="2741040" cy="362880"/>
           </a:xfrm>
           <a:prstGeom prst="rect">
             <a:avLst/>
@@ -772,7 +2015,7 @@
                 <a:uFillTx/>
                 <a:latin typeface="Calibri"/>
               </a:rPr>
-              <a:t>&lt;fecha/hora&gt;</a:t>
+              <a:t> </a:t>
             </a:r>
             <a:endParaRPr b="0" lang="es-ES" sz="1200" strike="noStrike" u="none">
               <a:solidFill>
@@ -787,18 +2030,18 @@
       </p:sp>
       <p:sp>
         <p:nvSpPr>
-          <p:cNvPr id="49" name="PlaceHolder 2"/>
+          <p:cNvPr id="5" name="PlaceHolder 2"/>
           <p:cNvSpPr>
             <a:spLocks noGrp="1"/>
           </p:cNvSpPr>
           <p:nvPr>
-            <p:ph type="ftr" idx="29"/>
+            <p:ph type="ftr" idx="5"/>
           </p:nvPr>
         </p:nvSpPr>
         <p:spPr>
           <a:xfrm>
             <a:off x="4038480" y="6356520"/>
-            <a:ext cx="4113000" cy="363240"/>
+            <a:ext cx="4112640" cy="362880"/>
           </a:xfrm>
           <a:prstGeom prst="rect">
             <a:avLst/>
@@ -850,7 +2093,7 @@
                 <a:uFillTx/>
                 <a:latin typeface="Times New Roman"/>
               </a:rPr>
-              <a:t>&lt;pie de página&gt;</a:t>
+              <a:t> </a:t>
             </a:r>
             <a:endParaRPr b="0" lang="es-ES" sz="1400" strike="noStrike" u="none">
               <a:solidFill>
@@ -865,18 +2108,18 @@
       </p:sp>
       <p:sp>
         <p:nvSpPr>
-          <p:cNvPr id="50" name="PlaceHolder 3"/>
+          <p:cNvPr id="6" name="PlaceHolder 3"/>
           <p:cNvSpPr>
             <a:spLocks noGrp="1"/>
           </p:cNvSpPr>
           <p:nvPr>
-            <p:ph type="sldNum" idx="30"/>
+            <p:ph type="sldNum" idx="6"/>
           </p:nvPr>
         </p:nvSpPr>
         <p:spPr>
           <a:xfrm>
             <a:off x="8610480" y="6356520"/>
-            <a:ext cx="2741400" cy="363240"/>
+            <a:ext cx="2741040" cy="362880"/>
           </a:xfrm>
           <a:prstGeom prst="rect">
             <a:avLst/>
@@ -921,7 +2164,7 @@
                 <a:tab algn="l" pos="0"/>
               </a:tabLst>
             </a:pPr>
-            <a:fld id="{D378AD6D-461B-4112-85D7-8FAE067912D0}" type="slidenum">
+            <a:fld id="{175CE094-CAD5-476E-B0EB-3ADC5806E0AC}" type="slidenum">
               <a:rPr b="0" lang="en-GB" sz="1200" strike="noStrike" u="none">
                 <a:solidFill>
                   <a:schemeClr val="dk1">
@@ -932,7 +2175,7 @@
                 <a:uFillTx/>
                 <a:latin typeface="Calibri"/>
               </a:rPr>
-              <a:t>&lt;número&gt;</a:t>
+              <a:t>1</a:t>
             </a:fld>
             <a:endParaRPr b="0" lang="es-ES" sz="1200" strike="noStrike" u="none">
               <a:solidFill>
@@ -947,7 +2190,7 @@
       </p:sp>
       <p:sp>
         <p:nvSpPr>
-          <p:cNvPr id="51" name="PlaceHolder 4"/>
+          <p:cNvPr id="7" name="PlaceHolder 4"/>
           <p:cNvSpPr>
             <a:spLocks noGrp="1"/>
           </p:cNvSpPr>
@@ -958,7 +2201,7 @@
         <p:spPr>
           <a:xfrm>
             <a:off x="609480" y="273600"/>
-            <a:ext cx="10971360" cy="1143720"/>
+            <a:ext cx="10971000" cy="1143360"/>
           </a:xfrm>
           <a:prstGeom prst="rect">
             <a:avLst/>
@@ -1006,7 +2249,7 @@
       </p:sp>
       <p:sp>
         <p:nvSpPr>
-          <p:cNvPr id="52" name="PlaceHolder 5"/>
+          <p:cNvPr id="8" name="PlaceHolder 5"/>
           <p:cNvSpPr>
             <a:spLocks noGrp="1"/>
           </p:cNvSpPr>
@@ -1017,7 +2260,7 @@
         <p:spPr>
           <a:xfrm>
             <a:off x="609480" y="1604520"/>
-            <a:ext cx="10971360" cy="3976200"/>
+            <a:ext cx="10971000" cy="3975840"/>
           </a:xfrm>
           <a:prstGeom prst="rect">
             <a:avLst/>
@@ -1283,7 +2526,7 @@
 </p:sldLayout>
 </file>
 
-<file path=ppt/slideLayouts/slideLayout11.xml><?xml version="1.0" encoding="utf-8"?>
+<file path=ppt/slideLayouts/slideLayout3.xml><?xml version="1.0" encoding="utf-8"?>
 <p:sldLayout xmlns:a="http://schemas.openxmlformats.org/drawingml/2006/main" xmlns:p="http://schemas.openxmlformats.org/presentationml/2006/main" xmlns:r="http://schemas.openxmlformats.org/officeDocument/2006/relationships" xmlns:p14="http://schemas.microsoft.com/office/powerpoint/2010/main" xmlns:p15="http://schemas.microsoft.com/office/powerpoint/2012/main" xmlns:mc="http://schemas.openxmlformats.org/markup-compatibility/2006" type="blank" preserve="1">
   <p:cSld name="Contenido con título">
     <p:bg>
@@ -1309,7 +2552,7 @@
       </p:grpSpPr>
       <p:sp>
         <p:nvSpPr>
-          <p:cNvPr id="53" name="PlaceHolder 1"/>
+          <p:cNvPr id="9" name="PlaceHolder 1"/>
           <p:cNvSpPr>
             <a:spLocks noGrp="1"/>
           </p:cNvSpPr>
@@ -1320,7 +2563,7 @@
         <p:spPr>
           <a:xfrm>
             <a:off x="839880" y="457200"/>
-            <a:ext cx="3930480" cy="1598400"/>
+            <a:ext cx="3930120" cy="1598040"/>
           </a:xfrm>
           <a:prstGeom prst="rect">
             <a:avLst/>
@@ -1368,7 +2611,7 @@
       </p:sp>
       <p:sp>
         <p:nvSpPr>
-          <p:cNvPr id="54" name="PlaceHolder 2"/>
+          <p:cNvPr id="10" name="PlaceHolder 2"/>
           <p:cNvSpPr>
             <a:spLocks noGrp="1"/>
           </p:cNvSpPr>
@@ -1379,7 +2622,7 @@
         <p:spPr>
           <a:xfrm>
             <a:off x="5183280" y="987480"/>
-            <a:ext cx="6170400" cy="4871880"/>
+            <a:ext cx="6170040" cy="4871520"/>
           </a:xfrm>
           <a:prstGeom prst="rect">
             <a:avLst/>
@@ -1567,7 +2810,7 @@
       </p:sp>
       <p:sp>
         <p:nvSpPr>
-          <p:cNvPr id="55" name="PlaceHolder 3"/>
+          <p:cNvPr id="11" name="PlaceHolder 3"/>
           <p:cNvSpPr>
             <a:spLocks noGrp="1"/>
           </p:cNvSpPr>
@@ -1578,7 +2821,7 @@
         <p:spPr>
           <a:xfrm>
             <a:off x="839880" y="2057400"/>
-            <a:ext cx="3930480" cy="3809880"/>
+            <a:ext cx="3930120" cy="3809520"/>
           </a:xfrm>
           <a:prstGeom prst="rect">
             <a:avLst/>
@@ -1629,18 +2872,18 @@
       </p:sp>
       <p:sp>
         <p:nvSpPr>
-          <p:cNvPr id="56" name="PlaceHolder 4"/>
+          <p:cNvPr id="12" name="PlaceHolder 4"/>
           <p:cNvSpPr>
             <a:spLocks noGrp="1"/>
           </p:cNvSpPr>
           <p:nvPr>
-            <p:ph type="dt" idx="31"/>
+            <p:ph type="dt" idx="7"/>
           </p:nvPr>
         </p:nvSpPr>
         <p:spPr>
           <a:xfrm>
             <a:off x="838080" y="6356520"/>
-            <a:ext cx="2741400" cy="363240"/>
+            <a:ext cx="2741040" cy="362880"/>
           </a:xfrm>
           <a:prstGeom prst="rect">
             <a:avLst/>
@@ -1711,18 +2954,18 @@
       </p:sp>
       <p:sp>
         <p:nvSpPr>
-          <p:cNvPr id="57" name="PlaceHolder 5"/>
+          <p:cNvPr id="13" name="PlaceHolder 5"/>
           <p:cNvSpPr>
             <a:spLocks noGrp="1"/>
           </p:cNvSpPr>
           <p:nvPr>
-            <p:ph type="ftr" idx="32"/>
+            <p:ph type="ftr" idx="8"/>
           </p:nvPr>
         </p:nvSpPr>
         <p:spPr>
           <a:xfrm>
             <a:off x="4038480" y="6356520"/>
-            <a:ext cx="4113000" cy="363240"/>
+            <a:ext cx="4112640" cy="362880"/>
           </a:xfrm>
           <a:prstGeom prst="rect">
             <a:avLst/>
@@ -1789,18 +3032,18 @@
       </p:sp>
       <p:sp>
         <p:nvSpPr>
-          <p:cNvPr id="58" name="PlaceHolder 6"/>
+          <p:cNvPr id="14" name="PlaceHolder 6"/>
           <p:cNvSpPr>
             <a:spLocks noGrp="1"/>
           </p:cNvSpPr>
           <p:nvPr>
-            <p:ph type="sldNum" idx="33"/>
+            <p:ph type="sldNum" idx="9"/>
           </p:nvPr>
         </p:nvSpPr>
         <p:spPr>
           <a:xfrm>
             <a:off x="8610480" y="6356520"/>
-            <a:ext cx="2741400" cy="363240"/>
+            <a:ext cx="2741040" cy="362880"/>
           </a:xfrm>
           <a:prstGeom prst="rect">
             <a:avLst/>
@@ -1845,866 +3088,7 @@
                 <a:tab algn="l" pos="0"/>
               </a:tabLst>
             </a:pPr>
-            <a:fld id="{0031C69C-04E6-4589-BB20-39386C5B0CAF}" type="slidenum">
-              <a:rPr b="0" lang="en-GB" sz="1200" strike="noStrike" u="none">
-                <a:solidFill>
-                  <a:schemeClr val="dk1">
-                    <a:tint val="75000"/>
-                  </a:schemeClr>
-                </a:solidFill>
-                <a:effectLst/>
-                <a:uFillTx/>
-                <a:latin typeface="Calibri"/>
-              </a:rPr>
-              <a:t>&lt;número&gt;</a:t>
-            </a:fld>
-            <a:endParaRPr b="0" lang="es-ES" sz="1200" strike="noStrike" u="none">
-              <a:solidFill>
-                <a:srgbClr val="000000"/>
-              </a:solidFill>
-              <a:effectLst/>
-              <a:uFillTx/>
-              <a:latin typeface="Times New Roman"/>
-            </a:endParaRPr>
-          </a:p>
-        </p:txBody>
-      </p:sp>
-    </p:spTree>
-  </p:cSld>
-</p:sldLayout>
-</file>
-
-<file path=ppt/slideLayouts/slideLayout2.xml><?xml version="1.0" encoding="utf-8"?>
-<p:sldLayout xmlns:a="http://schemas.openxmlformats.org/drawingml/2006/main" xmlns:p="http://schemas.openxmlformats.org/presentationml/2006/main" xmlns:r="http://schemas.openxmlformats.org/officeDocument/2006/relationships" xmlns:p14="http://schemas.microsoft.com/office/powerpoint/2010/main" xmlns:p15="http://schemas.microsoft.com/office/powerpoint/2012/main" xmlns:mc="http://schemas.openxmlformats.org/markup-compatibility/2006" type="title" preserve="1">
-  <p:cSld name="Diapositiva de título">
-    <p:bg>
-      <p:bgPr>
-        <a:solidFill>
-          <a:srgbClr val="ffffff"/>
-        </a:solidFill>
-      </p:bgPr>
-    </p:bg>
-    <p:spTree>
-      <p:nvGrpSpPr>
-        <p:cNvPr id="1" name=""/>
-        <p:cNvGrpSpPr/>
-        <p:nvPr/>
-      </p:nvGrpSpPr>
-      <p:grpSpPr>
-        <a:xfrm>
-          <a:off x="0" y="0"/>
-          <a:ext cx="0" cy="0"/>
-          <a:chOff x="0" y="0"/>
-          <a:chExt cx="0" cy="0"/>
-        </a:xfrm>
-      </p:grpSpPr>
-      <p:sp>
-        <p:nvSpPr>
-          <p:cNvPr id="6" name="PlaceHolder 1"/>
-          <p:cNvSpPr>
-            <a:spLocks noGrp="1"/>
-          </p:cNvSpPr>
-          <p:nvPr>
-            <p:ph type="title"/>
-          </p:nvPr>
-        </p:nvSpPr>
-        <p:spPr>
-          <a:xfrm>
-            <a:off x="1523880" y="1122480"/>
-            <a:ext cx="9142200" cy="2385720"/>
-          </a:xfrm>
-          <a:prstGeom prst="rect">
-            <a:avLst/>
-          </a:prstGeom>
-          <a:noFill/>
-          <a:ln w="0">
-            <a:noFill/>
-          </a:ln>
-        </p:spPr>
-        <p:txBody>
-          <a:bodyPr lIns="91440" rIns="91440" tIns="45720" bIns="45720" anchor="b">
-            <a:noAutofit/>
-          </a:bodyPr>
-          <a:p>
-            <a:pPr indent="0" algn="ctr" defTabSz="914400">
-              <a:lnSpc>
-                <a:spcPct val="90000"/>
-              </a:lnSpc>
-              <a:buNone/>
-              <a:tabLst>
-                <a:tab algn="l" pos="0"/>
-              </a:tabLst>
-            </a:pPr>
-            <a:r>
-              <a:rPr b="0" lang="es-ES" sz="6000" strike="noStrike" u="none">
-                <a:solidFill>
-                  <a:schemeClr val="dk1"/>
-                </a:solidFill>
-                <a:effectLst/>
-                <a:uFillTx/>
-                <a:latin typeface="Calibri Light"/>
-              </a:rPr>
-              <a:t>Haga clic para modificar el estilo de título del patrón</a:t>
-            </a:r>
-            <a:endParaRPr b="0" lang="es-ES" sz="6000" strike="noStrike" u="none">
-              <a:solidFill>
-                <a:srgbClr val="000000"/>
-              </a:solidFill>
-              <a:effectLst/>
-              <a:uFillTx/>
-              <a:latin typeface="Arial"/>
-            </a:endParaRPr>
-          </a:p>
-        </p:txBody>
-      </p:sp>
-      <p:sp>
-        <p:nvSpPr>
-          <p:cNvPr id="7" name="PlaceHolder 2"/>
-          <p:cNvSpPr>
-            <a:spLocks noGrp="1"/>
-          </p:cNvSpPr>
-          <p:nvPr>
-            <p:ph type="dt" idx="4"/>
-          </p:nvPr>
-        </p:nvSpPr>
-        <p:spPr>
-          <a:xfrm>
-            <a:off x="838080" y="6356520"/>
-            <a:ext cx="2741400" cy="363240"/>
-          </a:xfrm>
-          <a:prstGeom prst="rect">
-            <a:avLst/>
-          </a:prstGeom>
-          <a:noFill/>
-          <a:ln w="0">
-            <a:noFill/>
-          </a:ln>
-        </p:spPr>
-        <p:txBody>
-          <a:bodyPr lIns="91440" rIns="91440" tIns="45720" bIns="45720" anchor="ctr">
-            <a:noAutofit/>
-          </a:bodyPr>
-          <a:lstStyle>
-            <a:lvl1pPr indent="0" defTabSz="914400">
-              <a:lnSpc>
-                <a:spcPct val="100000"/>
-              </a:lnSpc>
-              <a:buNone/>
-              <a:tabLst>
-                <a:tab algn="l" pos="0"/>
-              </a:tabLst>
-              <a:defRPr b="0" lang="en-GB" sz="1200" strike="noStrike" u="none">
-                <a:solidFill>
-                  <a:schemeClr val="dk1">
-                    <a:tint val="75000"/>
-                  </a:schemeClr>
-                </a:solidFill>
-                <a:effectLst/>
-                <a:uFillTx/>
-                <a:latin typeface="Calibri"/>
-              </a:defRPr>
-            </a:lvl1pPr>
-          </a:lstStyle>
-          <a:p>
-            <a:pPr indent="0" defTabSz="914400">
-              <a:lnSpc>
-                <a:spcPct val="100000"/>
-              </a:lnSpc>
-              <a:buNone/>
-              <a:tabLst>
-                <a:tab algn="l" pos="0"/>
-              </a:tabLst>
-            </a:pPr>
-            <a:r>
-              <a:rPr b="0" lang="en-GB" sz="1200" strike="noStrike" u="none">
-                <a:solidFill>
-                  <a:schemeClr val="dk1">
-                    <a:tint val="75000"/>
-                  </a:schemeClr>
-                </a:solidFill>
-                <a:effectLst/>
-                <a:uFillTx/>
-                <a:latin typeface="Calibri"/>
-              </a:rPr>
-              <a:t>&lt;fecha/hora&gt;</a:t>
-            </a:r>
-            <a:endParaRPr b="0" lang="es-ES" sz="1200" strike="noStrike" u="none">
-              <a:solidFill>
-                <a:srgbClr val="000000"/>
-              </a:solidFill>
-              <a:effectLst/>
-              <a:uFillTx/>
-              <a:latin typeface="Times New Roman"/>
-            </a:endParaRPr>
-          </a:p>
-        </p:txBody>
-      </p:sp>
-      <p:sp>
-        <p:nvSpPr>
-          <p:cNvPr id="8" name="PlaceHolder 3"/>
-          <p:cNvSpPr>
-            <a:spLocks noGrp="1"/>
-          </p:cNvSpPr>
-          <p:nvPr>
-            <p:ph type="ftr" idx="5"/>
-          </p:nvPr>
-        </p:nvSpPr>
-        <p:spPr>
-          <a:xfrm>
-            <a:off x="4038480" y="6356520"/>
-            <a:ext cx="4113000" cy="363240"/>
-          </a:xfrm>
-          <a:prstGeom prst="rect">
-            <a:avLst/>
-          </a:prstGeom>
-          <a:noFill/>
-          <a:ln w="0">
-            <a:noFill/>
-          </a:ln>
-        </p:spPr>
-        <p:txBody>
-          <a:bodyPr lIns="91440" rIns="91440" tIns="45720" bIns="45720" anchor="ctr">
-            <a:noAutofit/>
-          </a:bodyPr>
-          <a:lstStyle>
-            <a:lvl1pPr indent="0" algn="ctr">
-              <a:lnSpc>
-                <a:spcPct val="100000"/>
-              </a:lnSpc>
-              <a:buNone/>
-              <a:tabLst>
-                <a:tab algn="l" pos="0"/>
-              </a:tabLst>
-              <a:defRPr b="0" lang="es-ES" sz="1400" strike="noStrike" u="none">
-                <a:solidFill>
-                  <a:srgbClr val="000000"/>
-                </a:solidFill>
-                <a:effectLst/>
-                <a:uFillTx/>
-                <a:latin typeface="Times New Roman"/>
-              </a:defRPr>
-            </a:lvl1pPr>
-          </a:lstStyle>
-          <a:p>
-            <a:pPr indent="0" algn="ctr">
-              <a:lnSpc>
-                <a:spcPct val="100000"/>
-              </a:lnSpc>
-              <a:buNone/>
-              <a:tabLst>
-                <a:tab algn="l" pos="0"/>
-              </a:tabLst>
-            </a:pPr>
-            <a:r>
-              <a:rPr b="0" lang="es-ES" sz="1400" strike="noStrike" u="none">
-                <a:solidFill>
-                  <a:srgbClr val="000000"/>
-                </a:solidFill>
-                <a:effectLst/>
-                <a:uFillTx/>
-                <a:latin typeface="Times New Roman"/>
-              </a:rPr>
-              <a:t>&lt;pie de página&gt;</a:t>
-            </a:r>
-            <a:endParaRPr b="0" lang="es-ES" sz="1400" strike="noStrike" u="none">
-              <a:solidFill>
-                <a:srgbClr val="000000"/>
-              </a:solidFill>
-              <a:effectLst/>
-              <a:uFillTx/>
-              <a:latin typeface="Times New Roman"/>
-            </a:endParaRPr>
-          </a:p>
-        </p:txBody>
-      </p:sp>
-      <p:sp>
-        <p:nvSpPr>
-          <p:cNvPr id="9" name="PlaceHolder 4"/>
-          <p:cNvSpPr>
-            <a:spLocks noGrp="1"/>
-          </p:cNvSpPr>
-          <p:nvPr>
-            <p:ph type="sldNum" idx="6"/>
-          </p:nvPr>
-        </p:nvSpPr>
-        <p:spPr>
-          <a:xfrm>
-            <a:off x="8610480" y="6356520"/>
-            <a:ext cx="2741400" cy="363240"/>
-          </a:xfrm>
-          <a:prstGeom prst="rect">
-            <a:avLst/>
-          </a:prstGeom>
-          <a:noFill/>
-          <a:ln w="0">
-            <a:noFill/>
-          </a:ln>
-        </p:spPr>
-        <p:txBody>
-          <a:bodyPr lIns="91440" rIns="91440" tIns="45720" bIns="45720" anchor="ctr">
-            <a:noAutofit/>
-          </a:bodyPr>
-          <a:lstStyle>
-            <a:lvl1pPr indent="0" algn="r" defTabSz="914400">
-              <a:lnSpc>
-                <a:spcPct val="100000"/>
-              </a:lnSpc>
-              <a:buNone/>
-              <a:tabLst>
-                <a:tab algn="l" pos="0"/>
-              </a:tabLst>
-              <a:defRPr b="0" lang="en-GB" sz="1200" strike="noStrike" u="none">
-                <a:solidFill>
-                  <a:schemeClr val="dk1">
-                    <a:tint val="75000"/>
-                  </a:schemeClr>
-                </a:solidFill>
-                <a:effectLst/>
-                <a:uFillTx/>
-                <a:latin typeface="Calibri"/>
-              </a:defRPr>
-            </a:lvl1pPr>
-          </a:lstStyle>
-          <a:p>
-            <a:pPr indent="0" algn="r" defTabSz="914400">
-              <a:lnSpc>
-                <a:spcPct val="100000"/>
-              </a:lnSpc>
-              <a:buNone/>
-              <a:tabLst>
-                <a:tab algn="l" pos="0"/>
-              </a:tabLst>
-            </a:pPr>
-            <a:fld id="{EC0326E7-CBC9-4BD3-B7DD-39BA5ADB9B71}" type="slidenum">
-              <a:rPr b="0" lang="en-GB" sz="1200" strike="noStrike" u="none">
-                <a:solidFill>
-                  <a:schemeClr val="dk1">
-                    <a:tint val="75000"/>
-                  </a:schemeClr>
-                </a:solidFill>
-                <a:effectLst/>
-                <a:uFillTx/>
-                <a:latin typeface="Calibri"/>
-              </a:rPr>
-              <a:t>&lt;número&gt;</a:t>
-            </a:fld>
-            <a:endParaRPr b="0" lang="es-ES" sz="1200" strike="noStrike" u="none">
-              <a:solidFill>
-                <a:srgbClr val="000000"/>
-              </a:solidFill>
-              <a:effectLst/>
-              <a:uFillTx/>
-              <a:latin typeface="Times New Roman"/>
-            </a:endParaRPr>
-          </a:p>
-        </p:txBody>
-      </p:sp>
-    </p:spTree>
-  </p:cSld>
-</p:sldLayout>
-</file>
-
-<file path=ppt/slideLayouts/slideLayout3.xml><?xml version="1.0" encoding="utf-8"?>
-<p:sldLayout xmlns:a="http://schemas.openxmlformats.org/drawingml/2006/main" xmlns:p="http://schemas.openxmlformats.org/presentationml/2006/main" xmlns:r="http://schemas.openxmlformats.org/officeDocument/2006/relationships" xmlns:p14="http://schemas.microsoft.com/office/powerpoint/2010/main" xmlns:p15="http://schemas.microsoft.com/office/powerpoint/2012/main" xmlns:mc="http://schemas.openxmlformats.org/markup-compatibility/2006" type="vertTx" preserve="1">
-  <p:cSld name="Título y texto vertical">
-    <p:bg>
-      <p:bgPr>
-        <a:solidFill>
-          <a:srgbClr val="ffffff"/>
-        </a:solidFill>
-      </p:bgPr>
-    </p:bg>
-    <p:spTree>
-      <p:nvGrpSpPr>
-        <p:cNvPr id="1" name=""/>
-        <p:cNvGrpSpPr/>
-        <p:nvPr/>
-      </p:nvGrpSpPr>
-      <p:grpSpPr>
-        <a:xfrm>
-          <a:off x="0" y="0"/>
-          <a:ext cx="0" cy="0"/>
-          <a:chOff x="0" y="0"/>
-          <a:chExt cx="0" cy="0"/>
-        </a:xfrm>
-      </p:grpSpPr>
-      <p:sp>
-        <p:nvSpPr>
-          <p:cNvPr id="10" name="PlaceHolder 1"/>
-          <p:cNvSpPr>
-            <a:spLocks noGrp="1"/>
-          </p:cNvSpPr>
-          <p:nvPr>
-            <p:ph type="title"/>
-          </p:nvPr>
-        </p:nvSpPr>
-        <p:spPr>
-          <a:xfrm>
-            <a:off x="838080" y="365040"/>
-            <a:ext cx="10513800" cy="1323720"/>
-          </a:xfrm>
-          <a:prstGeom prst="rect">
-            <a:avLst/>
-          </a:prstGeom>
-          <a:noFill/>
-          <a:ln w="0">
-            <a:noFill/>
-          </a:ln>
-        </p:spPr>
-        <p:txBody>
-          <a:bodyPr lIns="91440" rIns="91440" tIns="45720" bIns="45720" anchor="ctr">
-            <a:noAutofit/>
-          </a:bodyPr>
-          <a:p>
-            <a:pPr indent="0" defTabSz="914400">
-              <a:lnSpc>
-                <a:spcPct val="90000"/>
-              </a:lnSpc>
-              <a:buNone/>
-              <a:tabLst>
-                <a:tab algn="l" pos="0"/>
-              </a:tabLst>
-            </a:pPr>
-            <a:r>
-              <a:rPr b="0" lang="es-ES" sz="4400" strike="noStrike" u="none">
-                <a:solidFill>
-                  <a:schemeClr val="dk1"/>
-                </a:solidFill>
-                <a:effectLst/>
-                <a:uFillTx/>
-                <a:latin typeface="Calibri Light"/>
-              </a:rPr>
-              <a:t>Haga clic para modificar el estilo de título del patrón</a:t>
-            </a:r>
-            <a:endParaRPr b="0" lang="es-ES" sz="4400" strike="noStrike" u="none">
-              <a:solidFill>
-                <a:srgbClr val="000000"/>
-              </a:solidFill>
-              <a:effectLst/>
-              <a:uFillTx/>
-              <a:latin typeface="Arial"/>
-            </a:endParaRPr>
-          </a:p>
-        </p:txBody>
-      </p:sp>
-      <p:sp>
-        <p:nvSpPr>
-          <p:cNvPr id="11" name="PlaceHolder 2"/>
-          <p:cNvSpPr>
-            <a:spLocks noGrp="1"/>
-          </p:cNvSpPr>
-          <p:nvPr>
-            <p:ph type="body"/>
-          </p:nvPr>
-        </p:nvSpPr>
-        <p:spPr>
-          <a:xfrm>
-            <a:off x="838080" y="1825560"/>
-            <a:ext cx="10513800" cy="4349520"/>
-          </a:xfrm>
-          <a:prstGeom prst="rect">
-            <a:avLst/>
-          </a:prstGeom>
-          <a:noFill/>
-          <a:ln w="0">
-            <a:noFill/>
-          </a:ln>
-        </p:spPr>
-        <p:txBody>
-          <a:bodyPr lIns="91440" rIns="91440" tIns="45720" bIns="45720" anchor="t" vert="eaVert">
-            <a:noAutofit/>
-          </a:bodyPr>
-          <a:p>
-            <a:pPr marL="228600" indent="-228600" defTabSz="914400">
-              <a:lnSpc>
-                <a:spcPct val="90000"/>
-              </a:lnSpc>
-              <a:spcBef>
-                <a:spcPts val="1001"/>
-              </a:spcBef>
-              <a:buClr>
-                <a:srgbClr val="000000"/>
-              </a:buClr>
-              <a:buFont typeface="Arial"/>
-              <a:buChar char="•"/>
-            </a:pPr>
-            <a:r>
-              <a:rPr b="0" lang="es-ES" sz="2800" strike="noStrike" u="none">
-                <a:solidFill>
-                  <a:schemeClr val="dk1"/>
-                </a:solidFill>
-                <a:effectLst/>
-                <a:uFillTx/>
-                <a:latin typeface="Calibri"/>
-              </a:rPr>
-              <a:t>Haga clic para modificar los estilos de texto del patrón</a:t>
-            </a:r>
-            <a:endParaRPr b="0" lang="es-ES" sz="2800" strike="noStrike" u="none">
-              <a:solidFill>
-                <a:srgbClr val="000000"/>
-              </a:solidFill>
-              <a:effectLst/>
-              <a:uFillTx/>
-              <a:latin typeface="Arial"/>
-            </a:endParaRPr>
-          </a:p>
-          <a:p>
-            <a:pPr lvl="1" marL="685800" indent="-228600" defTabSz="914400">
-              <a:lnSpc>
-                <a:spcPct val="90000"/>
-              </a:lnSpc>
-              <a:spcBef>
-                <a:spcPts val="499"/>
-              </a:spcBef>
-              <a:buClr>
-                <a:srgbClr val="000000"/>
-              </a:buClr>
-              <a:buFont typeface="Arial"/>
-              <a:buChar char="•"/>
-            </a:pPr>
-            <a:r>
-              <a:rPr b="0" lang="es-ES" sz="2400" strike="noStrike" u="none">
-                <a:solidFill>
-                  <a:schemeClr val="dk1"/>
-                </a:solidFill>
-                <a:effectLst/>
-                <a:uFillTx/>
-                <a:latin typeface="Calibri"/>
-              </a:rPr>
-              <a:t>Segundo nivel</a:t>
-            </a:r>
-            <a:endParaRPr b="0" lang="es-ES" sz="2400" strike="noStrike" u="none">
-              <a:solidFill>
-                <a:srgbClr val="000000"/>
-              </a:solidFill>
-              <a:effectLst/>
-              <a:uFillTx/>
-              <a:latin typeface="Arial"/>
-            </a:endParaRPr>
-          </a:p>
-          <a:p>
-            <a:pPr lvl="2" marL="1143000" indent="-228600" defTabSz="914400">
-              <a:lnSpc>
-                <a:spcPct val="90000"/>
-              </a:lnSpc>
-              <a:spcBef>
-                <a:spcPts val="499"/>
-              </a:spcBef>
-              <a:buClr>
-                <a:srgbClr val="000000"/>
-              </a:buClr>
-              <a:buFont typeface="Arial"/>
-              <a:buChar char="•"/>
-            </a:pPr>
-            <a:r>
-              <a:rPr b="0" lang="es-ES" sz="2000" strike="noStrike" u="none">
-                <a:solidFill>
-                  <a:schemeClr val="dk1"/>
-                </a:solidFill>
-                <a:effectLst/>
-                <a:uFillTx/>
-                <a:latin typeface="Calibri"/>
-              </a:rPr>
-              <a:t>Tercer nivel</a:t>
-            </a:r>
-            <a:endParaRPr b="0" lang="es-ES" sz="2000" strike="noStrike" u="none">
-              <a:solidFill>
-                <a:srgbClr val="000000"/>
-              </a:solidFill>
-              <a:effectLst/>
-              <a:uFillTx/>
-              <a:latin typeface="Arial"/>
-            </a:endParaRPr>
-          </a:p>
-          <a:p>
-            <a:pPr lvl="3" marL="1600200" indent="-228600" defTabSz="914400">
-              <a:lnSpc>
-                <a:spcPct val="90000"/>
-              </a:lnSpc>
-              <a:spcBef>
-                <a:spcPts val="499"/>
-              </a:spcBef>
-              <a:buClr>
-                <a:srgbClr val="000000"/>
-              </a:buClr>
-              <a:buFont typeface="Arial"/>
-              <a:buChar char="•"/>
-            </a:pPr>
-            <a:r>
-              <a:rPr b="0" lang="es-ES" sz="1800" strike="noStrike" u="none">
-                <a:solidFill>
-                  <a:schemeClr val="dk1"/>
-                </a:solidFill>
-                <a:effectLst/>
-                <a:uFillTx/>
-                <a:latin typeface="Calibri"/>
-              </a:rPr>
-              <a:t>Cuarto nivel</a:t>
-            </a:r>
-            <a:endParaRPr b="0" lang="es-ES" sz="1800" strike="noStrike" u="none">
-              <a:solidFill>
-                <a:srgbClr val="000000"/>
-              </a:solidFill>
-              <a:effectLst/>
-              <a:uFillTx/>
-              <a:latin typeface="Arial"/>
-            </a:endParaRPr>
-          </a:p>
-          <a:p>
-            <a:pPr lvl="4" marL="2057400" indent="-228600" defTabSz="914400">
-              <a:lnSpc>
-                <a:spcPct val="90000"/>
-              </a:lnSpc>
-              <a:spcBef>
-                <a:spcPts val="499"/>
-              </a:spcBef>
-              <a:buClr>
-                <a:srgbClr val="000000"/>
-              </a:buClr>
-              <a:buFont typeface="Arial"/>
-              <a:buChar char="•"/>
-            </a:pPr>
-            <a:r>
-              <a:rPr b="0" lang="es-ES" sz="1800" strike="noStrike" u="none">
-                <a:solidFill>
-                  <a:schemeClr val="dk1"/>
-                </a:solidFill>
-                <a:effectLst/>
-                <a:uFillTx/>
-                <a:latin typeface="Calibri"/>
-              </a:rPr>
-              <a:t>Quinto nivel</a:t>
-            </a:r>
-            <a:endParaRPr b="0" lang="es-ES" sz="1800" strike="noStrike" u="none">
-              <a:solidFill>
-                <a:srgbClr val="000000"/>
-              </a:solidFill>
-              <a:effectLst/>
-              <a:uFillTx/>
-              <a:latin typeface="Arial"/>
-            </a:endParaRPr>
-          </a:p>
-        </p:txBody>
-      </p:sp>
-      <p:sp>
-        <p:nvSpPr>
-          <p:cNvPr id="12" name="PlaceHolder 3"/>
-          <p:cNvSpPr>
-            <a:spLocks noGrp="1"/>
-          </p:cNvSpPr>
-          <p:nvPr>
-            <p:ph type="dt" idx="7"/>
-          </p:nvPr>
-        </p:nvSpPr>
-        <p:spPr>
-          <a:xfrm>
-            <a:off x="838080" y="6356520"/>
-            <a:ext cx="2741400" cy="363240"/>
-          </a:xfrm>
-          <a:prstGeom prst="rect">
-            <a:avLst/>
-          </a:prstGeom>
-          <a:noFill/>
-          <a:ln w="0">
-            <a:noFill/>
-          </a:ln>
-        </p:spPr>
-        <p:txBody>
-          <a:bodyPr lIns="91440" rIns="91440" tIns="45720" bIns="45720" anchor="ctr">
-            <a:noAutofit/>
-          </a:bodyPr>
-          <a:lstStyle>
-            <a:lvl1pPr indent="0" defTabSz="914400">
-              <a:lnSpc>
-                <a:spcPct val="100000"/>
-              </a:lnSpc>
-              <a:buNone/>
-              <a:tabLst>
-                <a:tab algn="l" pos="0"/>
-              </a:tabLst>
-              <a:defRPr b="0" lang="en-GB" sz="1200" strike="noStrike" u="none">
-                <a:solidFill>
-                  <a:schemeClr val="dk1">
-                    <a:tint val="75000"/>
-                  </a:schemeClr>
-                </a:solidFill>
-                <a:effectLst/>
-                <a:uFillTx/>
-                <a:latin typeface="Calibri"/>
-              </a:defRPr>
-            </a:lvl1pPr>
-          </a:lstStyle>
-          <a:p>
-            <a:pPr indent="0" defTabSz="914400">
-              <a:lnSpc>
-                <a:spcPct val="100000"/>
-              </a:lnSpc>
-              <a:buNone/>
-              <a:tabLst>
-                <a:tab algn="l" pos="0"/>
-              </a:tabLst>
-            </a:pPr>
-            <a:r>
-              <a:rPr b="0" lang="en-GB" sz="1200" strike="noStrike" u="none">
-                <a:solidFill>
-                  <a:schemeClr val="dk1">
-                    <a:tint val="75000"/>
-                  </a:schemeClr>
-                </a:solidFill>
-                <a:effectLst/>
-                <a:uFillTx/>
-                <a:latin typeface="Calibri"/>
-              </a:rPr>
-              <a:t>&lt;fecha/hora&gt;</a:t>
-            </a:r>
-            <a:endParaRPr b="0" lang="es-ES" sz="1200" strike="noStrike" u="none">
-              <a:solidFill>
-                <a:srgbClr val="000000"/>
-              </a:solidFill>
-              <a:effectLst/>
-              <a:uFillTx/>
-              <a:latin typeface="Times New Roman"/>
-            </a:endParaRPr>
-          </a:p>
-        </p:txBody>
-      </p:sp>
-      <p:sp>
-        <p:nvSpPr>
-          <p:cNvPr id="13" name="PlaceHolder 4"/>
-          <p:cNvSpPr>
-            <a:spLocks noGrp="1"/>
-          </p:cNvSpPr>
-          <p:nvPr>
-            <p:ph type="ftr" idx="8"/>
-          </p:nvPr>
-        </p:nvSpPr>
-        <p:spPr>
-          <a:xfrm>
-            <a:off x="4038480" y="6356520"/>
-            <a:ext cx="4113000" cy="363240"/>
-          </a:xfrm>
-          <a:prstGeom prst="rect">
-            <a:avLst/>
-          </a:prstGeom>
-          <a:noFill/>
-          <a:ln w="0">
-            <a:noFill/>
-          </a:ln>
-        </p:spPr>
-        <p:txBody>
-          <a:bodyPr lIns="91440" rIns="91440" tIns="45720" bIns="45720" anchor="ctr">
-            <a:noAutofit/>
-          </a:bodyPr>
-          <a:lstStyle>
-            <a:lvl1pPr indent="0" algn="ctr">
-              <a:lnSpc>
-                <a:spcPct val="100000"/>
-              </a:lnSpc>
-              <a:buNone/>
-              <a:tabLst>
-                <a:tab algn="l" pos="0"/>
-              </a:tabLst>
-              <a:defRPr b="0" lang="es-ES" sz="1400" strike="noStrike" u="none">
-                <a:solidFill>
-                  <a:srgbClr val="000000"/>
-                </a:solidFill>
-                <a:effectLst/>
-                <a:uFillTx/>
-                <a:latin typeface="Times New Roman"/>
-              </a:defRPr>
-            </a:lvl1pPr>
-          </a:lstStyle>
-          <a:p>
-            <a:pPr indent="0" algn="ctr">
-              <a:lnSpc>
-                <a:spcPct val="100000"/>
-              </a:lnSpc>
-              <a:buNone/>
-              <a:tabLst>
-                <a:tab algn="l" pos="0"/>
-              </a:tabLst>
-            </a:pPr>
-            <a:r>
-              <a:rPr b="0" lang="es-ES" sz="1400" strike="noStrike" u="none">
-                <a:solidFill>
-                  <a:srgbClr val="000000"/>
-                </a:solidFill>
-                <a:effectLst/>
-                <a:uFillTx/>
-                <a:latin typeface="Times New Roman"/>
-              </a:rPr>
-              <a:t>&lt;pie de página&gt;</a:t>
-            </a:r>
-            <a:endParaRPr b="0" lang="es-ES" sz="1400" strike="noStrike" u="none">
-              <a:solidFill>
-                <a:srgbClr val="000000"/>
-              </a:solidFill>
-              <a:effectLst/>
-              <a:uFillTx/>
-              <a:latin typeface="Times New Roman"/>
-            </a:endParaRPr>
-          </a:p>
-        </p:txBody>
-      </p:sp>
-      <p:sp>
-        <p:nvSpPr>
-          <p:cNvPr id="14" name="PlaceHolder 5"/>
-          <p:cNvSpPr>
-            <a:spLocks noGrp="1"/>
-          </p:cNvSpPr>
-          <p:nvPr>
-            <p:ph type="sldNum" idx="9"/>
-          </p:nvPr>
-        </p:nvSpPr>
-        <p:spPr>
-          <a:xfrm>
-            <a:off x="8610480" y="6356520"/>
-            <a:ext cx="2741400" cy="363240"/>
-          </a:xfrm>
-          <a:prstGeom prst="rect">
-            <a:avLst/>
-          </a:prstGeom>
-          <a:noFill/>
-          <a:ln w="0">
-            <a:noFill/>
-          </a:ln>
-        </p:spPr>
-        <p:txBody>
-          <a:bodyPr lIns="91440" rIns="91440" tIns="45720" bIns="45720" anchor="ctr">
-            <a:noAutofit/>
-          </a:bodyPr>
-          <a:lstStyle>
-            <a:lvl1pPr indent="0" algn="r" defTabSz="914400">
-              <a:lnSpc>
-                <a:spcPct val="100000"/>
-              </a:lnSpc>
-              <a:buNone/>
-              <a:tabLst>
-                <a:tab algn="l" pos="0"/>
-              </a:tabLst>
-              <a:defRPr b="0" lang="en-GB" sz="1200" strike="noStrike" u="none">
-                <a:solidFill>
-                  <a:schemeClr val="dk1">
-                    <a:tint val="75000"/>
-                  </a:schemeClr>
-                </a:solidFill>
-                <a:effectLst/>
-                <a:uFillTx/>
-                <a:latin typeface="Calibri"/>
-              </a:defRPr>
-            </a:lvl1pPr>
-          </a:lstStyle>
-          <a:p>
-            <a:pPr indent="0" algn="r" defTabSz="914400">
-              <a:lnSpc>
-                <a:spcPct val="100000"/>
-              </a:lnSpc>
-              <a:buNone/>
-              <a:tabLst>
-                <a:tab algn="l" pos="0"/>
-              </a:tabLst>
-            </a:pPr>
-            <a:fld id="{3058C450-5050-4193-80D2-89EAB89D7248}" type="slidenum">
+            <a:fld id="{749142B9-BA06-4835-AF7C-37673A701607}" type="slidenum">
               <a:rPr b="0" lang="en-GB" sz="1200" strike="noStrike" u="none">
                 <a:solidFill>
                   <a:schemeClr val="dk1">
@@ -2734,8 +3118,8 @@
 </file>
 
 <file path=ppt/slideLayouts/slideLayout4.xml><?xml version="1.0" encoding="utf-8"?>
-<p:sldLayout xmlns:a="http://schemas.openxmlformats.org/drawingml/2006/main" xmlns:p="http://schemas.openxmlformats.org/presentationml/2006/main" xmlns:r="http://schemas.openxmlformats.org/officeDocument/2006/relationships" xmlns:p14="http://schemas.microsoft.com/office/powerpoint/2010/main" xmlns:p15="http://schemas.microsoft.com/office/powerpoint/2012/main" xmlns:mc="http://schemas.openxmlformats.org/markup-compatibility/2006" type="vertTitleAndTx" preserve="1">
-  <p:cSld name="Título vertical y texto">
+<p:sldLayout xmlns:a="http://schemas.openxmlformats.org/drawingml/2006/main" xmlns:p="http://schemas.openxmlformats.org/presentationml/2006/main" xmlns:r="http://schemas.openxmlformats.org/officeDocument/2006/relationships" xmlns:p14="http://schemas.microsoft.com/office/powerpoint/2010/main" xmlns:p15="http://schemas.microsoft.com/office/powerpoint/2012/main" xmlns:mc="http://schemas.openxmlformats.org/markup-compatibility/2006" type="blank" preserve="1">
+  <p:cSld name="Imagen con título">
     <p:bg>
       <p:bgPr>
         <a:solidFill>
@@ -2769,8 +3153,8 @@
         </p:nvSpPr>
         <p:spPr>
           <a:xfrm>
-            <a:off x="8724960" y="365040"/>
-            <a:ext cx="2627280" cy="5810040"/>
+            <a:off x="839880" y="457200"/>
+            <a:ext cx="3930120" cy="1598040"/>
           </a:xfrm>
           <a:prstGeom prst="rect">
             <a:avLst/>
@@ -2781,7 +3165,7 @@
           </a:ln>
         </p:spPr>
         <p:txBody>
-          <a:bodyPr lIns="91440" rIns="91440" tIns="45720" bIns="45720" anchor="ctr" vert="eaVert">
+          <a:bodyPr lIns="91440" rIns="91440" tIns="45720" bIns="45720" anchor="b">
             <a:noAutofit/>
           </a:bodyPr>
           <a:p>
@@ -2795,7 +3179,7 @@
               </a:tabLst>
             </a:pPr>
             <a:r>
-              <a:rPr b="0" lang="es-ES" sz="4400" strike="noStrike" u="none">
+              <a:rPr b="0" lang="es-ES" sz="3200" strike="noStrike" u="none">
                 <a:solidFill>
                   <a:schemeClr val="dk1"/>
                 </a:solidFill>
@@ -2805,7 +3189,7 @@
               </a:rPr>
               <a:t>Haga clic para modificar el estilo de título del patrón</a:t>
             </a:r>
-            <a:endParaRPr b="0" lang="es-ES" sz="4400" strike="noStrike" u="none">
+            <a:endParaRPr b="0" lang="es-ES" sz="3200" strike="noStrike" u="none">
               <a:solidFill>
                 <a:srgbClr val="000000"/>
               </a:solidFill>
@@ -2828,8 +3212,8 @@
         </p:nvSpPr>
         <p:spPr>
           <a:xfrm>
-            <a:off x="838080" y="365040"/>
-            <a:ext cx="7732440" cy="5810040"/>
+            <a:off x="5183280" y="987480"/>
+            <a:ext cx="6170040" cy="4871520"/>
           </a:xfrm>
           <a:prstGeom prst="rect">
             <a:avLst/>
@@ -2840,171 +3224,246 @@
           </a:ln>
         </p:spPr>
         <p:txBody>
-          <a:bodyPr lIns="91440" rIns="91440" tIns="45720" bIns="45720" anchor="t" vert="eaVert">
+          <a:bodyPr lIns="90000" rIns="90000" tIns="45000" bIns="45000" anchor="t">
             <a:noAutofit/>
           </a:bodyPr>
           <a:p>
-            <a:pPr marL="228600" indent="-228600" defTabSz="914400">
-              <a:lnSpc>
-                <a:spcPct val="90000"/>
-              </a:lnSpc>
-              <a:spcBef>
-                <a:spcPts val="1001"/>
+            <a:pPr marL="432000" indent="-324000">
+              <a:lnSpc>
+                <a:spcPct val="90000"/>
+              </a:lnSpc>
+              <a:spcBef>
+                <a:spcPts val="1417"/>
               </a:spcBef>
               <a:buClr>
                 <a:srgbClr val="000000"/>
               </a:buClr>
-              <a:buFont typeface="Arial"/>
-              <a:buChar char="•"/>
-            </a:pPr>
-            <a:r>
-              <a:rPr b="0" lang="es-ES" sz="2800" strike="noStrike" u="none">
-                <a:solidFill>
-                  <a:schemeClr val="dk1"/>
-                </a:solidFill>
-                <a:effectLst/>
-                <a:uFillTx/>
-                <a:latin typeface="Calibri"/>
-              </a:rPr>
-              <a:t>Haga clic para modificar los estilos de texto del patrón</a:t>
-            </a:r>
-            <a:endParaRPr b="0" lang="es-ES" sz="2800" strike="noStrike" u="none">
-              <a:solidFill>
-                <a:srgbClr val="000000"/>
-              </a:solidFill>
-              <a:effectLst/>
-              <a:uFillTx/>
-              <a:latin typeface="Arial"/>
-            </a:endParaRPr>
-          </a:p>
-          <a:p>
-            <a:pPr lvl="1" marL="685800" indent="-228600" defTabSz="914400">
-              <a:lnSpc>
-                <a:spcPct val="90000"/>
-              </a:lnSpc>
-              <a:spcBef>
-                <a:spcPts val="499"/>
+              <a:buSzPct val="45000"/>
+              <a:buFont typeface="Wingdings" charset="2"/>
+              <a:buChar char=""/>
+            </a:pPr>
+            <a:r>
+              <a:rPr b="0" lang="es-ES" sz="3200" strike="noStrike" u="none">
+                <a:solidFill>
+                  <a:schemeClr val="dk1"/>
+                </a:solidFill>
+                <a:effectLst/>
+                <a:uFillTx/>
+                <a:latin typeface="Calibri"/>
+              </a:rPr>
+              <a:t>Pulse para editar el formato de texto del esquema</a:t>
+            </a:r>
+            <a:endParaRPr b="0" lang="es-ES" sz="3200" strike="noStrike" u="none">
+              <a:solidFill>
+                <a:srgbClr val="000000"/>
+              </a:solidFill>
+              <a:effectLst/>
+              <a:uFillTx/>
+              <a:latin typeface="Arial"/>
+            </a:endParaRPr>
+          </a:p>
+          <a:p>
+            <a:pPr lvl="1" marL="864000" indent="-324000">
+              <a:lnSpc>
+                <a:spcPct val="90000"/>
+              </a:lnSpc>
+              <a:spcBef>
+                <a:spcPts val="1134"/>
               </a:spcBef>
               <a:buClr>
                 <a:srgbClr val="000000"/>
               </a:buClr>
-              <a:buFont typeface="Arial"/>
-              <a:buChar char="•"/>
-            </a:pPr>
-            <a:r>
-              <a:rPr b="0" lang="es-ES" sz="2400" strike="noStrike" u="none">
-                <a:solidFill>
-                  <a:schemeClr val="dk1"/>
-                </a:solidFill>
-                <a:effectLst/>
-                <a:uFillTx/>
-                <a:latin typeface="Calibri"/>
-              </a:rPr>
-              <a:t>Segundo nivel</a:t>
-            </a:r>
-            <a:endParaRPr b="0" lang="es-ES" sz="2400" strike="noStrike" u="none">
-              <a:solidFill>
-                <a:srgbClr val="000000"/>
-              </a:solidFill>
-              <a:effectLst/>
-              <a:uFillTx/>
-              <a:latin typeface="Arial"/>
-            </a:endParaRPr>
-          </a:p>
-          <a:p>
-            <a:pPr lvl="2" marL="1143000" indent="-228600" defTabSz="914400">
-              <a:lnSpc>
-                <a:spcPct val="90000"/>
-              </a:lnSpc>
-              <a:spcBef>
-                <a:spcPts val="499"/>
+              <a:buSzPct val="75000"/>
+              <a:buFont typeface="Symbol" charset="2"/>
+              <a:buChar char=""/>
+            </a:pPr>
+            <a:r>
+              <a:rPr b="0" lang="es-ES" sz="3200" strike="noStrike" u="none">
+                <a:solidFill>
+                  <a:schemeClr val="dk1"/>
+                </a:solidFill>
+                <a:effectLst/>
+                <a:uFillTx/>
+                <a:latin typeface="Calibri"/>
+              </a:rPr>
+              <a:t>Segundo nivel del esquema</a:t>
+            </a:r>
+            <a:endParaRPr b="0" lang="es-ES" sz="3200" strike="noStrike" u="none">
+              <a:solidFill>
+                <a:srgbClr val="000000"/>
+              </a:solidFill>
+              <a:effectLst/>
+              <a:uFillTx/>
+              <a:latin typeface="Arial"/>
+            </a:endParaRPr>
+          </a:p>
+          <a:p>
+            <a:pPr lvl="2" marL="1296000" indent="-288000">
+              <a:lnSpc>
+                <a:spcPct val="90000"/>
+              </a:lnSpc>
+              <a:spcBef>
+                <a:spcPts val="850"/>
               </a:spcBef>
               <a:buClr>
                 <a:srgbClr val="000000"/>
               </a:buClr>
-              <a:buFont typeface="Arial"/>
-              <a:buChar char="•"/>
-            </a:pPr>
-            <a:r>
-              <a:rPr b="0" lang="es-ES" sz="2000" strike="noStrike" u="none">
-                <a:solidFill>
-                  <a:schemeClr val="dk1"/>
-                </a:solidFill>
-                <a:effectLst/>
-                <a:uFillTx/>
-                <a:latin typeface="Calibri"/>
-              </a:rPr>
-              <a:t>Tercer nivel</a:t>
-            </a:r>
-            <a:endParaRPr b="0" lang="es-ES" sz="2000" strike="noStrike" u="none">
-              <a:solidFill>
-                <a:srgbClr val="000000"/>
-              </a:solidFill>
-              <a:effectLst/>
-              <a:uFillTx/>
-              <a:latin typeface="Arial"/>
-            </a:endParaRPr>
-          </a:p>
-          <a:p>
-            <a:pPr lvl="3" marL="1600200" indent="-228600" defTabSz="914400">
-              <a:lnSpc>
-                <a:spcPct val="90000"/>
-              </a:lnSpc>
-              <a:spcBef>
-                <a:spcPts val="499"/>
+              <a:buSzPct val="45000"/>
+              <a:buFont typeface="Wingdings" charset="2"/>
+              <a:buChar char=""/>
+            </a:pPr>
+            <a:r>
+              <a:rPr b="0" lang="es-ES" sz="3200" strike="noStrike" u="none">
+                <a:solidFill>
+                  <a:schemeClr val="dk1"/>
+                </a:solidFill>
+                <a:effectLst/>
+                <a:uFillTx/>
+                <a:latin typeface="Calibri"/>
+              </a:rPr>
+              <a:t>Tercer nivel del esquema</a:t>
+            </a:r>
+            <a:endParaRPr b="0" lang="es-ES" sz="3200" strike="noStrike" u="none">
+              <a:solidFill>
+                <a:srgbClr val="000000"/>
+              </a:solidFill>
+              <a:effectLst/>
+              <a:uFillTx/>
+              <a:latin typeface="Arial"/>
+            </a:endParaRPr>
+          </a:p>
+          <a:p>
+            <a:pPr lvl="3" marL="1728000" indent="-216000">
+              <a:lnSpc>
+                <a:spcPct val="90000"/>
+              </a:lnSpc>
+              <a:spcBef>
+                <a:spcPts val="567"/>
               </a:spcBef>
               <a:buClr>
                 <a:srgbClr val="000000"/>
               </a:buClr>
-              <a:buFont typeface="Arial"/>
-              <a:buChar char="•"/>
-            </a:pPr>
-            <a:r>
-              <a:rPr b="0" lang="es-ES" sz="1800" strike="noStrike" u="none">
-                <a:solidFill>
-                  <a:schemeClr val="dk1"/>
-                </a:solidFill>
-                <a:effectLst/>
-                <a:uFillTx/>
-                <a:latin typeface="Calibri"/>
-              </a:rPr>
-              <a:t>Cuarto nivel</a:t>
-            </a:r>
-            <a:endParaRPr b="0" lang="es-ES" sz="1800" strike="noStrike" u="none">
-              <a:solidFill>
-                <a:srgbClr val="000000"/>
-              </a:solidFill>
-              <a:effectLst/>
-              <a:uFillTx/>
-              <a:latin typeface="Arial"/>
-            </a:endParaRPr>
-          </a:p>
-          <a:p>
-            <a:pPr lvl="4" marL="2057400" indent="-228600" defTabSz="914400">
-              <a:lnSpc>
-                <a:spcPct val="90000"/>
-              </a:lnSpc>
-              <a:spcBef>
-                <a:spcPts val="499"/>
+              <a:buSzPct val="75000"/>
+              <a:buFont typeface="Symbol" charset="2"/>
+              <a:buChar char=""/>
+            </a:pPr>
+            <a:r>
+              <a:rPr b="0" lang="es-ES" sz="3200" strike="noStrike" u="none">
+                <a:solidFill>
+                  <a:schemeClr val="dk1"/>
+                </a:solidFill>
+                <a:effectLst/>
+                <a:uFillTx/>
+                <a:latin typeface="Calibri"/>
+              </a:rPr>
+              <a:t>Cuarto nivel del esquema</a:t>
+            </a:r>
+            <a:endParaRPr b="0" lang="es-ES" sz="3200" strike="noStrike" u="none">
+              <a:solidFill>
+                <a:srgbClr val="000000"/>
+              </a:solidFill>
+              <a:effectLst/>
+              <a:uFillTx/>
+              <a:latin typeface="Arial"/>
+            </a:endParaRPr>
+          </a:p>
+          <a:p>
+            <a:pPr lvl="4" marL="2160000" indent="-216000">
+              <a:lnSpc>
+                <a:spcPct val="90000"/>
+              </a:lnSpc>
+              <a:spcBef>
+                <a:spcPts val="283"/>
               </a:spcBef>
               <a:buClr>
                 <a:srgbClr val="000000"/>
               </a:buClr>
-              <a:buFont typeface="Arial"/>
-              <a:buChar char="•"/>
-            </a:pPr>
-            <a:r>
-              <a:rPr b="0" lang="es-ES" sz="1800" strike="noStrike" u="none">
-                <a:solidFill>
-                  <a:schemeClr val="dk1"/>
-                </a:solidFill>
-                <a:effectLst/>
-                <a:uFillTx/>
-                <a:latin typeface="Calibri"/>
-              </a:rPr>
-              <a:t>Quinto nivel</a:t>
-            </a:r>
-            <a:endParaRPr b="0" lang="es-ES" sz="1800" strike="noStrike" u="none">
+              <a:buSzPct val="45000"/>
+              <a:buFont typeface="Wingdings" charset="2"/>
+              <a:buChar char=""/>
+            </a:pPr>
+            <a:r>
+              <a:rPr b="0" lang="es-ES" sz="3200" strike="noStrike" u="none">
+                <a:solidFill>
+                  <a:schemeClr val="dk1"/>
+                </a:solidFill>
+                <a:effectLst/>
+                <a:uFillTx/>
+                <a:latin typeface="Calibri"/>
+              </a:rPr>
+              <a:t>Quinto nivel del esquema</a:t>
+            </a:r>
+            <a:endParaRPr b="0" lang="es-ES" sz="3200" strike="noStrike" u="none">
+              <a:solidFill>
+                <a:srgbClr val="000000"/>
+              </a:solidFill>
+              <a:effectLst/>
+              <a:uFillTx/>
+              <a:latin typeface="Arial"/>
+            </a:endParaRPr>
+          </a:p>
+          <a:p>
+            <a:pPr lvl="5" marL="2592000" indent="-216000">
+              <a:lnSpc>
+                <a:spcPct val="90000"/>
+              </a:lnSpc>
+              <a:spcBef>
+                <a:spcPts val="283"/>
+              </a:spcBef>
+              <a:buClr>
+                <a:srgbClr val="000000"/>
+              </a:buClr>
+              <a:buSzPct val="45000"/>
+              <a:buFont typeface="Wingdings" charset="2"/>
+              <a:buChar char=""/>
+            </a:pPr>
+            <a:r>
+              <a:rPr b="0" lang="es-ES" sz="3200" strike="noStrike" u="none">
+                <a:solidFill>
+                  <a:schemeClr val="dk1"/>
+                </a:solidFill>
+                <a:effectLst/>
+                <a:uFillTx/>
+                <a:latin typeface="Calibri"/>
+              </a:rPr>
+              <a:t>Sexto nivel del esquema</a:t>
+            </a:r>
+            <a:endParaRPr b="0" lang="es-ES" sz="3200" strike="noStrike" u="none">
+              <a:solidFill>
+                <a:srgbClr val="000000"/>
+              </a:solidFill>
+              <a:effectLst/>
+              <a:uFillTx/>
+              <a:latin typeface="Arial"/>
+            </a:endParaRPr>
+          </a:p>
+          <a:p>
+            <a:pPr lvl="6" marL="3024000" indent="-216000">
+              <a:lnSpc>
+                <a:spcPct val="90000"/>
+              </a:lnSpc>
+              <a:spcBef>
+                <a:spcPts val="283"/>
+              </a:spcBef>
+              <a:buClr>
+                <a:srgbClr val="000000"/>
+              </a:buClr>
+              <a:buSzPct val="45000"/>
+              <a:buFont typeface="Wingdings" charset="2"/>
+              <a:buChar char=""/>
+            </a:pPr>
+            <a:r>
+              <a:rPr b="0" lang="es-ES" sz="3200" strike="noStrike" u="none">
+                <a:solidFill>
+                  <a:schemeClr val="dk1"/>
+                </a:solidFill>
+                <a:effectLst/>
+                <a:uFillTx/>
+                <a:latin typeface="Calibri"/>
+              </a:rPr>
+              <a:t>Séptimo nivel del esquema</a:t>
+            </a:r>
+            <a:endParaRPr b="0" lang="es-ES" sz="3200" strike="noStrike" u="none">
               <a:solidFill>
                 <a:srgbClr val="000000"/>
               </a:solidFill>
@@ -3018,6 +3477,68 @@
       <p:sp>
         <p:nvSpPr>
           <p:cNvPr id="17" name="PlaceHolder 3"/>
+          <p:cNvSpPr>
+            <a:spLocks noGrp="1"/>
+          </p:cNvSpPr>
+          <p:nvPr>
+            <p:ph type="body"/>
+          </p:nvPr>
+        </p:nvSpPr>
+        <p:spPr>
+          <a:xfrm>
+            <a:off x="839880" y="2057400"/>
+            <a:ext cx="3930120" cy="3809520"/>
+          </a:xfrm>
+          <a:prstGeom prst="rect">
+            <a:avLst/>
+          </a:prstGeom>
+          <a:noFill/>
+          <a:ln w="0">
+            <a:noFill/>
+          </a:ln>
+        </p:spPr>
+        <p:txBody>
+          <a:bodyPr lIns="91440" rIns="91440" tIns="45720" bIns="45720" anchor="t">
+            <a:noAutofit/>
+          </a:bodyPr>
+          <a:p>
+            <a:pPr indent="0" defTabSz="914400">
+              <a:lnSpc>
+                <a:spcPct val="90000"/>
+              </a:lnSpc>
+              <a:spcBef>
+                <a:spcPts val="1001"/>
+              </a:spcBef>
+              <a:buNone/>
+              <a:tabLst>
+                <a:tab algn="l" pos="0"/>
+              </a:tabLst>
+            </a:pPr>
+            <a:r>
+              <a:rPr b="0" lang="es-ES" sz="1600" strike="noStrike" u="none">
+                <a:solidFill>
+                  <a:schemeClr val="dk1"/>
+                </a:solidFill>
+                <a:effectLst/>
+                <a:uFillTx/>
+                <a:latin typeface="Calibri"/>
+              </a:rPr>
+              <a:t>Haga clic para modificar los estilos de texto del patrón</a:t>
+            </a:r>
+            <a:endParaRPr b="0" lang="es-ES" sz="1600" strike="noStrike" u="none">
+              <a:solidFill>
+                <a:srgbClr val="000000"/>
+              </a:solidFill>
+              <a:effectLst/>
+              <a:uFillTx/>
+              <a:latin typeface="Arial"/>
+            </a:endParaRPr>
+          </a:p>
+        </p:txBody>
+      </p:sp>
+      <p:sp>
+        <p:nvSpPr>
+          <p:cNvPr id="18" name="PlaceHolder 4"/>
           <p:cNvSpPr>
             <a:spLocks noGrp="1"/>
           </p:cNvSpPr>
@@ -3028,7 +3549,7 @@
         <p:spPr>
           <a:xfrm>
             <a:off x="838080" y="6356520"/>
-            <a:ext cx="2741400" cy="363240"/>
+            <a:ext cx="2741040" cy="362880"/>
           </a:xfrm>
           <a:prstGeom prst="rect">
             <a:avLst/>
@@ -3099,7 +3620,7 @@
       </p:sp>
       <p:sp>
         <p:nvSpPr>
-          <p:cNvPr id="18" name="PlaceHolder 4"/>
+          <p:cNvPr id="19" name="PlaceHolder 5"/>
           <p:cNvSpPr>
             <a:spLocks noGrp="1"/>
           </p:cNvSpPr>
@@ -3110,7 +3631,7 @@
         <p:spPr>
           <a:xfrm>
             <a:off x="4038480" y="6356520"/>
-            <a:ext cx="4113000" cy="363240"/>
+            <a:ext cx="4112640" cy="362880"/>
           </a:xfrm>
           <a:prstGeom prst="rect">
             <a:avLst/>
@@ -3177,7 +3698,7 @@
       </p:sp>
       <p:sp>
         <p:nvSpPr>
-          <p:cNvPr id="19" name="PlaceHolder 5"/>
+          <p:cNvPr id="20" name="PlaceHolder 6"/>
           <p:cNvSpPr>
             <a:spLocks noGrp="1"/>
           </p:cNvSpPr>
@@ -3188,7 +3709,7 @@
         <p:spPr>
           <a:xfrm>
             <a:off x="8610480" y="6356520"/>
-            <a:ext cx="2741400" cy="363240"/>
+            <a:ext cx="2741040" cy="362880"/>
           </a:xfrm>
           <a:prstGeom prst="rect">
             <a:avLst/>
@@ -3233,7 +3754,7 @@
                 <a:tab algn="l" pos="0"/>
               </a:tabLst>
             </a:pPr>
-            <a:fld id="{5F9F1001-1768-440E-9A39-CB193EA06AEE}" type="slidenum">
+            <a:fld id="{6F927917-4221-4668-BB6D-D74A0A548B07}" type="slidenum">
               <a:rPr b="0" lang="en-GB" sz="1200" strike="noStrike" u="none">
                 <a:solidFill>
                   <a:schemeClr val="dk1">
@@ -3263,8 +3784,8 @@
 </file>
 
 <file path=ppt/slideLayouts/slideLayout5.xml><?xml version="1.0" encoding="utf-8"?>
-<p:sldLayout xmlns:a="http://schemas.openxmlformats.org/drawingml/2006/main" xmlns:p="http://schemas.openxmlformats.org/presentationml/2006/main" xmlns:r="http://schemas.openxmlformats.org/officeDocument/2006/relationships" xmlns:p14="http://schemas.microsoft.com/office/powerpoint/2010/main" xmlns:p15="http://schemas.microsoft.com/office/powerpoint/2012/main" xmlns:mc="http://schemas.openxmlformats.org/markup-compatibility/2006" type="obj" preserve="1">
-  <p:cSld name="Título y objetos">
+<p:sldLayout xmlns:a="http://schemas.openxmlformats.org/drawingml/2006/main" xmlns:p="http://schemas.openxmlformats.org/presentationml/2006/main" xmlns:r="http://schemas.openxmlformats.org/officeDocument/2006/relationships" xmlns:p14="http://schemas.microsoft.com/office/powerpoint/2010/main" xmlns:p15="http://schemas.microsoft.com/office/powerpoint/2012/main" xmlns:mc="http://schemas.openxmlformats.org/markup-compatibility/2006" type="title" preserve="1">
+  <p:cSld name="Diapositiva de título">
     <p:bg>
       <p:bgPr>
         <a:solidFill>
@@ -3288,7 +3809,7 @@
       </p:grpSpPr>
       <p:sp>
         <p:nvSpPr>
-          <p:cNvPr id="20" name="PlaceHolder 1"/>
+          <p:cNvPr id="21" name="PlaceHolder 1"/>
           <p:cNvSpPr>
             <a:spLocks noGrp="1"/>
           </p:cNvSpPr>
@@ -3298,8 +3819,8 @@
         </p:nvSpPr>
         <p:spPr>
           <a:xfrm>
-            <a:off x="838080" y="365040"/>
-            <a:ext cx="10513800" cy="1323720"/>
+            <a:off x="1523880" y="1122480"/>
+            <a:ext cx="9141840" cy="2385360"/>
           </a:xfrm>
           <a:prstGeom prst="rect">
             <a:avLst/>
@@ -3310,11 +3831,11 @@
           </a:ln>
         </p:spPr>
         <p:txBody>
-          <a:bodyPr lIns="91440" rIns="91440" tIns="45720" bIns="45720" anchor="ctr">
+          <a:bodyPr lIns="91440" rIns="91440" tIns="45720" bIns="45720" anchor="b">
             <a:noAutofit/>
           </a:bodyPr>
           <a:p>
-            <a:pPr indent="0" defTabSz="914400">
+            <a:pPr indent="0" algn="ctr" defTabSz="914400">
               <a:lnSpc>
                 <a:spcPct val="90000"/>
               </a:lnSpc>
@@ -3324,7 +3845,7 @@
               </a:tabLst>
             </a:pPr>
             <a:r>
-              <a:rPr b="0" lang="es-ES" sz="4400" strike="noStrike" u="none">
+              <a:rPr b="0" lang="es-ES" sz="6000" strike="noStrike" u="none">
                 <a:solidFill>
                   <a:schemeClr val="dk1"/>
                 </a:solidFill>
@@ -3334,7 +3855,7 @@
               </a:rPr>
               <a:t>Haga clic para modificar el estilo de título del patrón</a:t>
             </a:r>
-            <a:endParaRPr b="0" lang="es-ES" sz="4400" strike="noStrike" u="none">
+            <a:endParaRPr b="0" lang="es-ES" sz="6000" strike="noStrike" u="none">
               <a:solidFill>
                 <a:srgbClr val="000000"/>
               </a:solidFill>
@@ -3347,206 +3868,7 @@
       </p:sp>
       <p:sp>
         <p:nvSpPr>
-          <p:cNvPr id="21" name="PlaceHolder 2"/>
-          <p:cNvSpPr>
-            <a:spLocks noGrp="1"/>
-          </p:cNvSpPr>
-          <p:nvPr>
-            <p:ph type="body"/>
-          </p:nvPr>
-        </p:nvSpPr>
-        <p:spPr>
-          <a:xfrm>
-            <a:off x="838080" y="1825560"/>
-            <a:ext cx="10513800" cy="4349520"/>
-          </a:xfrm>
-          <a:prstGeom prst="rect">
-            <a:avLst/>
-          </a:prstGeom>
-          <a:noFill/>
-          <a:ln w="0">
-            <a:noFill/>
-          </a:ln>
-        </p:spPr>
-        <p:txBody>
-          <a:bodyPr lIns="91440" rIns="91440" tIns="45720" bIns="45720" anchor="t">
-            <a:noAutofit/>
-          </a:bodyPr>
-          <a:p>
-            <a:pPr marL="228600" indent="-228600" defTabSz="914400">
-              <a:lnSpc>
-                <a:spcPct val="90000"/>
-              </a:lnSpc>
-              <a:spcBef>
-                <a:spcPts val="1001"/>
-              </a:spcBef>
-              <a:buClr>
-                <a:srgbClr val="000000"/>
-              </a:buClr>
-              <a:buFont typeface="Arial"/>
-              <a:buChar char="•"/>
-            </a:pPr>
-            <a:r>
-              <a:rPr b="0" lang="es-ES" sz="2800" strike="noStrike" u="none">
-                <a:solidFill>
-                  <a:schemeClr val="dk1"/>
-                </a:solidFill>
-                <a:effectLst/>
-                <a:uFillTx/>
-                <a:latin typeface="Calibri"/>
-              </a:rPr>
-              <a:t>Haga clic para modificar los estilos de texto del patrón</a:t>
-            </a:r>
-            <a:endParaRPr b="0" lang="es-ES" sz="2800" strike="noStrike" u="none">
-              <a:solidFill>
-                <a:srgbClr val="000000"/>
-              </a:solidFill>
-              <a:effectLst/>
-              <a:uFillTx/>
-              <a:latin typeface="Arial"/>
-            </a:endParaRPr>
-          </a:p>
-          <a:p>
-            <a:pPr lvl="1" marL="685800" indent="-228600" defTabSz="914400">
-              <a:lnSpc>
-                <a:spcPct val="90000"/>
-              </a:lnSpc>
-              <a:spcBef>
-                <a:spcPts val="499"/>
-              </a:spcBef>
-              <a:buClr>
-                <a:srgbClr val="000000"/>
-              </a:buClr>
-              <a:buFont typeface="Arial"/>
-              <a:buChar char="•"/>
-            </a:pPr>
-            <a:r>
-              <a:rPr b="0" lang="es-ES" sz="2400" strike="noStrike" u="none">
-                <a:solidFill>
-                  <a:schemeClr val="dk1"/>
-                </a:solidFill>
-                <a:effectLst/>
-                <a:uFillTx/>
-                <a:latin typeface="Calibri"/>
-              </a:rPr>
-              <a:t>Segundo nivel</a:t>
-            </a:r>
-            <a:endParaRPr b="0" lang="es-ES" sz="2400" strike="noStrike" u="none">
-              <a:solidFill>
-                <a:srgbClr val="000000"/>
-              </a:solidFill>
-              <a:effectLst/>
-              <a:uFillTx/>
-              <a:latin typeface="Arial"/>
-            </a:endParaRPr>
-          </a:p>
-          <a:p>
-            <a:pPr lvl="2" marL="1143000" indent="-228600" defTabSz="914400">
-              <a:lnSpc>
-                <a:spcPct val="90000"/>
-              </a:lnSpc>
-              <a:spcBef>
-                <a:spcPts val="499"/>
-              </a:spcBef>
-              <a:buClr>
-                <a:srgbClr val="000000"/>
-              </a:buClr>
-              <a:buFont typeface="Arial"/>
-              <a:buChar char="•"/>
-            </a:pPr>
-            <a:r>
-              <a:rPr b="0" lang="es-ES" sz="2000" strike="noStrike" u="none">
-                <a:solidFill>
-                  <a:schemeClr val="dk1"/>
-                </a:solidFill>
-                <a:effectLst/>
-                <a:uFillTx/>
-                <a:latin typeface="Calibri"/>
-              </a:rPr>
-              <a:t>Tercer nivel</a:t>
-            </a:r>
-            <a:endParaRPr b="0" lang="es-ES" sz="2000" strike="noStrike" u="none">
-              <a:solidFill>
-                <a:srgbClr val="000000"/>
-              </a:solidFill>
-              <a:effectLst/>
-              <a:uFillTx/>
-              <a:latin typeface="Arial"/>
-            </a:endParaRPr>
-          </a:p>
-          <a:p>
-            <a:pPr lvl="3" marL="1600200" indent="-228600" defTabSz="914400">
-              <a:lnSpc>
-                <a:spcPct val="90000"/>
-              </a:lnSpc>
-              <a:spcBef>
-                <a:spcPts val="499"/>
-              </a:spcBef>
-              <a:buClr>
-                <a:srgbClr val="000000"/>
-              </a:buClr>
-              <a:buFont typeface="Arial"/>
-              <a:buChar char="•"/>
-            </a:pPr>
-            <a:r>
-              <a:rPr b="0" lang="es-ES" sz="1800" strike="noStrike" u="none">
-                <a:solidFill>
-                  <a:schemeClr val="dk1"/>
-                </a:solidFill>
-                <a:effectLst/>
-                <a:uFillTx/>
-                <a:latin typeface="Calibri"/>
-              </a:rPr>
-              <a:t>Cuarto nivel</a:t>
-            </a:r>
-            <a:endParaRPr b="0" lang="es-ES" sz="1800" strike="noStrike" u="none">
-              <a:solidFill>
-                <a:srgbClr val="000000"/>
-              </a:solidFill>
-              <a:effectLst/>
-              <a:uFillTx/>
-              <a:latin typeface="Arial"/>
-            </a:endParaRPr>
-          </a:p>
-          <a:p>
-            <a:pPr lvl="4" marL="2057400" indent="-228600" defTabSz="914400">
-              <a:lnSpc>
-                <a:spcPct val="90000"/>
-              </a:lnSpc>
-              <a:spcBef>
-                <a:spcPts val="499"/>
-              </a:spcBef>
-              <a:buClr>
-                <a:srgbClr val="000000"/>
-              </a:buClr>
-              <a:buFont typeface="Arial"/>
-              <a:buChar char="•"/>
-            </a:pPr>
-            <a:r>
-              <a:rPr b="0" lang="es-ES" sz="1800" strike="noStrike" u="none">
-                <a:solidFill>
-                  <a:schemeClr val="dk1"/>
-                </a:solidFill>
-                <a:effectLst/>
-                <a:uFillTx/>
-                <a:latin typeface="Calibri"/>
-              </a:rPr>
-              <a:t>Quinto nivel</a:t>
-            </a:r>
-            <a:endParaRPr b="0" lang="es-ES" sz="1800" strike="noStrike" u="none">
-              <a:solidFill>
-                <a:srgbClr val="000000"/>
-              </a:solidFill>
-              <a:effectLst/>
-              <a:uFillTx/>
-              <a:latin typeface="Arial"/>
-            </a:endParaRPr>
-          </a:p>
-        </p:txBody>
-      </p:sp>
-      <p:sp>
-        <p:nvSpPr>
-          <p:cNvPr id="22" name="PlaceHolder 3"/>
+          <p:cNvPr id="22" name="PlaceHolder 2"/>
           <p:cNvSpPr>
             <a:spLocks noGrp="1"/>
           </p:cNvSpPr>
@@ -3557,7 +3879,7 @@
         <p:spPr>
           <a:xfrm>
             <a:off x="838080" y="6356520"/>
-            <a:ext cx="2741400" cy="363240"/>
+            <a:ext cx="2741040" cy="362880"/>
           </a:xfrm>
           <a:prstGeom prst="rect">
             <a:avLst/>
@@ -3628,7 +3950,7 @@
       </p:sp>
       <p:sp>
         <p:nvSpPr>
-          <p:cNvPr id="23" name="PlaceHolder 4"/>
+          <p:cNvPr id="23" name="PlaceHolder 3"/>
           <p:cNvSpPr>
             <a:spLocks noGrp="1"/>
           </p:cNvSpPr>
@@ -3639,7 +3961,7 @@
         <p:spPr>
           <a:xfrm>
             <a:off x="4038480" y="6356520"/>
-            <a:ext cx="4113000" cy="363240"/>
+            <a:ext cx="4112640" cy="362880"/>
           </a:xfrm>
           <a:prstGeom prst="rect">
             <a:avLst/>
@@ -3706,7 +4028,7 @@
       </p:sp>
       <p:sp>
         <p:nvSpPr>
-          <p:cNvPr id="24" name="PlaceHolder 5"/>
+          <p:cNvPr id="24" name="PlaceHolder 4"/>
           <p:cNvSpPr>
             <a:spLocks noGrp="1"/>
           </p:cNvSpPr>
@@ -3717,7 +4039,7 @@
         <p:spPr>
           <a:xfrm>
             <a:off x="8610480" y="6356520"/>
-            <a:ext cx="2741400" cy="363240"/>
+            <a:ext cx="2741040" cy="362880"/>
           </a:xfrm>
           <a:prstGeom prst="rect">
             <a:avLst/>
@@ -3762,7 +4084,7 @@
                 <a:tab algn="l" pos="0"/>
               </a:tabLst>
             </a:pPr>
-            <a:fld id="{DACC8C42-2CA4-4598-B870-491CACE8D346}" type="slidenum">
+            <a:fld id="{17E456E1-C566-44B0-982B-D02F9B0E7D50}" type="slidenum">
               <a:rPr b="0" lang="en-GB" sz="1200" strike="noStrike" u="none">
                 <a:solidFill>
                   <a:schemeClr val="dk1">
@@ -3792,8 +4114,8 @@
 </file>
 
 <file path=ppt/slideLayouts/slideLayout6.xml><?xml version="1.0" encoding="utf-8"?>
-<p:sldLayout xmlns:a="http://schemas.openxmlformats.org/drawingml/2006/main" xmlns:p="http://schemas.openxmlformats.org/presentationml/2006/main" xmlns:r="http://schemas.openxmlformats.org/officeDocument/2006/relationships" xmlns:p14="http://schemas.microsoft.com/office/powerpoint/2010/main" xmlns:p15="http://schemas.microsoft.com/office/powerpoint/2012/main" xmlns:mc="http://schemas.openxmlformats.org/markup-compatibility/2006" type="blank" preserve="1">
-  <p:cSld name="Encabezado de sección">
+<p:sldLayout xmlns:a="http://schemas.openxmlformats.org/drawingml/2006/main" xmlns:p="http://schemas.openxmlformats.org/presentationml/2006/main" xmlns:r="http://schemas.openxmlformats.org/officeDocument/2006/relationships" xmlns:p14="http://schemas.microsoft.com/office/powerpoint/2010/main" xmlns:p15="http://schemas.microsoft.com/office/powerpoint/2012/main" xmlns:mc="http://schemas.openxmlformats.org/markup-compatibility/2006" type="vertTx" preserve="1">
+  <p:cSld name="Título y texto vertical">
     <p:bg>
       <p:bgPr>
         <a:solidFill>
@@ -3827,8 +4149,8 @@
         </p:nvSpPr>
         <p:spPr>
           <a:xfrm>
-            <a:off x="831960" y="1709640"/>
-            <a:ext cx="10513800" cy="2850840"/>
+            <a:off x="838080" y="365040"/>
+            <a:ext cx="10513440" cy="1323360"/>
           </a:xfrm>
           <a:prstGeom prst="rect">
             <a:avLst/>
@@ -3839,7 +4161,7 @@
           </a:ln>
         </p:spPr>
         <p:txBody>
-          <a:bodyPr lIns="91440" rIns="91440" tIns="45720" bIns="45720" anchor="b">
+          <a:bodyPr lIns="91440" rIns="91440" tIns="45720" bIns="45720" anchor="ctr">
             <a:noAutofit/>
           </a:bodyPr>
           <a:p>
@@ -3853,7 +4175,7 @@
               </a:tabLst>
             </a:pPr>
             <a:r>
-              <a:rPr b="0" lang="es-ES" sz="6000" strike="noStrike" u="none">
+              <a:rPr b="0" lang="es-ES" sz="4400" strike="noStrike" u="none">
                 <a:solidFill>
                   <a:schemeClr val="dk1"/>
                 </a:solidFill>
@@ -3863,7 +4185,7 @@
               </a:rPr>
               <a:t>Haga clic para modificar el estilo de título del patrón</a:t>
             </a:r>
-            <a:endParaRPr b="0" lang="es-ES" sz="6000" strike="noStrike" u="none">
+            <a:endParaRPr b="0" lang="es-ES" sz="4400" strike="noStrike" u="none">
               <a:solidFill>
                 <a:srgbClr val="000000"/>
               </a:solidFill>
@@ -3886,8 +4208,8 @@
         </p:nvSpPr>
         <p:spPr>
           <a:xfrm>
-            <a:off x="831960" y="4589640"/>
-            <a:ext cx="10513800" cy="1498320"/>
+            <a:off x="838080" y="1825560"/>
+            <a:ext cx="10513440" cy="4349160"/>
           </a:xfrm>
           <a:prstGeom prst="rect">
             <a:avLst/>
@@ -3898,36 +4220,171 @@
           </a:ln>
         </p:spPr>
         <p:txBody>
-          <a:bodyPr lIns="91440" rIns="91440" tIns="45720" bIns="45720" anchor="t">
+          <a:bodyPr lIns="91440" rIns="91440" tIns="45720" bIns="45720" anchor="t" vert="eaVert">
             <a:noAutofit/>
           </a:bodyPr>
           <a:p>
-            <a:pPr indent="0" defTabSz="914400">
+            <a:pPr marL="228600" indent="-228600" defTabSz="914400">
               <a:lnSpc>
                 <a:spcPct val="90000"/>
               </a:lnSpc>
               <a:spcBef>
                 <a:spcPts val="1001"/>
               </a:spcBef>
-              <a:buNone/>
-              <a:tabLst>
-                <a:tab algn="l" pos="0"/>
-              </a:tabLst>
+              <a:buClr>
+                <a:srgbClr val="000000"/>
+              </a:buClr>
+              <a:buFont typeface="Arial"/>
+              <a:buChar char="•"/>
+            </a:pPr>
+            <a:r>
+              <a:rPr b="0" lang="es-ES" sz="2800" strike="noStrike" u="none">
+                <a:solidFill>
+                  <a:schemeClr val="dk1"/>
+                </a:solidFill>
+                <a:effectLst/>
+                <a:uFillTx/>
+                <a:latin typeface="Calibri"/>
+              </a:rPr>
+              <a:t>Haga clic para modificar los estilos de texto del patrón</a:t>
+            </a:r>
+            <a:endParaRPr b="0" lang="es-ES" sz="2800" strike="noStrike" u="none">
+              <a:solidFill>
+                <a:srgbClr val="000000"/>
+              </a:solidFill>
+              <a:effectLst/>
+              <a:uFillTx/>
+              <a:latin typeface="Arial"/>
+            </a:endParaRPr>
+          </a:p>
+          <a:p>
+            <a:pPr lvl="1" marL="685800" indent="-228600" defTabSz="914400">
+              <a:lnSpc>
+                <a:spcPct val="90000"/>
+              </a:lnSpc>
+              <a:spcBef>
+                <a:spcPts val="499"/>
+              </a:spcBef>
+              <a:buClr>
+                <a:srgbClr val="000000"/>
+              </a:buClr>
+              <a:buFont typeface="Arial"/>
+              <a:buChar char="•"/>
             </a:pPr>
             <a:r>
               <a:rPr b="0" lang="es-ES" sz="2400" strike="noStrike" u="none">
                 <a:solidFill>
-                  <a:schemeClr val="dk1">
-                    <a:tint val="75000"/>
-                  </a:schemeClr>
-                </a:solidFill>
-                <a:effectLst/>
-                <a:uFillTx/>
-                <a:latin typeface="Calibri"/>
-              </a:rPr>
-              <a:t>Haga clic para modificar los estilos de texto del patrón</a:t>
+                  <a:schemeClr val="dk1"/>
+                </a:solidFill>
+                <a:effectLst/>
+                <a:uFillTx/>
+                <a:latin typeface="Calibri"/>
+              </a:rPr>
+              <a:t>Segundo nivel</a:t>
             </a:r>
             <a:endParaRPr b="0" lang="es-ES" sz="2400" strike="noStrike" u="none">
+              <a:solidFill>
+                <a:srgbClr val="000000"/>
+              </a:solidFill>
+              <a:effectLst/>
+              <a:uFillTx/>
+              <a:latin typeface="Arial"/>
+            </a:endParaRPr>
+          </a:p>
+          <a:p>
+            <a:pPr lvl="2" marL="1143000" indent="-228600" defTabSz="914400">
+              <a:lnSpc>
+                <a:spcPct val="90000"/>
+              </a:lnSpc>
+              <a:spcBef>
+                <a:spcPts val="499"/>
+              </a:spcBef>
+              <a:buClr>
+                <a:srgbClr val="000000"/>
+              </a:buClr>
+              <a:buFont typeface="Arial"/>
+              <a:buChar char="•"/>
+            </a:pPr>
+            <a:r>
+              <a:rPr b="0" lang="es-ES" sz="2000" strike="noStrike" u="none">
+                <a:solidFill>
+                  <a:schemeClr val="dk1"/>
+                </a:solidFill>
+                <a:effectLst/>
+                <a:uFillTx/>
+                <a:latin typeface="Calibri"/>
+              </a:rPr>
+              <a:t>Tercer nivel</a:t>
+            </a:r>
+            <a:endParaRPr b="0" lang="es-ES" sz="2000" strike="noStrike" u="none">
+              <a:solidFill>
+                <a:srgbClr val="000000"/>
+              </a:solidFill>
+              <a:effectLst/>
+              <a:uFillTx/>
+              <a:latin typeface="Arial"/>
+            </a:endParaRPr>
+          </a:p>
+          <a:p>
+            <a:pPr lvl="3" marL="1600200" indent="-228600" defTabSz="914400">
+              <a:lnSpc>
+                <a:spcPct val="90000"/>
+              </a:lnSpc>
+              <a:spcBef>
+                <a:spcPts val="499"/>
+              </a:spcBef>
+              <a:buClr>
+                <a:srgbClr val="000000"/>
+              </a:buClr>
+              <a:buFont typeface="Arial"/>
+              <a:buChar char="•"/>
+            </a:pPr>
+            <a:r>
+              <a:rPr b="0" lang="es-ES" sz="1800" strike="noStrike" u="none">
+                <a:solidFill>
+                  <a:schemeClr val="dk1"/>
+                </a:solidFill>
+                <a:effectLst/>
+                <a:uFillTx/>
+                <a:latin typeface="Calibri"/>
+              </a:rPr>
+              <a:t>Cuarto nivel</a:t>
+            </a:r>
+            <a:endParaRPr b="0" lang="es-ES" sz="1800" strike="noStrike" u="none">
+              <a:solidFill>
+                <a:srgbClr val="000000"/>
+              </a:solidFill>
+              <a:effectLst/>
+              <a:uFillTx/>
+              <a:latin typeface="Arial"/>
+            </a:endParaRPr>
+          </a:p>
+          <a:p>
+            <a:pPr lvl="4" marL="2057400" indent="-228600" defTabSz="914400">
+              <a:lnSpc>
+                <a:spcPct val="90000"/>
+              </a:lnSpc>
+              <a:spcBef>
+                <a:spcPts val="499"/>
+              </a:spcBef>
+              <a:buClr>
+                <a:srgbClr val="000000"/>
+              </a:buClr>
+              <a:buFont typeface="Arial"/>
+              <a:buChar char="•"/>
+            </a:pPr>
+            <a:r>
+              <a:rPr b="0" lang="es-ES" sz="1800" strike="noStrike" u="none">
+                <a:solidFill>
+                  <a:schemeClr val="dk1"/>
+                </a:solidFill>
+                <a:effectLst/>
+                <a:uFillTx/>
+                <a:latin typeface="Calibri"/>
+              </a:rPr>
+              <a:t>Quinto nivel</a:t>
+            </a:r>
+            <a:endParaRPr b="0" lang="es-ES" sz="1800" strike="noStrike" u="none">
               <a:solidFill>
                 <a:srgbClr val="000000"/>
               </a:solidFill>
@@ -3951,7 +4408,7 @@
         <p:spPr>
           <a:xfrm>
             <a:off x="838080" y="6356520"/>
-            <a:ext cx="2741400" cy="363240"/>
+            <a:ext cx="2741040" cy="362880"/>
           </a:xfrm>
           <a:prstGeom prst="rect">
             <a:avLst/>
@@ -4033,7 +4490,7 @@
         <p:spPr>
           <a:xfrm>
             <a:off x="4038480" y="6356520"/>
-            <a:ext cx="4113000" cy="363240"/>
+            <a:ext cx="4112640" cy="362880"/>
           </a:xfrm>
           <a:prstGeom prst="rect">
             <a:avLst/>
@@ -4111,7 +4568,7 @@
         <p:spPr>
           <a:xfrm>
             <a:off x="8610480" y="6356520"/>
-            <a:ext cx="2741400" cy="363240"/>
+            <a:ext cx="2741040" cy="362880"/>
           </a:xfrm>
           <a:prstGeom prst="rect">
             <a:avLst/>
@@ -4156,7 +4613,7 @@
                 <a:tab algn="l" pos="0"/>
               </a:tabLst>
             </a:pPr>
-            <a:fld id="{19B23DD0-34C9-4571-9B98-088F64C6198D}" type="slidenum">
+            <a:fld id="{A9B346D5-96C3-4192-BEBF-2163DC5B7D6F}" type="slidenum">
               <a:rPr b="0" lang="en-GB" sz="1200" strike="noStrike" u="none">
                 <a:solidFill>
                   <a:schemeClr val="dk1">
@@ -4186,8 +4643,8 @@
 </file>
 
 <file path=ppt/slideLayouts/slideLayout7.xml><?xml version="1.0" encoding="utf-8"?>
-<p:sldLayout xmlns:a="http://schemas.openxmlformats.org/drawingml/2006/main" xmlns:p="http://schemas.openxmlformats.org/presentationml/2006/main" xmlns:r="http://schemas.openxmlformats.org/officeDocument/2006/relationships" xmlns:p14="http://schemas.microsoft.com/office/powerpoint/2010/main" xmlns:p15="http://schemas.microsoft.com/office/powerpoint/2012/main" xmlns:mc="http://schemas.openxmlformats.org/markup-compatibility/2006" type="twoObj" preserve="1">
-  <p:cSld name="Dos objetos">
+<p:sldLayout xmlns:a="http://schemas.openxmlformats.org/drawingml/2006/main" xmlns:p="http://schemas.openxmlformats.org/presentationml/2006/main" xmlns:r="http://schemas.openxmlformats.org/officeDocument/2006/relationships" xmlns:p14="http://schemas.microsoft.com/office/powerpoint/2010/main" xmlns:p15="http://schemas.microsoft.com/office/powerpoint/2012/main" xmlns:mc="http://schemas.openxmlformats.org/markup-compatibility/2006" type="vertTitleAndTx" preserve="1">
+  <p:cSld name="Título vertical y texto">
     <p:bg>
       <p:bgPr>
         <a:solidFill>
@@ -4221,8 +4678,8 @@
         </p:nvSpPr>
         <p:spPr>
           <a:xfrm>
-            <a:off x="838080" y="365040"/>
-            <a:ext cx="10513800" cy="1323720"/>
+            <a:off x="8724960" y="365040"/>
+            <a:ext cx="2626920" cy="5809680"/>
           </a:xfrm>
           <a:prstGeom prst="rect">
             <a:avLst/>
@@ -4233,7 +4690,7 @@
           </a:ln>
         </p:spPr>
         <p:txBody>
-          <a:bodyPr lIns="91440" rIns="91440" tIns="45720" bIns="45720" anchor="ctr">
+          <a:bodyPr lIns="91440" rIns="91440" tIns="45720" bIns="45720" anchor="ctr" vert="eaVert">
             <a:noAutofit/>
           </a:bodyPr>
           <a:p>
@@ -4280,8 +4737,8 @@
         </p:nvSpPr>
         <p:spPr>
           <a:xfrm>
-            <a:off x="838080" y="1825560"/>
-            <a:ext cx="5179680" cy="4349520"/>
+            <a:off x="838080" y="365040"/>
+            <a:ext cx="7732080" cy="5809680"/>
           </a:xfrm>
           <a:prstGeom prst="rect">
             <a:avLst/>
@@ -4292,7 +4749,7 @@
           </a:ln>
         </p:spPr>
         <p:txBody>
-          <a:bodyPr lIns="91440" rIns="91440" tIns="45720" bIns="45720" anchor="t">
+          <a:bodyPr lIns="91440" rIns="91440" tIns="45720" bIns="45720" anchor="t" vert="eaVert">
             <a:noAutofit/>
           </a:bodyPr>
           <a:p>
@@ -4470,205 +4927,6 @@
       <p:sp>
         <p:nvSpPr>
           <p:cNvPr id="32" name="PlaceHolder 3"/>
-          <p:cNvSpPr>
-            <a:spLocks noGrp="1"/>
-          </p:cNvSpPr>
-          <p:nvPr>
-            <p:ph type="body"/>
-          </p:nvPr>
-        </p:nvSpPr>
-        <p:spPr>
-          <a:xfrm>
-            <a:off x="6172200" y="1825560"/>
-            <a:ext cx="5179680" cy="4349520"/>
-          </a:xfrm>
-          <a:prstGeom prst="rect">
-            <a:avLst/>
-          </a:prstGeom>
-          <a:noFill/>
-          <a:ln w="0">
-            <a:noFill/>
-          </a:ln>
-        </p:spPr>
-        <p:txBody>
-          <a:bodyPr lIns="91440" rIns="91440" tIns="45720" bIns="45720" anchor="t">
-            <a:noAutofit/>
-          </a:bodyPr>
-          <a:p>
-            <a:pPr marL="228600" indent="-228600" defTabSz="914400">
-              <a:lnSpc>
-                <a:spcPct val="90000"/>
-              </a:lnSpc>
-              <a:spcBef>
-                <a:spcPts val="1001"/>
-              </a:spcBef>
-              <a:buClr>
-                <a:srgbClr val="000000"/>
-              </a:buClr>
-              <a:buFont typeface="Arial"/>
-              <a:buChar char="•"/>
-            </a:pPr>
-            <a:r>
-              <a:rPr b="0" lang="es-ES" sz="2800" strike="noStrike" u="none">
-                <a:solidFill>
-                  <a:schemeClr val="dk1"/>
-                </a:solidFill>
-                <a:effectLst/>
-                <a:uFillTx/>
-                <a:latin typeface="Calibri"/>
-              </a:rPr>
-              <a:t>Haga clic para modificar los estilos de texto del patrón</a:t>
-            </a:r>
-            <a:endParaRPr b="0" lang="es-ES" sz="2800" strike="noStrike" u="none">
-              <a:solidFill>
-                <a:srgbClr val="000000"/>
-              </a:solidFill>
-              <a:effectLst/>
-              <a:uFillTx/>
-              <a:latin typeface="Arial"/>
-            </a:endParaRPr>
-          </a:p>
-          <a:p>
-            <a:pPr lvl="1" marL="685800" indent="-228600" defTabSz="914400">
-              <a:lnSpc>
-                <a:spcPct val="90000"/>
-              </a:lnSpc>
-              <a:spcBef>
-                <a:spcPts val="499"/>
-              </a:spcBef>
-              <a:buClr>
-                <a:srgbClr val="000000"/>
-              </a:buClr>
-              <a:buFont typeface="Arial"/>
-              <a:buChar char="•"/>
-            </a:pPr>
-            <a:r>
-              <a:rPr b="0" lang="es-ES" sz="2400" strike="noStrike" u="none">
-                <a:solidFill>
-                  <a:schemeClr val="dk1"/>
-                </a:solidFill>
-                <a:effectLst/>
-                <a:uFillTx/>
-                <a:latin typeface="Calibri"/>
-              </a:rPr>
-              <a:t>Segundo nivel</a:t>
-            </a:r>
-            <a:endParaRPr b="0" lang="es-ES" sz="2400" strike="noStrike" u="none">
-              <a:solidFill>
-                <a:srgbClr val="000000"/>
-              </a:solidFill>
-              <a:effectLst/>
-              <a:uFillTx/>
-              <a:latin typeface="Arial"/>
-            </a:endParaRPr>
-          </a:p>
-          <a:p>
-            <a:pPr lvl="2" marL="1143000" indent="-228600" defTabSz="914400">
-              <a:lnSpc>
-                <a:spcPct val="90000"/>
-              </a:lnSpc>
-              <a:spcBef>
-                <a:spcPts val="499"/>
-              </a:spcBef>
-              <a:buClr>
-                <a:srgbClr val="000000"/>
-              </a:buClr>
-              <a:buFont typeface="Arial"/>
-              <a:buChar char="•"/>
-            </a:pPr>
-            <a:r>
-              <a:rPr b="0" lang="es-ES" sz="2000" strike="noStrike" u="none">
-                <a:solidFill>
-                  <a:schemeClr val="dk1"/>
-                </a:solidFill>
-                <a:effectLst/>
-                <a:uFillTx/>
-                <a:latin typeface="Calibri"/>
-              </a:rPr>
-              <a:t>Tercer nivel</a:t>
-            </a:r>
-            <a:endParaRPr b="0" lang="es-ES" sz="2000" strike="noStrike" u="none">
-              <a:solidFill>
-                <a:srgbClr val="000000"/>
-              </a:solidFill>
-              <a:effectLst/>
-              <a:uFillTx/>
-              <a:latin typeface="Arial"/>
-            </a:endParaRPr>
-          </a:p>
-          <a:p>
-            <a:pPr lvl="3" marL="1600200" indent="-228600" defTabSz="914400">
-              <a:lnSpc>
-                <a:spcPct val="90000"/>
-              </a:lnSpc>
-              <a:spcBef>
-                <a:spcPts val="499"/>
-              </a:spcBef>
-              <a:buClr>
-                <a:srgbClr val="000000"/>
-              </a:buClr>
-              <a:buFont typeface="Arial"/>
-              <a:buChar char="•"/>
-            </a:pPr>
-            <a:r>
-              <a:rPr b="0" lang="es-ES" sz="1800" strike="noStrike" u="none">
-                <a:solidFill>
-                  <a:schemeClr val="dk1"/>
-                </a:solidFill>
-                <a:effectLst/>
-                <a:uFillTx/>
-                <a:latin typeface="Calibri"/>
-              </a:rPr>
-              <a:t>Cuarto nivel</a:t>
-            </a:r>
-            <a:endParaRPr b="0" lang="es-ES" sz="1800" strike="noStrike" u="none">
-              <a:solidFill>
-                <a:srgbClr val="000000"/>
-              </a:solidFill>
-              <a:effectLst/>
-              <a:uFillTx/>
-              <a:latin typeface="Arial"/>
-            </a:endParaRPr>
-          </a:p>
-          <a:p>
-            <a:pPr lvl="4" marL="2057400" indent="-228600" defTabSz="914400">
-              <a:lnSpc>
-                <a:spcPct val="90000"/>
-              </a:lnSpc>
-              <a:spcBef>
-                <a:spcPts val="499"/>
-              </a:spcBef>
-              <a:buClr>
-                <a:srgbClr val="000000"/>
-              </a:buClr>
-              <a:buFont typeface="Arial"/>
-              <a:buChar char="•"/>
-            </a:pPr>
-            <a:r>
-              <a:rPr b="0" lang="es-ES" sz="1800" strike="noStrike" u="none">
-                <a:solidFill>
-                  <a:schemeClr val="dk1"/>
-                </a:solidFill>
-                <a:effectLst/>
-                <a:uFillTx/>
-                <a:latin typeface="Calibri"/>
-              </a:rPr>
-              <a:t>Quinto nivel</a:t>
-            </a:r>
-            <a:endParaRPr b="0" lang="es-ES" sz="1800" strike="noStrike" u="none">
-              <a:solidFill>
-                <a:srgbClr val="000000"/>
-              </a:solidFill>
-              <a:effectLst/>
-              <a:uFillTx/>
-              <a:latin typeface="Arial"/>
-            </a:endParaRPr>
-          </a:p>
-        </p:txBody>
-      </p:sp>
-      <p:sp>
-        <p:nvSpPr>
-          <p:cNvPr id="33" name="PlaceHolder 4"/>
           <p:cNvSpPr>
             <a:spLocks noGrp="1"/>
           </p:cNvSpPr>
@@ -4679,7 +4937,7 @@
         <p:spPr>
           <a:xfrm>
             <a:off x="838080" y="6356520"/>
-            <a:ext cx="2741400" cy="363240"/>
+            <a:ext cx="2741040" cy="362880"/>
           </a:xfrm>
           <a:prstGeom prst="rect">
             <a:avLst/>
@@ -4750,7 +5008,7 @@
       </p:sp>
       <p:sp>
         <p:nvSpPr>
-          <p:cNvPr id="34" name="PlaceHolder 5"/>
+          <p:cNvPr id="33" name="PlaceHolder 4"/>
           <p:cNvSpPr>
             <a:spLocks noGrp="1"/>
           </p:cNvSpPr>
@@ -4761,7 +5019,7 @@
         <p:spPr>
           <a:xfrm>
             <a:off x="4038480" y="6356520"/>
-            <a:ext cx="4113000" cy="363240"/>
+            <a:ext cx="4112640" cy="362880"/>
           </a:xfrm>
           <a:prstGeom prst="rect">
             <a:avLst/>
@@ -4828,7 +5086,7 @@
       </p:sp>
       <p:sp>
         <p:nvSpPr>
-          <p:cNvPr id="35" name="PlaceHolder 6"/>
+          <p:cNvPr id="34" name="PlaceHolder 5"/>
           <p:cNvSpPr>
             <a:spLocks noGrp="1"/>
           </p:cNvSpPr>
@@ -4839,7 +5097,7 @@
         <p:spPr>
           <a:xfrm>
             <a:off x="8610480" y="6356520"/>
-            <a:ext cx="2741400" cy="363240"/>
+            <a:ext cx="2741040" cy="362880"/>
           </a:xfrm>
           <a:prstGeom prst="rect">
             <a:avLst/>
@@ -4884,7 +5142,7 @@
                 <a:tab algn="l" pos="0"/>
               </a:tabLst>
             </a:pPr>
-            <a:fld id="{0E0016CF-8045-448B-9C1C-03FF842D40D7}" type="slidenum">
+            <a:fld id="{7AA0DEE4-01A3-4264-9B5F-E04C80EFD961}" type="slidenum">
               <a:rPr b="0" lang="en-GB" sz="1200" strike="noStrike" u="none">
                 <a:solidFill>
                   <a:schemeClr val="dk1">
@@ -4914,8 +5172,8 @@
 </file>
 
 <file path=ppt/slideLayouts/slideLayout8.xml><?xml version="1.0" encoding="utf-8"?>
-<p:sldLayout xmlns:a="http://schemas.openxmlformats.org/drawingml/2006/main" xmlns:p="http://schemas.openxmlformats.org/presentationml/2006/main" xmlns:r="http://schemas.openxmlformats.org/officeDocument/2006/relationships" xmlns:p14="http://schemas.microsoft.com/office/powerpoint/2010/main" xmlns:p15="http://schemas.microsoft.com/office/powerpoint/2012/main" xmlns:mc="http://schemas.openxmlformats.org/markup-compatibility/2006" type="blank" preserve="1">
-  <p:cSld name="Comparación">
+<p:sldLayout xmlns:a="http://schemas.openxmlformats.org/drawingml/2006/main" xmlns:p="http://schemas.openxmlformats.org/presentationml/2006/main" xmlns:r="http://schemas.openxmlformats.org/officeDocument/2006/relationships" xmlns:p14="http://schemas.microsoft.com/office/powerpoint/2010/main" xmlns:p15="http://schemas.microsoft.com/office/powerpoint/2012/main" xmlns:mc="http://schemas.openxmlformats.org/markup-compatibility/2006" type="obj" preserve="1">
+  <p:cSld name="Título y objetos">
     <p:bg>
       <p:bgPr>
         <a:solidFill>
@@ -4939,7 +5197,7 @@
       </p:grpSpPr>
       <p:sp>
         <p:nvSpPr>
-          <p:cNvPr id="36" name="PlaceHolder 1"/>
+          <p:cNvPr id="35" name="PlaceHolder 1"/>
           <p:cNvSpPr>
             <a:spLocks noGrp="1"/>
           </p:cNvSpPr>
@@ -4949,8 +5207,8 @@
         </p:nvSpPr>
         <p:spPr>
           <a:xfrm>
-            <a:off x="839880" y="365040"/>
-            <a:ext cx="10513800" cy="1323720"/>
+            <a:off x="838080" y="365040"/>
+            <a:ext cx="10513440" cy="1323360"/>
           </a:xfrm>
           <a:prstGeom prst="rect">
             <a:avLst/>
@@ -4998,7 +5256,7 @@
       </p:sp>
       <p:sp>
         <p:nvSpPr>
-          <p:cNvPr id="37" name="PlaceHolder 2"/>
+          <p:cNvPr id="36" name="PlaceHolder 2"/>
           <p:cNvSpPr>
             <a:spLocks noGrp="1"/>
           </p:cNvSpPr>
@@ -5008,70 +5266,8 @@
         </p:nvSpPr>
         <p:spPr>
           <a:xfrm>
-            <a:off x="839880" y="1681200"/>
-            <a:ext cx="5155920" cy="822240"/>
-          </a:xfrm>
-          <a:prstGeom prst="rect">
-            <a:avLst/>
-          </a:prstGeom>
-          <a:noFill/>
-          <a:ln w="0">
-            <a:noFill/>
-          </a:ln>
-        </p:spPr>
-        <p:txBody>
-          <a:bodyPr lIns="91440" rIns="91440" tIns="45720" bIns="45720" anchor="b">
-            <a:noAutofit/>
-          </a:bodyPr>
-          <a:p>
-            <a:pPr indent="0" defTabSz="914400">
-              <a:lnSpc>
-                <a:spcPct val="90000"/>
-              </a:lnSpc>
-              <a:spcBef>
-                <a:spcPts val="1001"/>
-              </a:spcBef>
-              <a:buNone/>
-              <a:tabLst>
-                <a:tab algn="l" pos="0"/>
-              </a:tabLst>
-            </a:pPr>
-            <a:r>
-              <a:rPr b="1" lang="es-ES" sz="2400" strike="noStrike" u="none">
-                <a:solidFill>
-                  <a:schemeClr val="dk1"/>
-                </a:solidFill>
-                <a:effectLst/>
-                <a:uFillTx/>
-                <a:latin typeface="Calibri"/>
-              </a:rPr>
-              <a:t>Haga clic para modificar los estilos de texto del patrón</a:t>
-            </a:r>
-            <a:endParaRPr b="0" lang="es-ES" sz="2400" strike="noStrike" u="none">
-              <a:solidFill>
-                <a:srgbClr val="000000"/>
-              </a:solidFill>
-              <a:effectLst/>
-              <a:uFillTx/>
-              <a:latin typeface="Arial"/>
-            </a:endParaRPr>
-          </a:p>
-        </p:txBody>
-      </p:sp>
-      <p:sp>
-        <p:nvSpPr>
-          <p:cNvPr id="38" name="PlaceHolder 3"/>
-          <p:cNvSpPr>
-            <a:spLocks noGrp="1"/>
-          </p:cNvSpPr>
-          <p:nvPr>
-            <p:ph type="body"/>
-          </p:nvPr>
-        </p:nvSpPr>
-        <p:spPr>
-          <a:xfrm>
-            <a:off x="839880" y="2505240"/>
-            <a:ext cx="5155920" cy="3682800"/>
+            <a:off x="838080" y="1825560"/>
+            <a:ext cx="10513440" cy="4349160"/>
           </a:xfrm>
           <a:prstGeom prst="rect">
             <a:avLst/>
@@ -5259,268 +5455,7 @@
       </p:sp>
       <p:sp>
         <p:nvSpPr>
-          <p:cNvPr id="39" name="PlaceHolder 4"/>
-          <p:cNvSpPr>
-            <a:spLocks noGrp="1"/>
-          </p:cNvSpPr>
-          <p:nvPr>
-            <p:ph type="body"/>
-          </p:nvPr>
-        </p:nvSpPr>
-        <p:spPr>
-          <a:xfrm>
-            <a:off x="6172200" y="1681200"/>
-            <a:ext cx="5181480" cy="822240"/>
-          </a:xfrm>
-          <a:prstGeom prst="rect">
-            <a:avLst/>
-          </a:prstGeom>
-          <a:noFill/>
-          <a:ln w="0">
-            <a:noFill/>
-          </a:ln>
-        </p:spPr>
-        <p:txBody>
-          <a:bodyPr lIns="91440" rIns="91440" tIns="45720" bIns="45720" anchor="b">
-            <a:noAutofit/>
-          </a:bodyPr>
-          <a:p>
-            <a:pPr indent="0" defTabSz="914400">
-              <a:lnSpc>
-                <a:spcPct val="90000"/>
-              </a:lnSpc>
-              <a:spcBef>
-                <a:spcPts val="1001"/>
-              </a:spcBef>
-              <a:buNone/>
-              <a:tabLst>
-                <a:tab algn="l" pos="0"/>
-              </a:tabLst>
-            </a:pPr>
-            <a:r>
-              <a:rPr b="1" lang="es-ES" sz="2400" strike="noStrike" u="none">
-                <a:solidFill>
-                  <a:schemeClr val="dk1"/>
-                </a:solidFill>
-                <a:effectLst/>
-                <a:uFillTx/>
-                <a:latin typeface="Calibri"/>
-              </a:rPr>
-              <a:t>Haga clic para modificar los estilos de texto del patrón</a:t>
-            </a:r>
-            <a:endParaRPr b="0" lang="es-ES" sz="2400" strike="noStrike" u="none">
-              <a:solidFill>
-                <a:srgbClr val="000000"/>
-              </a:solidFill>
-              <a:effectLst/>
-              <a:uFillTx/>
-              <a:latin typeface="Arial"/>
-            </a:endParaRPr>
-          </a:p>
-        </p:txBody>
-      </p:sp>
-      <p:sp>
-        <p:nvSpPr>
-          <p:cNvPr id="40" name="PlaceHolder 5"/>
-          <p:cNvSpPr>
-            <a:spLocks noGrp="1"/>
-          </p:cNvSpPr>
-          <p:nvPr>
-            <p:ph type="body"/>
-          </p:nvPr>
-        </p:nvSpPr>
-        <p:spPr>
-          <a:xfrm>
-            <a:off x="6172200" y="2505240"/>
-            <a:ext cx="5181480" cy="3682800"/>
-          </a:xfrm>
-          <a:prstGeom prst="rect">
-            <a:avLst/>
-          </a:prstGeom>
-          <a:noFill/>
-          <a:ln w="0">
-            <a:noFill/>
-          </a:ln>
-        </p:spPr>
-        <p:txBody>
-          <a:bodyPr lIns="91440" rIns="91440" tIns="45720" bIns="45720" anchor="t">
-            <a:noAutofit/>
-          </a:bodyPr>
-          <a:p>
-            <a:pPr marL="228600" indent="-228600" defTabSz="914400">
-              <a:lnSpc>
-                <a:spcPct val="90000"/>
-              </a:lnSpc>
-              <a:spcBef>
-                <a:spcPts val="1001"/>
-              </a:spcBef>
-              <a:buClr>
-                <a:srgbClr val="000000"/>
-              </a:buClr>
-              <a:buFont typeface="Arial"/>
-              <a:buChar char="•"/>
-            </a:pPr>
-            <a:r>
-              <a:rPr b="0" lang="es-ES" sz="2800" strike="noStrike" u="none">
-                <a:solidFill>
-                  <a:schemeClr val="dk1"/>
-                </a:solidFill>
-                <a:effectLst/>
-                <a:uFillTx/>
-                <a:latin typeface="Calibri"/>
-              </a:rPr>
-              <a:t>Haga clic para modificar los estilos de texto del patrón</a:t>
-            </a:r>
-            <a:endParaRPr b="0" lang="es-ES" sz="2800" strike="noStrike" u="none">
-              <a:solidFill>
-                <a:srgbClr val="000000"/>
-              </a:solidFill>
-              <a:effectLst/>
-              <a:uFillTx/>
-              <a:latin typeface="Arial"/>
-            </a:endParaRPr>
-          </a:p>
-          <a:p>
-            <a:pPr lvl="1" marL="685800" indent="-228600" defTabSz="914400">
-              <a:lnSpc>
-                <a:spcPct val="90000"/>
-              </a:lnSpc>
-              <a:spcBef>
-                <a:spcPts val="499"/>
-              </a:spcBef>
-              <a:buClr>
-                <a:srgbClr val="000000"/>
-              </a:buClr>
-              <a:buFont typeface="Arial"/>
-              <a:buChar char="•"/>
-            </a:pPr>
-            <a:r>
-              <a:rPr b="0" lang="es-ES" sz="2400" strike="noStrike" u="none">
-                <a:solidFill>
-                  <a:schemeClr val="dk1"/>
-                </a:solidFill>
-                <a:effectLst/>
-                <a:uFillTx/>
-                <a:latin typeface="Calibri"/>
-              </a:rPr>
-              <a:t>Segundo nivel</a:t>
-            </a:r>
-            <a:endParaRPr b="0" lang="es-ES" sz="2400" strike="noStrike" u="none">
-              <a:solidFill>
-                <a:srgbClr val="000000"/>
-              </a:solidFill>
-              <a:effectLst/>
-              <a:uFillTx/>
-              <a:latin typeface="Arial"/>
-            </a:endParaRPr>
-          </a:p>
-          <a:p>
-            <a:pPr lvl="2" marL="1143000" indent="-228600" defTabSz="914400">
-              <a:lnSpc>
-                <a:spcPct val="90000"/>
-              </a:lnSpc>
-              <a:spcBef>
-                <a:spcPts val="499"/>
-              </a:spcBef>
-              <a:buClr>
-                <a:srgbClr val="000000"/>
-              </a:buClr>
-              <a:buFont typeface="Arial"/>
-              <a:buChar char="•"/>
-            </a:pPr>
-            <a:r>
-              <a:rPr b="0" lang="es-ES" sz="2000" strike="noStrike" u="none">
-                <a:solidFill>
-                  <a:schemeClr val="dk1"/>
-                </a:solidFill>
-                <a:effectLst/>
-                <a:uFillTx/>
-                <a:latin typeface="Calibri"/>
-              </a:rPr>
-              <a:t>Tercer nivel</a:t>
-            </a:r>
-            <a:endParaRPr b="0" lang="es-ES" sz="2000" strike="noStrike" u="none">
-              <a:solidFill>
-                <a:srgbClr val="000000"/>
-              </a:solidFill>
-              <a:effectLst/>
-              <a:uFillTx/>
-              <a:latin typeface="Arial"/>
-            </a:endParaRPr>
-          </a:p>
-          <a:p>
-            <a:pPr lvl="3" marL="1600200" indent="-228600" defTabSz="914400">
-              <a:lnSpc>
-                <a:spcPct val="90000"/>
-              </a:lnSpc>
-              <a:spcBef>
-                <a:spcPts val="499"/>
-              </a:spcBef>
-              <a:buClr>
-                <a:srgbClr val="000000"/>
-              </a:buClr>
-              <a:buFont typeface="Arial"/>
-              <a:buChar char="•"/>
-            </a:pPr>
-            <a:r>
-              <a:rPr b="0" lang="es-ES" sz="1800" strike="noStrike" u="none">
-                <a:solidFill>
-                  <a:schemeClr val="dk1"/>
-                </a:solidFill>
-                <a:effectLst/>
-                <a:uFillTx/>
-                <a:latin typeface="Calibri"/>
-              </a:rPr>
-              <a:t>Cuarto nivel</a:t>
-            </a:r>
-            <a:endParaRPr b="0" lang="es-ES" sz="1800" strike="noStrike" u="none">
-              <a:solidFill>
-                <a:srgbClr val="000000"/>
-              </a:solidFill>
-              <a:effectLst/>
-              <a:uFillTx/>
-              <a:latin typeface="Arial"/>
-            </a:endParaRPr>
-          </a:p>
-          <a:p>
-            <a:pPr lvl="4" marL="2057400" indent="-228600" defTabSz="914400">
-              <a:lnSpc>
-                <a:spcPct val="90000"/>
-              </a:lnSpc>
-              <a:spcBef>
-                <a:spcPts val="499"/>
-              </a:spcBef>
-              <a:buClr>
-                <a:srgbClr val="000000"/>
-              </a:buClr>
-              <a:buFont typeface="Arial"/>
-              <a:buChar char="•"/>
-            </a:pPr>
-            <a:r>
-              <a:rPr b="0" lang="es-ES" sz="1800" strike="noStrike" u="none">
-                <a:solidFill>
-                  <a:schemeClr val="dk1"/>
-                </a:solidFill>
-                <a:effectLst/>
-                <a:uFillTx/>
-                <a:latin typeface="Calibri"/>
-              </a:rPr>
-              <a:t>Quinto nivel</a:t>
-            </a:r>
-            <a:endParaRPr b="0" lang="es-ES" sz="1800" strike="noStrike" u="none">
-              <a:solidFill>
-                <a:srgbClr val="000000"/>
-              </a:solidFill>
-              <a:effectLst/>
-              <a:uFillTx/>
-              <a:latin typeface="Arial"/>
-            </a:endParaRPr>
-          </a:p>
-        </p:txBody>
-      </p:sp>
-      <p:sp>
-        <p:nvSpPr>
-          <p:cNvPr id="41" name="PlaceHolder 6"/>
+          <p:cNvPr id="37" name="PlaceHolder 3"/>
           <p:cNvSpPr>
             <a:spLocks noGrp="1"/>
           </p:cNvSpPr>
@@ -5531,7 +5466,7 @@
         <p:spPr>
           <a:xfrm>
             <a:off x="838080" y="6356520"/>
-            <a:ext cx="2741400" cy="363240"/>
+            <a:ext cx="2741040" cy="362880"/>
           </a:xfrm>
           <a:prstGeom prst="rect">
             <a:avLst/>
@@ -5602,7 +5537,7 @@
       </p:sp>
       <p:sp>
         <p:nvSpPr>
-          <p:cNvPr id="42" name="PlaceHolder 7"/>
+          <p:cNvPr id="38" name="PlaceHolder 4"/>
           <p:cNvSpPr>
             <a:spLocks noGrp="1"/>
           </p:cNvSpPr>
@@ -5613,7 +5548,7 @@
         <p:spPr>
           <a:xfrm>
             <a:off x="4038480" y="6356520"/>
-            <a:ext cx="4113000" cy="363240"/>
+            <a:ext cx="4112640" cy="362880"/>
           </a:xfrm>
           <a:prstGeom prst="rect">
             <a:avLst/>
@@ -5680,7 +5615,7 @@
       </p:sp>
       <p:sp>
         <p:nvSpPr>
-          <p:cNvPr id="43" name="PlaceHolder 8"/>
+          <p:cNvPr id="39" name="PlaceHolder 5"/>
           <p:cNvSpPr>
             <a:spLocks noGrp="1"/>
           </p:cNvSpPr>
@@ -5691,7 +5626,7 @@
         <p:spPr>
           <a:xfrm>
             <a:off x="8610480" y="6356520"/>
-            <a:ext cx="2741400" cy="363240"/>
+            <a:ext cx="2741040" cy="362880"/>
           </a:xfrm>
           <a:prstGeom prst="rect">
             <a:avLst/>
@@ -5736,7 +5671,7 @@
                 <a:tab algn="l" pos="0"/>
               </a:tabLst>
             </a:pPr>
-            <a:fld id="{912D7EFB-2E44-4032-A107-B739343FC9B4}" type="slidenum">
+            <a:fld id="{1202E780-FE61-482F-A869-F3CD3DC38B86}" type="slidenum">
               <a:rPr b="0" lang="en-GB" sz="1200" strike="noStrike" u="none">
                 <a:solidFill>
                   <a:schemeClr val="dk1">
@@ -5766,8 +5701,8 @@
 </file>
 
 <file path=ppt/slideLayouts/slideLayout9.xml><?xml version="1.0" encoding="utf-8"?>
-<p:sldLayout xmlns:a="http://schemas.openxmlformats.org/drawingml/2006/main" xmlns:p="http://schemas.openxmlformats.org/presentationml/2006/main" xmlns:r="http://schemas.openxmlformats.org/officeDocument/2006/relationships" xmlns:p14="http://schemas.microsoft.com/office/powerpoint/2010/main" xmlns:p15="http://schemas.microsoft.com/office/powerpoint/2012/main" xmlns:mc="http://schemas.openxmlformats.org/markup-compatibility/2006" type="titleOnly" preserve="1">
-  <p:cSld name="Solo el título">
+<p:sldLayout xmlns:a="http://schemas.openxmlformats.org/drawingml/2006/main" xmlns:p="http://schemas.openxmlformats.org/presentationml/2006/main" xmlns:r="http://schemas.openxmlformats.org/officeDocument/2006/relationships" xmlns:p14="http://schemas.microsoft.com/office/powerpoint/2010/main" xmlns:p15="http://schemas.microsoft.com/office/powerpoint/2012/main" xmlns:mc="http://schemas.openxmlformats.org/markup-compatibility/2006" type="blank" preserve="1">
+  <p:cSld name="Encabezado de sección">
     <p:bg>
       <p:bgPr>
         <a:solidFill>
@@ -5791,7 +5726,7 @@
       </p:grpSpPr>
       <p:sp>
         <p:nvSpPr>
-          <p:cNvPr id="44" name="PlaceHolder 1"/>
+          <p:cNvPr id="40" name="PlaceHolder 1"/>
           <p:cNvSpPr>
             <a:spLocks noGrp="1"/>
           </p:cNvSpPr>
@@ -5801,8 +5736,8 @@
         </p:nvSpPr>
         <p:spPr>
           <a:xfrm>
-            <a:off x="838080" y="365040"/>
-            <a:ext cx="10513800" cy="1323720"/>
+            <a:off x="831960" y="1709640"/>
+            <a:ext cx="10513440" cy="2850480"/>
           </a:xfrm>
           <a:prstGeom prst="rect">
             <a:avLst/>
@@ -5813,7 +5748,7 @@
           </a:ln>
         </p:spPr>
         <p:txBody>
-          <a:bodyPr lIns="91440" rIns="91440" tIns="45720" bIns="45720" anchor="ctr">
+          <a:bodyPr lIns="91440" rIns="91440" tIns="45720" bIns="45720" anchor="b">
             <a:noAutofit/>
           </a:bodyPr>
           <a:p>
@@ -5827,7 +5762,7 @@
               </a:tabLst>
             </a:pPr>
             <a:r>
-              <a:rPr b="0" lang="es-ES" sz="4400" strike="noStrike" u="none">
+              <a:rPr b="0" lang="es-ES" sz="6000" strike="noStrike" u="none">
                 <a:solidFill>
                   <a:schemeClr val="dk1"/>
                 </a:solidFill>
@@ -5837,7 +5772,7 @@
               </a:rPr>
               <a:t>Haga clic para modificar el estilo de título del patrón</a:t>
             </a:r>
-            <a:endParaRPr b="0" lang="es-ES" sz="4400" strike="noStrike" u="none">
+            <a:endParaRPr b="0" lang="es-ES" sz="6000" strike="noStrike" u="none">
               <a:solidFill>
                 <a:srgbClr val="000000"/>
               </a:solidFill>
@@ -5850,7 +5785,71 @@
       </p:sp>
       <p:sp>
         <p:nvSpPr>
-          <p:cNvPr id="45" name="PlaceHolder 2"/>
+          <p:cNvPr id="41" name="PlaceHolder 2"/>
+          <p:cNvSpPr>
+            <a:spLocks noGrp="1"/>
+          </p:cNvSpPr>
+          <p:nvPr>
+            <p:ph type="body"/>
+          </p:nvPr>
+        </p:nvSpPr>
+        <p:spPr>
+          <a:xfrm>
+            <a:off x="831960" y="4589640"/>
+            <a:ext cx="10513440" cy="1497960"/>
+          </a:xfrm>
+          <a:prstGeom prst="rect">
+            <a:avLst/>
+          </a:prstGeom>
+          <a:noFill/>
+          <a:ln w="0">
+            <a:noFill/>
+          </a:ln>
+        </p:spPr>
+        <p:txBody>
+          <a:bodyPr lIns="91440" rIns="91440" tIns="45720" bIns="45720" anchor="t">
+            <a:noAutofit/>
+          </a:bodyPr>
+          <a:p>
+            <a:pPr indent="0" defTabSz="914400">
+              <a:lnSpc>
+                <a:spcPct val="90000"/>
+              </a:lnSpc>
+              <a:spcBef>
+                <a:spcPts val="1001"/>
+              </a:spcBef>
+              <a:buNone/>
+              <a:tabLst>
+                <a:tab algn="l" pos="0"/>
+              </a:tabLst>
+            </a:pPr>
+            <a:r>
+              <a:rPr b="0" lang="es-ES" sz="2400" strike="noStrike" u="none">
+                <a:solidFill>
+                  <a:schemeClr val="dk1">
+                    <a:tint val="75000"/>
+                  </a:schemeClr>
+                </a:solidFill>
+                <a:effectLst/>
+                <a:uFillTx/>
+                <a:latin typeface="Calibri"/>
+              </a:rPr>
+              <a:t>Haga clic para modificar los estilos de texto del patrón</a:t>
+            </a:r>
+            <a:endParaRPr b="0" lang="es-ES" sz="2400" strike="noStrike" u="none">
+              <a:solidFill>
+                <a:srgbClr val="000000"/>
+              </a:solidFill>
+              <a:effectLst/>
+              <a:uFillTx/>
+              <a:latin typeface="Arial"/>
+            </a:endParaRPr>
+          </a:p>
+        </p:txBody>
+      </p:sp>
+      <p:sp>
+        <p:nvSpPr>
+          <p:cNvPr id="42" name="PlaceHolder 3"/>
           <p:cNvSpPr>
             <a:spLocks noGrp="1"/>
           </p:cNvSpPr>
@@ -5861,7 +5860,7 @@
         <p:spPr>
           <a:xfrm>
             <a:off x="838080" y="6356520"/>
-            <a:ext cx="2741400" cy="363240"/>
+            <a:ext cx="2741040" cy="362880"/>
           </a:xfrm>
           <a:prstGeom prst="rect">
             <a:avLst/>
@@ -5932,7 +5931,7 @@
       </p:sp>
       <p:sp>
         <p:nvSpPr>
-          <p:cNvPr id="46" name="PlaceHolder 3"/>
+          <p:cNvPr id="43" name="PlaceHolder 4"/>
           <p:cNvSpPr>
             <a:spLocks noGrp="1"/>
           </p:cNvSpPr>
@@ -5943,7 +5942,7 @@
         <p:spPr>
           <a:xfrm>
             <a:off x="4038480" y="6356520"/>
-            <a:ext cx="4113000" cy="363240"/>
+            <a:ext cx="4112640" cy="362880"/>
           </a:xfrm>
           <a:prstGeom prst="rect">
             <a:avLst/>
@@ -6010,7 +6009,7 @@
       </p:sp>
       <p:sp>
         <p:nvSpPr>
-          <p:cNvPr id="47" name="PlaceHolder 4"/>
+          <p:cNvPr id="44" name="PlaceHolder 5"/>
           <p:cNvSpPr>
             <a:spLocks noGrp="1"/>
           </p:cNvSpPr>
@@ -6021,7 +6020,7 @@
         <p:spPr>
           <a:xfrm>
             <a:off x="8610480" y="6356520"/>
-            <a:ext cx="2741400" cy="363240"/>
+            <a:ext cx="2741040" cy="362880"/>
           </a:xfrm>
           <a:prstGeom prst="rect">
             <a:avLst/>
@@ -6066,7 +6065,7 @@
                 <a:tab algn="l" pos="0"/>
               </a:tabLst>
             </a:pPr>
-            <a:fld id="{EC51512A-E339-43DA-AA07-B1A3316FCF7F}" type="slidenum">
+            <a:fld id="{DC20456E-2573-4E8F-A76A-441E0B6459D3}" type="slidenum">
               <a:rPr b="0" lang="en-GB" sz="1200" strike="noStrike" u="none">
                 <a:solidFill>
                   <a:schemeClr val="dk1">
@@ -6156,8 +6155,8 @@
         </p:nvSpPr>
         <p:spPr>
           <a:xfrm>
-            <a:off x="3420000" y="485640"/>
-            <a:ext cx="2518560" cy="5814000"/>
+            <a:off x="6300000" y="360000"/>
+            <a:ext cx="2518200" cy="5813640"/>
           </a:xfrm>
           <a:prstGeom prst="rect">
             <a:avLst/>
@@ -7032,14 +7031,14 @@
       </p:sp>
       <p:sp>
         <p:nvSpPr>
-          <p:cNvPr id="60" name="2 Marcador de contenido 5"/>
+          <p:cNvPr id="60" name="2 Marcador de contenido 2"/>
           <p:cNvSpPr/>
           <p:nvPr/>
         </p:nvSpPr>
         <p:spPr>
           <a:xfrm>
-            <a:off x="6300000" y="1800000"/>
-            <a:ext cx="2518560" cy="2699640"/>
+            <a:off x="3421800" y="818640"/>
+            <a:ext cx="2518200" cy="5121360"/>
           </a:xfrm>
           <a:prstGeom prst="rect">
             <a:avLst/>
@@ -7101,7 +7100,7 @@
                 <a:uFillTx/>
                 <a:latin typeface="Calibri"/>
               </a:rPr>
-              <a:t>: Confirmar registro</a:t>
+              <a:t>: Autenticarse</a:t>
             </a:r>
             <a:endParaRPr b="0" lang="es-ES" sz="1200" strike="noStrike" u="none">
               <a:solidFill>
@@ -7128,7 +7127,7 @@
               </a:tabLst>
             </a:pPr>
             <a:r>
-              <a:rPr b="0" i="1" lang="en-GB" sz="1000" strike="noStrike" u="none">
+              <a:rPr b="0" i="1" lang="en-GB" sz="1200" strike="noStrike" u="none">
                 <a:solidFill>
                   <a:schemeClr val="dk1"/>
                 </a:solidFill>
@@ -7139,7 +7138,7 @@
               <a:t>Objetivo</a:t>
             </a:r>
             <a:r>
-              <a:rPr b="0" lang="en-GB" sz="1000" strike="noStrike" u="none">
+              <a:rPr b="0" lang="en-GB" sz="1050" strike="noStrike" u="none">
                 <a:solidFill>
                   <a:schemeClr val="dk1"/>
                 </a:solidFill>
@@ -7147,9 +7146,9 @@
                 <a:uFillTx/>
                 <a:latin typeface="Lucida Handwriting"/>
               </a:rPr>
-              <a:t>: Confirmar al usuario que su cuenta se ha creado correctamente</a:t>
-            </a:r>
-            <a:endParaRPr b="0" lang="es-ES" sz="1000" strike="noStrike" u="none">
+              <a:t>: Permitir al usuario acceder a la aplicación mediante nickname y contraseña </a:t>
+            </a:r>
+            <a:endParaRPr b="0" lang="es-ES" sz="1050" strike="noStrike" u="none">
               <a:solidFill>
                 <a:srgbClr val="000000"/>
               </a:solidFill>
@@ -7215,6 +7214,129 @@
               <a:buClr>
                 <a:srgbClr val="000000"/>
               </a:buClr>
+              <a:buSzPct val="200000"/>
+              <a:buFont typeface="Arial"/>
+              <a:buChar char="•"/>
+              <a:tabLst>
+                <a:tab algn="l" pos="355680"/>
+              </a:tabLst>
+            </a:pPr>
+            <a:r>
+              <a:rPr b="0" lang="en-GB" sz="1000" strike="noStrike" u="none">
+                <a:solidFill>
+                  <a:schemeClr val="dk1"/>
+                </a:solidFill>
+                <a:effectLst/>
+                <a:uFillTx/>
+                <a:latin typeface="Lucida Handwriting"/>
+              </a:rPr>
+              <a:t>Introducir nickname</a:t>
+            </a:r>
+            <a:endParaRPr b="0" lang="es-ES" sz="1000" strike="noStrike" u="none">
+              <a:solidFill>
+                <a:srgbClr val="000000"/>
+              </a:solidFill>
+              <a:effectLst/>
+              <a:uFillTx/>
+              <a:latin typeface="Arial"/>
+            </a:endParaRPr>
+          </a:p>
+          <a:p>
+            <a:pPr lvl="1" marL="450720" indent="-228600" defTabSz="914400">
+              <a:lnSpc>
+                <a:spcPct val="90000"/>
+              </a:lnSpc>
+              <a:spcBef>
+                <a:spcPts val="340"/>
+              </a:spcBef>
+              <a:spcAft>
+                <a:spcPts val="142"/>
+              </a:spcAft>
+              <a:buClr>
+                <a:srgbClr val="000000"/>
+              </a:buClr>
+              <a:buSzPct val="200000"/>
+              <a:buFont typeface="Arial"/>
+              <a:buChar char="•"/>
+              <a:tabLst>
+                <a:tab algn="l" pos="355680"/>
+              </a:tabLst>
+            </a:pPr>
+            <a:r>
+              <a:rPr b="0" lang="en-GB" sz="1000" strike="noStrike" u="none">
+                <a:solidFill>
+                  <a:schemeClr val="dk1"/>
+                </a:solidFill>
+                <a:effectLst/>
+                <a:uFillTx/>
+                <a:latin typeface="Lucida Handwriting"/>
+              </a:rPr>
+              <a:t>Introducir contraseña</a:t>
+            </a:r>
+            <a:endParaRPr b="0" lang="es-ES" sz="1000" strike="noStrike" u="none">
+              <a:solidFill>
+                <a:srgbClr val="000000"/>
+              </a:solidFill>
+              <a:effectLst/>
+              <a:uFillTx/>
+              <a:latin typeface="Arial"/>
+            </a:endParaRPr>
+          </a:p>
+          <a:p>
+            <a:pPr lvl="1" marL="450720" indent="-228600" defTabSz="914400">
+              <a:lnSpc>
+                <a:spcPct val="90000"/>
+              </a:lnSpc>
+              <a:spcBef>
+                <a:spcPts val="340"/>
+              </a:spcBef>
+              <a:spcAft>
+                <a:spcPts val="142"/>
+              </a:spcAft>
+              <a:buClr>
+                <a:srgbClr val="000000"/>
+              </a:buClr>
+              <a:buSzPct val="200000"/>
+              <a:buFont typeface="Arial"/>
+              <a:buChar char="•"/>
+              <a:tabLst>
+                <a:tab algn="l" pos="355680"/>
+              </a:tabLst>
+            </a:pPr>
+            <a:r>
+              <a:rPr b="0" lang="en-GB" sz="1000" strike="noStrike" u="none">
+                <a:solidFill>
+                  <a:schemeClr val="dk1"/>
+                </a:solidFill>
+                <a:effectLst/>
+                <a:uFillTx/>
+                <a:latin typeface="Lucida Handwriting"/>
+              </a:rPr>
+              <a:t>Acceder a la aplicación</a:t>
+            </a:r>
+            <a:endParaRPr b="0" lang="es-ES" sz="1000" strike="noStrike" u="none">
+              <a:solidFill>
+                <a:srgbClr val="000000"/>
+              </a:solidFill>
+              <a:effectLst/>
+              <a:uFillTx/>
+              <a:latin typeface="Arial"/>
+            </a:endParaRPr>
+          </a:p>
+          <a:p>
+            <a:pPr lvl="1" marL="432000" indent="-216000" defTabSz="914400">
+              <a:lnSpc>
+                <a:spcPct val="90000"/>
+              </a:lnSpc>
+              <a:spcBef>
+                <a:spcPts val="340"/>
+              </a:spcBef>
+              <a:spcAft>
+                <a:spcPts val="142"/>
+              </a:spcAft>
+              <a:buClr>
+                <a:srgbClr val="000000"/>
+              </a:buClr>
               <a:buFont typeface="Wingdings" charset="2"/>
               <a:buChar char=""/>
               <a:tabLst>
@@ -7230,7 +7352,7 @@
                 <a:uFillTx/>
                 <a:latin typeface="Lucida Handwriting"/>
               </a:rPr>
-              <a:t>Mostrar el mensaje</a:t>
+              <a:t>Validar credenciales</a:t>
             </a:r>
             <a:endParaRPr b="0" lang="es-ES" sz="1000" strike="noStrike" u="none">
               <a:solidFill>
@@ -7242,6 +7364,46 @@
             </a:endParaRPr>
           </a:p>
           <a:p>
+            <a:pPr lvl="1" marL="432000" indent="-216000" defTabSz="914400">
+              <a:lnSpc>
+                <a:spcPct val="90000"/>
+              </a:lnSpc>
+              <a:spcBef>
+                <a:spcPts val="340"/>
+              </a:spcBef>
+              <a:spcAft>
+                <a:spcPts val="142"/>
+              </a:spcAft>
+              <a:buClr>
+                <a:srgbClr val="000000"/>
+              </a:buClr>
+              <a:buFont typeface="Wingdings" charset="2"/>
+              <a:buChar char=""/>
+              <a:tabLst>
+                <a:tab algn="l" pos="355680"/>
+              </a:tabLst>
+            </a:pPr>
+            <a:r>
+              <a:rPr b="0" lang="en-GB" sz="1000" strike="noStrike" u="none">
+                <a:solidFill>
+                  <a:schemeClr val="dk1"/>
+                </a:solidFill>
+                <a:effectLst/>
+                <a:uFillTx/>
+                <a:latin typeface="Lucida Handwriting"/>
+              </a:rPr>
+              <a:t>Mostrar error si el login falla</a:t>
+            </a:r>
+            <a:endParaRPr b="0" lang="es-ES" sz="1000" strike="noStrike" u="none">
+              <a:solidFill>
+                <a:srgbClr val="000000"/>
+              </a:solidFill>
+              <a:effectLst/>
+              <a:uFillTx/>
+              <a:latin typeface="Arial"/>
+            </a:endParaRPr>
+          </a:p>
+          <a:p>
             <a:pPr defTabSz="914400">
               <a:lnSpc>
                 <a:spcPct val="90000"/>
@@ -7290,10 +7452,10 @@
                 <a:spcPct val="90000"/>
               </a:lnSpc>
               <a:spcBef>
-                <a:spcPts val="1191"/>
+                <a:spcPts val="624"/>
               </a:spcBef>
               <a:spcAft>
-                <a:spcPts val="992"/>
+                <a:spcPts val="425"/>
               </a:spcAft>
               <a:tabLst>
                 <a:tab algn="l" pos="0"/>
@@ -7308,7 +7470,7 @@
                 <a:uFillTx/>
                 <a:latin typeface="Lucida Handwriting"/>
               </a:rPr>
-              <a:t>► Autenticarse</a:t>
+              <a:t>► Registrarse</a:t>
             </a:r>
             <a:endParaRPr b="0" lang="es-ES" sz="1000" strike="noStrike" u="none">
               <a:solidFill>
@@ -7325,8 +7487,127 @@
                 <a:spcPct val="90000"/>
               </a:lnSpc>
               <a:spcBef>
+                <a:spcPts val="624"/>
+              </a:spcBef>
+              <a:spcAft>
+                <a:spcPts val="425"/>
+              </a:spcAft>
+              <a:tabLst>
+                <a:tab algn="l" pos="0"/>
+              </a:tabLst>
+            </a:pPr>
+            <a:r>
+              <a:rPr b="0" lang="en-GB" sz="1000" strike="noStrike" u="none">
+                <a:solidFill>
+                  <a:schemeClr val="dk1"/>
+                </a:solidFill>
+                <a:effectLst/>
+                <a:uFillTx/>
+                <a:latin typeface="Lucida Handwriting"/>
+              </a:rPr>
+              <a:t>► Principal</a:t>
+            </a:r>
+            <a:endParaRPr b="0" lang="es-ES" sz="1000" strike="noStrike" u="none">
+              <a:solidFill>
+                <a:srgbClr val="000000"/>
+              </a:solidFill>
+              <a:effectLst/>
+              <a:uFillTx/>
+              <a:latin typeface="Arial"/>
+            </a:endParaRPr>
+          </a:p>
+          <a:p>
+            <a:pPr marL="268200" defTabSz="914400">
+              <a:lnSpc>
+                <a:spcPct val="90000"/>
+              </a:lnSpc>
+              <a:spcBef>
+                <a:spcPts val="340"/>
+              </a:spcBef>
+              <a:spcAft>
+                <a:spcPts val="142"/>
+              </a:spcAft>
+              <a:tabLst>
+                <a:tab algn="l" pos="0"/>
+              </a:tabLst>
+            </a:pPr>
+            <a:r>
+              <a:rPr b="0" i="1" lang="en-GB" sz="1200" strike="noStrike" u="none">
+                <a:solidFill>
+                  <a:schemeClr val="dk1"/>
+                </a:solidFill>
+                <a:effectLst/>
+                <a:uFillTx/>
+                <a:latin typeface="Calibri"/>
+              </a:rPr>
+              <a:t>Objectos</a:t>
+            </a:r>
+            <a:r>
+              <a:rPr b="0" lang="en-GB" sz="1200" strike="noStrike" u="none">
+                <a:solidFill>
+                  <a:schemeClr val="dk1"/>
+                </a:solidFill>
+                <a:effectLst/>
+                <a:uFillTx/>
+                <a:latin typeface="Calibri"/>
+              </a:rPr>
+              <a:t>: </a:t>
+            </a:r>
+            <a:endParaRPr b="0" lang="es-ES" sz="1200" strike="noStrike" u="none">
+              <a:solidFill>
+                <a:srgbClr val="000000"/>
+              </a:solidFill>
+              <a:effectLst/>
+              <a:uFillTx/>
+              <a:latin typeface="Arial"/>
+            </a:endParaRPr>
+          </a:p>
+          <a:p>
+            <a:pPr marL="268200" defTabSz="914400">
+              <a:lnSpc>
+                <a:spcPct val="90000"/>
+              </a:lnSpc>
+              <a:spcBef>
+                <a:spcPts val="340"/>
+              </a:spcBef>
+              <a:spcAft>
+                <a:spcPts val="142"/>
+              </a:spcAft>
+              <a:tabLst>
+                <a:tab algn="l" pos="0"/>
+              </a:tabLst>
+            </a:pPr>
+            <a:r>
+              <a:rPr b="0" lang="en-GB" sz="1200" strike="noStrike" u="none">
+                <a:solidFill>
+                  <a:schemeClr val="dk1"/>
+                </a:solidFill>
+                <a:effectLst/>
+                <a:uFillTx/>
+                <a:latin typeface="Calibri"/>
+              </a:rPr>
+              <a:t>Usuario, sesión</a:t>
+            </a:r>
+            <a:endParaRPr b="0" lang="es-ES" sz="1200" strike="noStrike" u="none">
+              <a:solidFill>
+                <a:srgbClr val="000000"/>
+              </a:solidFill>
+              <a:effectLst/>
+              <a:uFillTx/>
+              <a:latin typeface="Arial"/>
+            </a:endParaRPr>
+          </a:p>
+          <a:p>
+            <a:pPr marL="268200" defTabSz="914400">
+              <a:lnSpc>
+                <a:spcPct val="90000"/>
+              </a:lnSpc>
+              <a:spcBef>
                 <a:spcPts val="1001"/>
               </a:spcBef>
+              <a:spcAft>
+                <a:spcPts val="283"/>
+              </a:spcAft>
               <a:tabLst>
                 <a:tab algn="l" pos="0"/>
               </a:tabLst>
@@ -7340,7 +7621,7 @@
                 <a:uFillTx/>
                 <a:latin typeface="Calibri"/>
               </a:rPr>
-              <a:t>Objectos</a:t>
+              <a:t>Restricciones</a:t>
             </a:r>
             <a:r>
               <a:rPr b="0" lang="en-GB" sz="1200" strike="noStrike" u="none">
@@ -7351,7 +7632,7 @@
                 <a:uFillTx/>
                 <a:latin typeface="Calibri"/>
               </a:rPr>
-              <a:t>:</a:t>
+              <a:t>: </a:t>
             </a:r>
             <a:endParaRPr b="0" lang="es-ES" sz="1200" strike="noStrike" u="none">
               <a:solidFill>
@@ -7367,24 +7648,10 @@
               <a:lnSpc>
                 <a:spcPct val="90000"/>
               </a:lnSpc>
-              <a:spcBef>
-                <a:spcPts val="1001"/>
-              </a:spcBef>
-              <a:tabLst>
-                <a:tab algn="l" pos="0"/>
-              </a:tabLst>
-            </a:pPr>
-            <a:r>
-              <a:rPr b="0" i="1" lang="en-GB" sz="1200" strike="noStrike" u="none">
-                <a:solidFill>
-                  <a:schemeClr val="dk1"/>
-                </a:solidFill>
-                <a:effectLst/>
-                <a:uFillTx/>
-                <a:latin typeface="Calibri"/>
-              </a:rPr>
-              <a:t>Restricciones</a:t>
-            </a:r>
+              <a:tabLst>
+                <a:tab algn="l" pos="0"/>
+              </a:tabLst>
+            </a:pPr>
             <a:r>
               <a:rPr b="0" lang="en-GB" sz="1200" strike="noStrike" u="none">
                 <a:solidFill>
@@ -7393,8 +7660,105 @@
                 <a:effectLst/>
                 <a:uFillTx/>
                 <a:latin typeface="Calibri"/>
-              </a:rPr>
-              <a:t>:</a:t>
+                <a:ea typeface="Microsoft YaHei"/>
+              </a:rPr>
+              <a:t>- El nickname debe existir</a:t>
+            </a:r>
+            <a:endParaRPr b="0" lang="es-ES" sz="1200" strike="noStrike" u="none">
+              <a:solidFill>
+                <a:srgbClr val="000000"/>
+              </a:solidFill>
+              <a:effectLst/>
+              <a:uFillTx/>
+              <a:latin typeface="Arial"/>
+            </a:endParaRPr>
+          </a:p>
+          <a:p>
+            <a:pPr marL="268200" defTabSz="914400">
+              <a:lnSpc>
+                <a:spcPct val="90000"/>
+              </a:lnSpc>
+              <a:tabLst>
+                <a:tab algn="l" pos="0"/>
+              </a:tabLst>
+            </a:pPr>
+            <a:endParaRPr b="0" lang="es-ES" sz="1200" strike="noStrike" u="none">
+              <a:solidFill>
+                <a:srgbClr val="000000"/>
+              </a:solidFill>
+              <a:effectLst/>
+              <a:uFillTx/>
+              <a:latin typeface="Arial"/>
+            </a:endParaRPr>
+          </a:p>
+          <a:p>
+            <a:pPr marL="268200" defTabSz="914400">
+              <a:lnSpc>
+                <a:spcPct val="90000"/>
+              </a:lnSpc>
+              <a:tabLst>
+                <a:tab algn="l" pos="0"/>
+              </a:tabLst>
+            </a:pPr>
+            <a:r>
+              <a:rPr b="0" lang="en-GB" sz="1200" strike="noStrike" u="none">
+                <a:solidFill>
+                  <a:schemeClr val="dk1"/>
+                </a:solidFill>
+                <a:effectLst/>
+                <a:uFillTx/>
+                <a:latin typeface="Calibri"/>
+                <a:ea typeface="Microsoft YaHei"/>
+              </a:rPr>
+              <a:t>- La contraseña debe coincidir</a:t>
+            </a:r>
+            <a:endParaRPr b="0" lang="es-ES" sz="1200" strike="noStrike" u="none">
+              <a:solidFill>
+                <a:srgbClr val="000000"/>
+              </a:solidFill>
+              <a:effectLst/>
+              <a:uFillTx/>
+              <a:latin typeface="Arial"/>
+            </a:endParaRPr>
+          </a:p>
+          <a:p>
+            <a:pPr marL="268200" defTabSz="914400">
+              <a:lnSpc>
+                <a:spcPct val="90000"/>
+              </a:lnSpc>
+              <a:tabLst>
+                <a:tab algn="l" pos="0"/>
+              </a:tabLst>
+            </a:pPr>
+            <a:endParaRPr b="0" lang="es-ES" sz="1200" strike="noStrike" u="none">
+              <a:solidFill>
+                <a:srgbClr val="000000"/>
+              </a:solidFill>
+              <a:effectLst/>
+              <a:uFillTx/>
+              <a:latin typeface="Arial"/>
+            </a:endParaRPr>
+          </a:p>
+          <a:p>
+            <a:pPr marL="268200" defTabSz="914400">
+              <a:lnSpc>
+                <a:spcPct val="90000"/>
+              </a:lnSpc>
+              <a:tabLst>
+                <a:tab algn="l" pos="0"/>
+              </a:tabLst>
+            </a:pPr>
+            <a:r>
+              <a:rPr b="0" lang="en-GB" sz="1200" strike="noStrike" u="none">
+                <a:solidFill>
+                  <a:schemeClr val="dk1"/>
+                </a:solidFill>
+                <a:effectLst/>
+                <a:uFillTx/>
+                <a:latin typeface="Calibri"/>
+                <a:ea typeface="Microsoft YaHei"/>
+              </a:rPr>
+              <a:t>- No se puede acceder con campos vacíos</a:t>
             </a:r>
             <a:endParaRPr b="0" lang="es-ES" sz="1200" strike="noStrike" u="none">
               <a:solidFill>
@@ -7409,14 +7773,14 @@
       </p:sp>
       <p:sp>
         <p:nvSpPr>
-          <p:cNvPr id="61" name="2 Marcador de contenido 2"/>
+          <p:cNvPr id="61" name="2 Marcador de contenido 1"/>
           <p:cNvSpPr/>
           <p:nvPr/>
         </p:nvSpPr>
         <p:spPr>
           <a:xfrm>
-            <a:off x="540000" y="817920"/>
-            <a:ext cx="2518560" cy="5121720"/>
+            <a:off x="9180000" y="1025640"/>
+            <a:ext cx="2518200" cy="4553640"/>
           </a:xfrm>
           <a:prstGeom prst="rect">
             <a:avLst/>
@@ -7478,7 +7842,7 @@
                 <a:uFillTx/>
                 <a:latin typeface="Calibri"/>
               </a:rPr>
-              <a:t>: Autenticarse</a:t>
+              <a:t>: Perfil</a:t>
             </a:r>
             <a:endParaRPr b="0" lang="es-ES" sz="1200" strike="noStrike" u="none">
               <a:solidFill>
@@ -7505,7 +7869,7 @@
               </a:tabLst>
             </a:pPr>
             <a:r>
-              <a:rPr b="0" i="1" lang="en-GB" sz="1200" strike="noStrike" u="none">
+              <a:rPr b="0" i="1" lang="en-GB" sz="1000" strike="noStrike" u="none">
                 <a:solidFill>
                   <a:schemeClr val="dk1"/>
                 </a:solidFill>
@@ -7516,7 +7880,7 @@
               <a:t>Objetivo</a:t>
             </a:r>
             <a:r>
-              <a:rPr b="0" lang="en-GB" sz="1050" strike="noStrike" u="none">
+              <a:rPr b="0" lang="en-GB" sz="1000" strike="noStrike" u="none">
                 <a:solidFill>
                   <a:schemeClr val="dk1"/>
                 </a:solidFill>
@@ -7524,9 +7888,9 @@
                 <a:uFillTx/>
                 <a:latin typeface="Lucida Handwriting"/>
               </a:rPr>
-              <a:t>: Permitir al usuario acceder a la aplicación mediante nickname y contraseña </a:t>
-            </a:r>
-            <a:endParaRPr b="0" lang="es-ES" sz="1050" strike="noStrike" u="none">
+              <a:t>: Gestionar la información del usuario</a:t>
+            </a:r>
+            <a:endParaRPr b="0" lang="es-ES" sz="1000" strike="noStrike" u="none">
               <a:solidFill>
                 <a:srgbClr val="000000"/>
               </a:solidFill>
@@ -7608,7 +7972,7 @@
                 <a:uFillTx/>
                 <a:latin typeface="Lucida Handwriting"/>
               </a:rPr>
-              <a:t>Introducir nickname</a:t>
+              <a:t>Cambiar email</a:t>
             </a:r>
             <a:endParaRPr b="0" lang="es-ES" sz="1000" strike="noStrike" u="none">
               <a:solidFill>
@@ -7649,7 +8013,7 @@
                 <a:uFillTx/>
                 <a:latin typeface="Lucida Handwriting"/>
               </a:rPr>
-              <a:t>Introducir contraseña</a:t>
+              <a:t>Cambiar contraseña</a:t>
             </a:r>
             <a:endParaRPr b="0" lang="es-ES" sz="1000" strike="noStrike" u="none">
               <a:solidFill>
@@ -7690,7 +8054,7 @@
                 <a:uFillTx/>
                 <a:latin typeface="Lucida Handwriting"/>
               </a:rPr>
-              <a:t>Acceder a la aplicación</a:t>
+              <a:t>Cambiar avatar</a:t>
             </a:r>
             <a:endParaRPr b="0" lang="es-ES" sz="1000" strike="noStrike" u="none">
               <a:solidFill>
@@ -7702,7 +8066,7 @@
             </a:endParaRPr>
           </a:p>
           <a:p>
-            <a:pPr lvl="1" marL="432000" indent="-216000" defTabSz="914400">
+            <a:pPr lvl="1" marL="450720" indent="-228600" defTabSz="914400">
               <a:lnSpc>
                 <a:spcPct val="90000"/>
               </a:lnSpc>
@@ -7715,8 +8079,9 @@
               <a:buClr>
                 <a:srgbClr val="000000"/>
               </a:buClr>
-              <a:buFont typeface="Wingdings" charset="2"/>
-              <a:buChar char=""/>
+              <a:buSzPct val="200000"/>
+              <a:buFont typeface="Arial"/>
+              <a:buChar char="•"/>
               <a:tabLst>
                 <a:tab algn="l" pos="355680"/>
               </a:tabLst>
@@ -7730,7 +8095,7 @@
                 <a:uFillTx/>
                 <a:latin typeface="Lucida Handwriting"/>
               </a:rPr>
-              <a:t>Validar credenciales</a:t>
+              <a:t>Cambiar fecha de nacimiento</a:t>
             </a:r>
             <a:endParaRPr b="0" lang="es-ES" sz="1000" strike="noStrike" u="none">
               <a:solidFill>
@@ -7742,7 +8107,7 @@
             </a:endParaRPr>
           </a:p>
           <a:p>
-            <a:pPr lvl="1" marL="432000" indent="-216000" defTabSz="914400">
+            <a:pPr lvl="1" marL="450720" indent="-228600" defTabSz="914400">
               <a:lnSpc>
                 <a:spcPct val="90000"/>
               </a:lnSpc>
@@ -7770,7 +8135,7 @@
                 <a:uFillTx/>
                 <a:latin typeface="Lucida Handwriting"/>
               </a:rPr>
-              <a:t>Mostrar error si el login falla</a:t>
+              <a:t>Validar datos</a:t>
             </a:r>
             <a:endParaRPr b="0" lang="es-ES" sz="1000" strike="noStrike" u="none">
               <a:solidFill>
@@ -7782,6 +8147,46 @@
             </a:endParaRPr>
           </a:p>
           <a:p>
+            <a:pPr lvl="1" marL="450720" indent="-228600" defTabSz="914400">
+              <a:lnSpc>
+                <a:spcPct val="90000"/>
+              </a:lnSpc>
+              <a:spcBef>
+                <a:spcPts val="340"/>
+              </a:spcBef>
+              <a:spcAft>
+                <a:spcPts val="142"/>
+              </a:spcAft>
+              <a:buClr>
+                <a:srgbClr val="000000"/>
+              </a:buClr>
+              <a:buFont typeface="Wingdings" charset="2"/>
+              <a:buChar char=""/>
+              <a:tabLst>
+                <a:tab algn="l" pos="355680"/>
+              </a:tabLst>
+            </a:pPr>
+            <a:r>
+              <a:rPr b="0" lang="en-GB" sz="1000" strike="noStrike" u="none">
+                <a:solidFill>
+                  <a:schemeClr val="dk1"/>
+                </a:solidFill>
+                <a:effectLst/>
+                <a:uFillTx/>
+                <a:latin typeface="Lucida Handwriting"/>
+              </a:rPr>
+              <a:t>Guardar cambios</a:t>
+            </a:r>
+            <a:endParaRPr b="0" lang="es-ES" sz="1000" strike="noStrike" u="none">
+              <a:solidFill>
+                <a:srgbClr val="000000"/>
+              </a:solidFill>
+              <a:effectLst/>
+              <a:uFillTx/>
+              <a:latin typeface="Arial"/>
+            </a:endParaRPr>
+          </a:p>
+          <a:p>
             <a:pPr defTabSz="914400">
               <a:lnSpc>
                 <a:spcPct val="90000"/>
@@ -7803,6 +8208,159 @@
                 <a:latin typeface="Calibri"/>
               </a:rPr>
               <a:t>Enlaces</a:t>
+            </a:r>
+            <a:r>
+              <a:rPr b="0" lang="en-GB" sz="1200" strike="noStrike" u="none">
+                <a:solidFill>
+                  <a:schemeClr val="dk1"/>
+                </a:solidFill>
+                <a:effectLst/>
+                <a:uFillTx/>
+                <a:latin typeface="Calibri"/>
+              </a:rPr>
+              <a:t>: </a:t>
+            </a:r>
+            <a:endParaRPr b="0" lang="es-ES" sz="1200" strike="noStrike" u="none">
+              <a:solidFill>
+                <a:srgbClr val="000000"/>
+              </a:solidFill>
+              <a:effectLst/>
+              <a:uFillTx/>
+              <a:latin typeface="Arial"/>
+            </a:endParaRPr>
+          </a:p>
+          <a:p>
+            <a:pPr marL="268200" defTabSz="914400">
+              <a:lnSpc>
+                <a:spcPct val="90000"/>
+              </a:lnSpc>
+              <a:spcBef>
+                <a:spcPts val="1191"/>
+              </a:spcBef>
+              <a:spcAft>
+                <a:spcPts val="992"/>
+              </a:spcAft>
+              <a:tabLst>
+                <a:tab algn="l" pos="0"/>
+              </a:tabLst>
+            </a:pPr>
+            <a:r>
+              <a:rPr b="0" lang="en-GB" sz="1000" strike="noStrike" u="none">
+                <a:solidFill>
+                  <a:schemeClr val="dk1"/>
+                </a:solidFill>
+                <a:effectLst/>
+                <a:uFillTx/>
+                <a:latin typeface="Lucida Handwriting"/>
+              </a:rPr>
+              <a:t>► Principal</a:t>
+            </a:r>
+            <a:endParaRPr b="0" lang="es-ES" sz="1000" strike="noStrike" u="none">
+              <a:solidFill>
+                <a:srgbClr val="000000"/>
+              </a:solidFill>
+              <a:effectLst/>
+              <a:uFillTx/>
+              <a:latin typeface="Arial"/>
+            </a:endParaRPr>
+          </a:p>
+          <a:p>
+            <a:pPr marL="268200" defTabSz="914400">
+              <a:lnSpc>
+                <a:spcPct val="90000"/>
+              </a:lnSpc>
+              <a:spcBef>
+                <a:spcPts val="1001"/>
+              </a:spcBef>
+              <a:tabLst>
+                <a:tab algn="l" pos="0"/>
+              </a:tabLst>
+            </a:pPr>
+            <a:r>
+              <a:rPr b="0" i="1" lang="en-GB" sz="1200" strike="noStrike" u="none">
+                <a:solidFill>
+                  <a:schemeClr val="dk1"/>
+                </a:solidFill>
+                <a:effectLst/>
+                <a:uFillTx/>
+                <a:latin typeface="Calibri"/>
+              </a:rPr>
+              <a:t>Objectos</a:t>
+            </a:r>
+            <a:r>
+              <a:rPr b="0" lang="en-GB" sz="1200" strike="noStrike" u="none">
+                <a:solidFill>
+                  <a:schemeClr val="dk1"/>
+                </a:solidFill>
+                <a:effectLst/>
+                <a:uFillTx/>
+                <a:latin typeface="Calibri"/>
+              </a:rPr>
+              <a:t>:</a:t>
+            </a:r>
+            <a:endParaRPr b="0" lang="es-ES" sz="1200" strike="noStrike" u="none">
+              <a:solidFill>
+                <a:srgbClr val="000000"/>
+              </a:solidFill>
+              <a:effectLst/>
+              <a:uFillTx/>
+              <a:latin typeface="Arial"/>
+            </a:endParaRPr>
+          </a:p>
+          <a:p>
+            <a:pPr marL="268200" defTabSz="914400">
+              <a:lnSpc>
+                <a:spcPct val="90000"/>
+              </a:lnSpc>
+              <a:spcBef>
+                <a:spcPts val="1001"/>
+              </a:spcBef>
+              <a:tabLst>
+                <a:tab algn="l" pos="0"/>
+              </a:tabLst>
+            </a:pPr>
+            <a:r>
+              <a:rPr b="0" lang="en-GB" sz="1200" strike="noStrike" u="none">
+                <a:solidFill>
+                  <a:schemeClr val="dk1"/>
+                </a:solidFill>
+                <a:effectLst/>
+                <a:uFillTx/>
+                <a:latin typeface="Calibri"/>
+              </a:rPr>
+              <a:t>Usuario</a:t>
+            </a:r>
+            <a:endParaRPr b="0" lang="es-ES" sz="1200" strike="noStrike" u="none">
+              <a:solidFill>
+                <a:srgbClr val="000000"/>
+              </a:solidFill>
+              <a:effectLst/>
+              <a:uFillTx/>
+              <a:latin typeface="Arial"/>
+            </a:endParaRPr>
+          </a:p>
+          <a:p>
+            <a:pPr marL="268200" defTabSz="914400">
+              <a:lnSpc>
+                <a:spcPct val="90000"/>
+              </a:lnSpc>
+              <a:spcBef>
+                <a:spcPts val="1001"/>
+              </a:spcBef>
+              <a:tabLst>
+                <a:tab algn="l" pos="0"/>
+              </a:tabLst>
+            </a:pPr>
+            <a:r>
+              <a:rPr b="0" i="1" lang="en-GB" sz="1200" strike="noStrike" u="none">
+                <a:solidFill>
+                  <a:schemeClr val="dk1"/>
+                </a:solidFill>
+                <a:effectLst/>
+                <a:uFillTx/>
+                <a:latin typeface="Calibri"/>
+              </a:rPr>
+              <a:t>Restricciones</a:t>
             </a:r>
             <a:r>
               <a:rPr b="0" lang="en-GB" sz="1200" strike="noStrike" u="none">
@@ -7840,17 +8398,17 @@
               </a:tabLst>
             </a:pPr>
             <a:r>
-              <a:rPr b="0" lang="en-GB" sz="1000" strike="noStrike" u="none">
-                <a:solidFill>
-                  <a:schemeClr val="dk1"/>
-                </a:solidFill>
-                <a:effectLst/>
-                <a:uFillTx/>
-                <a:latin typeface="Lucida Handwriting"/>
-              </a:rPr>
-              <a:t>► Registrarse</a:t>
-            </a:r>
-            <a:endParaRPr b="0" lang="es-ES" sz="1000" strike="noStrike" u="none">
+              <a:rPr b="0" lang="en-GB" sz="1200" strike="noStrike" u="none">
+                <a:solidFill>
+                  <a:schemeClr val="dk1"/>
+                </a:solidFill>
+                <a:effectLst/>
+                <a:uFillTx/>
+                <a:latin typeface="Calibri"/>
+              </a:rPr>
+              <a:t>- Aplicar validaciones del registro</a:t>
+            </a:r>
+            <a:endParaRPr b="0" lang="es-ES" sz="1200" strike="noStrike" u="none">
               <a:solidFill>
                 <a:srgbClr val="000000"/>
               </a:solidFill>
@@ -7875,52 +8433,6 @@
               </a:tabLst>
             </a:pPr>
             <a:r>
-              <a:rPr b="0" lang="en-GB" sz="1000" strike="noStrike" u="none">
-                <a:solidFill>
-                  <a:schemeClr val="dk1"/>
-                </a:solidFill>
-                <a:effectLst/>
-                <a:uFillTx/>
-                <a:latin typeface="Lucida Handwriting"/>
-              </a:rPr>
-              <a:t>► Principal</a:t>
-            </a:r>
-            <a:endParaRPr b="0" lang="es-ES" sz="1000" strike="noStrike" u="none">
-              <a:solidFill>
-                <a:srgbClr val="000000"/>
-              </a:solidFill>
-              <a:effectLst/>
-              <a:uFillTx/>
-              <a:latin typeface="Arial"/>
-            </a:endParaRPr>
-          </a:p>
-          <a:p>
-            <a:pPr marL="268200" defTabSz="914400">
-              <a:lnSpc>
-                <a:spcPct val="90000"/>
-              </a:lnSpc>
-              <a:spcBef>
-                <a:spcPts val="340"/>
-              </a:spcBef>
-              <a:spcAft>
-                <a:spcPts val="142"/>
-              </a:spcAft>
-              <a:tabLst>
-                <a:tab algn="l" pos="0"/>
-              </a:tabLst>
-            </a:pPr>
-            <a:r>
-              <a:rPr b="0" i="1" lang="en-GB" sz="1200" strike="noStrike" u="none">
-                <a:solidFill>
-                  <a:schemeClr val="dk1"/>
-                </a:solidFill>
-                <a:effectLst/>
-                <a:uFillTx/>
-                <a:latin typeface="Calibri"/>
-              </a:rPr>
-              <a:t>Objectos</a:t>
-            </a:r>
-            <a:r>
               <a:rPr b="0" lang="en-GB" sz="1200" strike="noStrike" u="none">
                 <a:solidFill>
                   <a:schemeClr val="dk1"/>
@@ -7929,214 +8441,7 @@
                 <a:uFillTx/>
                 <a:latin typeface="Calibri"/>
               </a:rPr>
-              <a:t>: </a:t>
-            </a:r>
-            <a:endParaRPr b="0" lang="es-ES" sz="1200" strike="noStrike" u="none">
-              <a:solidFill>
-                <a:srgbClr val="000000"/>
-              </a:solidFill>
-              <a:effectLst/>
-              <a:uFillTx/>
-              <a:latin typeface="Arial"/>
-            </a:endParaRPr>
-          </a:p>
-          <a:p>
-            <a:pPr marL="268200" defTabSz="914400">
-              <a:lnSpc>
-                <a:spcPct val="90000"/>
-              </a:lnSpc>
-              <a:spcBef>
-                <a:spcPts val="340"/>
-              </a:spcBef>
-              <a:spcAft>
-                <a:spcPts val="142"/>
-              </a:spcAft>
-              <a:tabLst>
-                <a:tab algn="l" pos="0"/>
-              </a:tabLst>
-            </a:pPr>
-            <a:r>
-              <a:rPr b="0" lang="en-GB" sz="1200" strike="noStrike" u="none">
-                <a:solidFill>
-                  <a:schemeClr val="dk1"/>
-                </a:solidFill>
-                <a:effectLst/>
-                <a:uFillTx/>
-                <a:latin typeface="Calibri"/>
-              </a:rPr>
-              <a:t>Usuario, sesión</a:t>
-            </a:r>
-            <a:endParaRPr b="0" lang="es-ES" sz="1200" strike="noStrike" u="none">
-              <a:solidFill>
-                <a:srgbClr val="000000"/>
-              </a:solidFill>
-              <a:effectLst/>
-              <a:uFillTx/>
-              <a:latin typeface="Arial"/>
-            </a:endParaRPr>
-          </a:p>
-          <a:p>
-            <a:pPr marL="268200" defTabSz="914400">
-              <a:lnSpc>
-                <a:spcPct val="90000"/>
-              </a:lnSpc>
-              <a:spcBef>
-                <a:spcPts val="1001"/>
-              </a:spcBef>
-              <a:spcAft>
-                <a:spcPts val="283"/>
-              </a:spcAft>
-              <a:tabLst>
-                <a:tab algn="l" pos="0"/>
-              </a:tabLst>
-            </a:pPr>
-            <a:r>
-              <a:rPr b="0" i="1" lang="en-GB" sz="1200" strike="noStrike" u="none">
-                <a:solidFill>
-                  <a:schemeClr val="dk1"/>
-                </a:solidFill>
-                <a:effectLst/>
-                <a:uFillTx/>
-                <a:latin typeface="Calibri"/>
-              </a:rPr>
-              <a:t>Restricciones</a:t>
-            </a:r>
-            <a:r>
-              <a:rPr b="0" lang="en-GB" sz="1200" strike="noStrike" u="none">
-                <a:solidFill>
-                  <a:schemeClr val="dk1"/>
-                </a:solidFill>
-                <a:effectLst/>
-                <a:uFillTx/>
-                <a:latin typeface="Calibri"/>
-              </a:rPr>
-              <a:t>: </a:t>
-            </a:r>
-            <a:endParaRPr b="0" lang="es-ES" sz="1200" strike="noStrike" u="none">
-              <a:solidFill>
-                <a:srgbClr val="000000"/>
-              </a:solidFill>
-              <a:effectLst/>
-              <a:uFillTx/>
-              <a:latin typeface="Arial"/>
-            </a:endParaRPr>
-          </a:p>
-          <a:p>
-            <a:pPr marL="268200" defTabSz="914400">
-              <a:lnSpc>
-                <a:spcPct val="90000"/>
-              </a:lnSpc>
-              <a:tabLst>
-                <a:tab algn="l" pos="0"/>
-              </a:tabLst>
-            </a:pPr>
-            <a:r>
-              <a:rPr b="0" lang="en-GB" sz="1200" strike="noStrike" u="none">
-                <a:solidFill>
-                  <a:schemeClr val="dk1"/>
-                </a:solidFill>
-                <a:effectLst/>
-                <a:uFillTx/>
-                <a:latin typeface="Calibri"/>
-                <a:ea typeface="Microsoft YaHei"/>
-              </a:rPr>
-              <a:t>- El nickname debe existir</a:t>
-            </a:r>
-            <a:endParaRPr b="0" lang="es-ES" sz="1200" strike="noStrike" u="none">
-              <a:solidFill>
-                <a:srgbClr val="000000"/>
-              </a:solidFill>
-              <a:effectLst/>
-              <a:uFillTx/>
-              <a:latin typeface="Arial"/>
-            </a:endParaRPr>
-          </a:p>
-          <a:p>
-            <a:pPr marL="268200" defTabSz="914400">
-              <a:lnSpc>
-                <a:spcPct val="90000"/>
-              </a:lnSpc>
-              <a:tabLst>
-                <a:tab algn="l" pos="0"/>
-              </a:tabLst>
-            </a:pPr>
-            <a:endParaRPr b="0" lang="es-ES" sz="1200" strike="noStrike" u="none">
-              <a:solidFill>
-                <a:srgbClr val="000000"/>
-              </a:solidFill>
-              <a:effectLst/>
-              <a:uFillTx/>
-              <a:latin typeface="Arial"/>
-            </a:endParaRPr>
-          </a:p>
-          <a:p>
-            <a:pPr marL="268200" defTabSz="914400">
-              <a:lnSpc>
-                <a:spcPct val="90000"/>
-              </a:lnSpc>
-              <a:tabLst>
-                <a:tab algn="l" pos="0"/>
-              </a:tabLst>
-            </a:pPr>
-            <a:r>
-              <a:rPr b="0" lang="en-GB" sz="1200" strike="noStrike" u="none">
-                <a:solidFill>
-                  <a:schemeClr val="dk1"/>
-                </a:solidFill>
-                <a:effectLst/>
-                <a:uFillTx/>
-                <a:latin typeface="Calibri"/>
-                <a:ea typeface="Microsoft YaHei"/>
-              </a:rPr>
-              <a:t>- La contraseña debe coincidir</a:t>
-            </a:r>
-            <a:endParaRPr b="0" lang="es-ES" sz="1200" strike="noStrike" u="none">
-              <a:solidFill>
-                <a:srgbClr val="000000"/>
-              </a:solidFill>
-              <a:effectLst/>
-              <a:uFillTx/>
-              <a:latin typeface="Arial"/>
-            </a:endParaRPr>
-          </a:p>
-          <a:p>
-            <a:pPr marL="268200" defTabSz="914400">
-              <a:lnSpc>
-                <a:spcPct val="90000"/>
-              </a:lnSpc>
-              <a:tabLst>
-                <a:tab algn="l" pos="0"/>
-              </a:tabLst>
-            </a:pPr>
-            <a:endParaRPr b="0" lang="es-ES" sz="1200" strike="noStrike" u="none">
-              <a:solidFill>
-                <a:srgbClr val="000000"/>
-              </a:solidFill>
-              <a:effectLst/>
-              <a:uFillTx/>
-              <a:latin typeface="Arial"/>
-            </a:endParaRPr>
-          </a:p>
-          <a:p>
-            <a:pPr marL="268200" defTabSz="914400">
-              <a:lnSpc>
-                <a:spcPct val="90000"/>
-              </a:lnSpc>
-              <a:tabLst>
-                <a:tab algn="l" pos="0"/>
-              </a:tabLst>
-            </a:pPr>
-            <a:r>
-              <a:rPr b="0" lang="en-GB" sz="1200" strike="noStrike" u="none">
-                <a:solidFill>
-                  <a:schemeClr val="dk1"/>
-                </a:solidFill>
-                <a:effectLst/>
-                <a:uFillTx/>
-                <a:latin typeface="Calibri"/>
-                <a:ea typeface="Microsoft YaHei"/>
-              </a:rPr>
-              <a:t>- No se puede acceder con campos vacíos</a:t>
+              <a:t>- Nickname no editable</a:t>
             </a:r>
             <a:endParaRPr b="0" lang="es-ES" sz="1200" strike="noStrike" u="none">
               <a:solidFill>
@@ -8151,14 +8456,14 @@
       </p:sp>
       <p:sp>
         <p:nvSpPr>
-          <p:cNvPr id="62" name="2 Marcador de contenido 1"/>
+          <p:cNvPr id="62" name="2 Marcador de contenido 3"/>
           <p:cNvSpPr/>
           <p:nvPr/>
         </p:nvSpPr>
         <p:spPr>
           <a:xfrm>
-            <a:off x="9180000" y="1025640"/>
-            <a:ext cx="2518560" cy="4554000"/>
+            <a:off x="541800" y="720720"/>
+            <a:ext cx="2518200" cy="5399280"/>
           </a:xfrm>
           <a:prstGeom prst="rect">
             <a:avLst/>
@@ -8220,9 +8525,20 @@
                 <a:uFillTx/>
                 <a:latin typeface="Calibri"/>
               </a:rPr>
-              <a:t>: Perfil</a:t>
-            </a:r>
-            <a:endParaRPr b="0" lang="es-ES" sz="1200" strike="noStrike" u="none">
+              <a:t>: </a:t>
+            </a:r>
+            <a:r>
+              <a:rPr b="0" lang="en-GB" sz="1050" strike="noStrike" u="none">
+                <a:solidFill>
+                  <a:schemeClr val="dk1"/>
+                </a:solidFill>
+                <a:effectLst/>
+                <a:uFillTx/>
+                <a:latin typeface="Lucida Handwriting"/>
+              </a:rPr>
+              <a:t>Principal</a:t>
+            </a:r>
+            <a:endParaRPr b="0" lang="es-ES" sz="1050" strike="noStrike" u="none">
               <a:solidFill>
                 <a:srgbClr val="000000"/>
               </a:solidFill>
@@ -8247,7 +8563,7 @@
               </a:tabLst>
             </a:pPr>
             <a:r>
-              <a:rPr b="0" i="1" lang="en-GB" sz="1000" strike="noStrike" u="none">
+              <a:rPr b="0" i="1" lang="en-GB" sz="1200" strike="noStrike" u="none">
                 <a:solidFill>
                   <a:schemeClr val="dk1"/>
                 </a:solidFill>
@@ -8258,17 +8574,17 @@
               <a:t>Objetivo</a:t>
             </a:r>
             <a:r>
-              <a:rPr b="0" lang="en-GB" sz="1000" strike="noStrike" u="none">
-                <a:solidFill>
-                  <a:schemeClr val="dk1"/>
-                </a:solidFill>
-                <a:effectLst/>
-                <a:uFillTx/>
-                <a:latin typeface="Lucida Handwriting"/>
-              </a:rPr>
-              <a:t>: Gestionar la información del usuario</a:t>
-            </a:r>
-            <a:endParaRPr b="0" lang="es-ES" sz="1000" strike="noStrike" u="none">
+              <a:rPr b="0" lang="en-GB" sz="1200" strike="noStrike" u="none">
+                <a:solidFill>
+                  <a:schemeClr val="dk1"/>
+                </a:solidFill>
+                <a:effectLst/>
+                <a:uFillTx/>
+                <a:latin typeface="Calibri"/>
+              </a:rPr>
+              <a:t>: Acceder rápidamente a las funciones más importantes</a:t>
+            </a:r>
+            <a:endParaRPr b="0" lang="es-ES" sz="1200" strike="noStrike" u="none">
               <a:solidFill>
                 <a:srgbClr val="000000"/>
               </a:solidFill>
@@ -8323,7 +8639,7 @@
           <a:p>
             <a:pPr lvl="1" marL="450720" indent="-228600" defTabSz="914400">
               <a:lnSpc>
-                <a:spcPct val="90000"/>
+                <a:spcPct val="100000"/>
               </a:lnSpc>
               <a:spcBef>
                 <a:spcPts val="340"/>
@@ -8350,7 +8666,7 @@
                 <a:uFillTx/>
                 <a:latin typeface="Lucida Handwriting"/>
               </a:rPr>
-              <a:t>Cambiar email</a:t>
+              <a:t>Ir a Actividades</a:t>
             </a:r>
             <a:endParaRPr b="0" lang="es-ES" sz="1000" strike="noStrike" u="none">
               <a:solidFill>
@@ -8364,7 +8680,7 @@
           <a:p>
             <a:pPr lvl="1" marL="450720" indent="-228600" defTabSz="914400">
               <a:lnSpc>
-                <a:spcPct val="90000"/>
+                <a:spcPct val="100000"/>
               </a:lnSpc>
               <a:spcBef>
                 <a:spcPts val="340"/>
@@ -8391,1165 +8707,7 @@
                 <a:uFillTx/>
                 <a:latin typeface="Lucida Handwriting"/>
               </a:rPr>
-              <a:t>Cambiar contraseña</a:t>
-            </a:r>
-            <a:endParaRPr b="0" lang="es-ES" sz="1000" strike="noStrike" u="none">
-              <a:solidFill>
-                <a:srgbClr val="000000"/>
-              </a:solidFill>
-              <a:effectLst/>
-              <a:uFillTx/>
-              <a:latin typeface="Arial"/>
-            </a:endParaRPr>
-          </a:p>
-          <a:p>
-            <a:pPr lvl="1" marL="450720" indent="-228600" defTabSz="914400">
-              <a:lnSpc>
-                <a:spcPct val="90000"/>
-              </a:lnSpc>
-              <a:spcBef>
-                <a:spcPts val="340"/>
-              </a:spcBef>
-              <a:spcAft>
-                <a:spcPts val="142"/>
-              </a:spcAft>
-              <a:buClr>
-                <a:srgbClr val="000000"/>
-              </a:buClr>
-              <a:buSzPct val="200000"/>
-              <a:buFont typeface="Arial"/>
-              <a:buChar char="•"/>
-              <a:tabLst>
-                <a:tab algn="l" pos="355680"/>
-              </a:tabLst>
-            </a:pPr>
-            <a:r>
-              <a:rPr b="0" lang="en-GB" sz="1000" strike="noStrike" u="none">
-                <a:solidFill>
-                  <a:schemeClr val="dk1"/>
-                </a:solidFill>
-                <a:effectLst/>
-                <a:uFillTx/>
-                <a:latin typeface="Lucida Handwriting"/>
-              </a:rPr>
-              <a:t>Cambiar avatar</a:t>
-            </a:r>
-            <a:endParaRPr b="0" lang="es-ES" sz="1000" strike="noStrike" u="none">
-              <a:solidFill>
-                <a:srgbClr val="000000"/>
-              </a:solidFill>
-              <a:effectLst/>
-              <a:uFillTx/>
-              <a:latin typeface="Arial"/>
-            </a:endParaRPr>
-          </a:p>
-          <a:p>
-            <a:pPr lvl="1" marL="450720" indent="-228600" defTabSz="914400">
-              <a:lnSpc>
-                <a:spcPct val="90000"/>
-              </a:lnSpc>
-              <a:spcBef>
-                <a:spcPts val="340"/>
-              </a:spcBef>
-              <a:spcAft>
-                <a:spcPts val="142"/>
-              </a:spcAft>
-              <a:buClr>
-                <a:srgbClr val="000000"/>
-              </a:buClr>
-              <a:buSzPct val="200000"/>
-              <a:buFont typeface="Arial"/>
-              <a:buChar char="•"/>
-              <a:tabLst>
-                <a:tab algn="l" pos="355680"/>
-              </a:tabLst>
-            </a:pPr>
-            <a:r>
-              <a:rPr b="0" lang="en-GB" sz="1000" strike="noStrike" u="none">
-                <a:solidFill>
-                  <a:schemeClr val="dk1"/>
-                </a:solidFill>
-                <a:effectLst/>
-                <a:uFillTx/>
-                <a:latin typeface="Lucida Handwriting"/>
-              </a:rPr>
-              <a:t>Cambiar fecha de nacimiento</a:t>
-            </a:r>
-            <a:endParaRPr b="0" lang="es-ES" sz="1000" strike="noStrike" u="none">
-              <a:solidFill>
-                <a:srgbClr val="000000"/>
-              </a:solidFill>
-              <a:effectLst/>
-              <a:uFillTx/>
-              <a:latin typeface="Arial"/>
-            </a:endParaRPr>
-          </a:p>
-          <a:p>
-            <a:pPr lvl="1" marL="450720" indent="-228600" defTabSz="914400">
-              <a:lnSpc>
-                <a:spcPct val="90000"/>
-              </a:lnSpc>
-              <a:spcBef>
-                <a:spcPts val="340"/>
-              </a:spcBef>
-              <a:spcAft>
-                <a:spcPts val="142"/>
-              </a:spcAft>
-              <a:buClr>
-                <a:srgbClr val="000000"/>
-              </a:buClr>
-              <a:buFont typeface="Wingdings" charset="2"/>
-              <a:buChar char=""/>
-              <a:tabLst>
-                <a:tab algn="l" pos="355680"/>
-              </a:tabLst>
-            </a:pPr>
-            <a:r>
-              <a:rPr b="0" lang="en-GB" sz="1000" strike="noStrike" u="none">
-                <a:solidFill>
-                  <a:schemeClr val="dk1"/>
-                </a:solidFill>
-                <a:effectLst/>
-                <a:uFillTx/>
-                <a:latin typeface="Lucida Handwriting"/>
-              </a:rPr>
-              <a:t>Validar datos</a:t>
-            </a:r>
-            <a:endParaRPr b="0" lang="es-ES" sz="1000" strike="noStrike" u="none">
-              <a:solidFill>
-                <a:srgbClr val="000000"/>
-              </a:solidFill>
-              <a:effectLst/>
-              <a:uFillTx/>
-              <a:latin typeface="Arial"/>
-            </a:endParaRPr>
-          </a:p>
-          <a:p>
-            <a:pPr lvl="1" marL="450720" indent="-228600" defTabSz="914400">
-              <a:lnSpc>
-                <a:spcPct val="90000"/>
-              </a:lnSpc>
-              <a:spcBef>
-                <a:spcPts val="340"/>
-              </a:spcBef>
-              <a:spcAft>
-                <a:spcPts val="142"/>
-              </a:spcAft>
-              <a:buClr>
-                <a:srgbClr val="000000"/>
-              </a:buClr>
-              <a:buFont typeface="Wingdings" charset="2"/>
-              <a:buChar char=""/>
-              <a:tabLst>
-                <a:tab algn="l" pos="355680"/>
-              </a:tabLst>
-            </a:pPr>
-            <a:r>
-              <a:rPr b="0" lang="en-GB" sz="1000" strike="noStrike" u="none">
-                <a:solidFill>
-                  <a:schemeClr val="dk1"/>
-                </a:solidFill>
-                <a:effectLst/>
-                <a:uFillTx/>
-                <a:latin typeface="Lucida Handwriting"/>
-              </a:rPr>
-              <a:t>Guardar cambios</a:t>
-            </a:r>
-            <a:endParaRPr b="0" lang="es-ES" sz="1000" strike="noStrike" u="none">
-              <a:solidFill>
-                <a:srgbClr val="000000"/>
-              </a:solidFill>
-              <a:effectLst/>
-              <a:uFillTx/>
-              <a:latin typeface="Arial"/>
-            </a:endParaRPr>
-          </a:p>
-          <a:p>
-            <a:pPr defTabSz="914400">
-              <a:lnSpc>
-                <a:spcPct val="90000"/>
-              </a:lnSpc>
-              <a:spcBef>
-                <a:spcPts val="1001"/>
-              </a:spcBef>
-              <a:tabLst>
-                <a:tab algn="l" pos="0"/>
-              </a:tabLst>
-            </a:pPr>
-            <a:r>
-              <a:rPr b="0" i="1" lang="en-GB" sz="1200" strike="noStrike" u="none">
-                <a:solidFill>
-                  <a:schemeClr val="dk1"/>
-                </a:solidFill>
-                <a:effectLst/>
-                <a:uFillTx/>
-                <a:latin typeface="Calibri"/>
-              </a:rPr>
-              <a:t>Enlaces</a:t>
-            </a:r>
-            <a:r>
-              <a:rPr b="0" lang="en-GB" sz="1200" strike="noStrike" u="none">
-                <a:solidFill>
-                  <a:schemeClr val="dk1"/>
-                </a:solidFill>
-                <a:effectLst/>
-                <a:uFillTx/>
-                <a:latin typeface="Calibri"/>
-              </a:rPr>
-              <a:t>: </a:t>
-            </a:r>
-            <a:endParaRPr b="0" lang="es-ES" sz="1200" strike="noStrike" u="none">
-              <a:solidFill>
-                <a:srgbClr val="000000"/>
-              </a:solidFill>
-              <a:effectLst/>
-              <a:uFillTx/>
-              <a:latin typeface="Arial"/>
-            </a:endParaRPr>
-          </a:p>
-          <a:p>
-            <a:pPr marL="268200" defTabSz="914400">
-              <a:lnSpc>
-                <a:spcPct val="90000"/>
-              </a:lnSpc>
-              <a:spcBef>
-                <a:spcPts val="1191"/>
-              </a:spcBef>
-              <a:spcAft>
-                <a:spcPts val="992"/>
-              </a:spcAft>
-              <a:tabLst>
-                <a:tab algn="l" pos="0"/>
-              </a:tabLst>
-            </a:pPr>
-            <a:r>
-              <a:rPr b="0" lang="en-GB" sz="1000" strike="noStrike" u="none">
-                <a:solidFill>
-                  <a:schemeClr val="dk1"/>
-                </a:solidFill>
-                <a:effectLst/>
-                <a:uFillTx/>
-                <a:latin typeface="Lucida Handwriting"/>
-              </a:rPr>
-              <a:t>► Principal</a:t>
-            </a:r>
-            <a:endParaRPr b="0" lang="es-ES" sz="1000" strike="noStrike" u="none">
-              <a:solidFill>
-                <a:srgbClr val="000000"/>
-              </a:solidFill>
-              <a:effectLst/>
-              <a:uFillTx/>
-              <a:latin typeface="Arial"/>
-            </a:endParaRPr>
-          </a:p>
-          <a:p>
-            <a:pPr marL="268200" defTabSz="914400">
-              <a:lnSpc>
-                <a:spcPct val="90000"/>
-              </a:lnSpc>
-              <a:spcBef>
-                <a:spcPts val="1001"/>
-              </a:spcBef>
-              <a:tabLst>
-                <a:tab algn="l" pos="0"/>
-              </a:tabLst>
-            </a:pPr>
-            <a:r>
-              <a:rPr b="0" i="1" lang="en-GB" sz="1200" strike="noStrike" u="none">
-                <a:solidFill>
-                  <a:schemeClr val="dk1"/>
-                </a:solidFill>
-                <a:effectLst/>
-                <a:uFillTx/>
-                <a:latin typeface="Calibri"/>
-              </a:rPr>
-              <a:t>Objectos</a:t>
-            </a:r>
-            <a:r>
-              <a:rPr b="0" lang="en-GB" sz="1200" strike="noStrike" u="none">
-                <a:solidFill>
-                  <a:schemeClr val="dk1"/>
-                </a:solidFill>
-                <a:effectLst/>
-                <a:uFillTx/>
-                <a:latin typeface="Calibri"/>
-              </a:rPr>
-              <a:t>:</a:t>
-            </a:r>
-            <a:endParaRPr b="0" lang="es-ES" sz="1200" strike="noStrike" u="none">
-              <a:solidFill>
-                <a:srgbClr val="000000"/>
-              </a:solidFill>
-              <a:effectLst/>
-              <a:uFillTx/>
-              <a:latin typeface="Arial"/>
-            </a:endParaRPr>
-          </a:p>
-          <a:p>
-            <a:pPr marL="268200" defTabSz="914400">
-              <a:lnSpc>
-                <a:spcPct val="90000"/>
-              </a:lnSpc>
-              <a:spcBef>
-                <a:spcPts val="1001"/>
-              </a:spcBef>
-              <a:tabLst>
-                <a:tab algn="l" pos="0"/>
-              </a:tabLst>
-            </a:pPr>
-            <a:r>
-              <a:rPr b="0" lang="en-GB" sz="1200" strike="noStrike" u="none">
-                <a:solidFill>
-                  <a:schemeClr val="dk1"/>
-                </a:solidFill>
-                <a:effectLst/>
-                <a:uFillTx/>
-                <a:latin typeface="Calibri"/>
-              </a:rPr>
-              <a:t>Usuario</a:t>
-            </a:r>
-            <a:endParaRPr b="0" lang="es-ES" sz="1200" strike="noStrike" u="none">
-              <a:solidFill>
-                <a:srgbClr val="000000"/>
-              </a:solidFill>
-              <a:effectLst/>
-              <a:uFillTx/>
-              <a:latin typeface="Arial"/>
-            </a:endParaRPr>
-          </a:p>
-          <a:p>
-            <a:pPr marL="268200" defTabSz="914400">
-              <a:lnSpc>
-                <a:spcPct val="90000"/>
-              </a:lnSpc>
-              <a:spcBef>
-                <a:spcPts val="1001"/>
-              </a:spcBef>
-              <a:tabLst>
-                <a:tab algn="l" pos="0"/>
-              </a:tabLst>
-            </a:pPr>
-            <a:r>
-              <a:rPr b="0" i="1" lang="en-GB" sz="1200" strike="noStrike" u="none">
-                <a:solidFill>
-                  <a:schemeClr val="dk1"/>
-                </a:solidFill>
-                <a:effectLst/>
-                <a:uFillTx/>
-                <a:latin typeface="Calibri"/>
-              </a:rPr>
-              <a:t>Restricciones</a:t>
-            </a:r>
-            <a:r>
-              <a:rPr b="0" lang="en-GB" sz="1200" strike="noStrike" u="none">
-                <a:solidFill>
-                  <a:schemeClr val="dk1"/>
-                </a:solidFill>
-                <a:effectLst/>
-                <a:uFillTx/>
-                <a:latin typeface="Calibri"/>
-              </a:rPr>
-              <a:t>: </a:t>
-            </a:r>
-            <a:endParaRPr b="0" lang="es-ES" sz="1200" strike="noStrike" u="none">
-              <a:solidFill>
-                <a:srgbClr val="000000"/>
-              </a:solidFill>
-              <a:effectLst/>
-              <a:uFillTx/>
-              <a:latin typeface="Arial"/>
-            </a:endParaRPr>
-          </a:p>
-          <a:p>
-            <a:pPr marL="268200" defTabSz="914400">
-              <a:lnSpc>
-                <a:spcPct val="90000"/>
-              </a:lnSpc>
-              <a:spcBef>
-                <a:spcPts val="624"/>
-              </a:spcBef>
-              <a:spcAft>
-                <a:spcPts val="425"/>
-              </a:spcAft>
-              <a:tabLst>
-                <a:tab algn="l" pos="0"/>
-              </a:tabLst>
-            </a:pPr>
-            <a:r>
-              <a:rPr b="0" lang="en-GB" sz="1200" strike="noStrike" u="none">
-                <a:solidFill>
-                  <a:schemeClr val="dk1"/>
-                </a:solidFill>
-                <a:effectLst/>
-                <a:uFillTx/>
-                <a:latin typeface="Calibri"/>
-              </a:rPr>
-              <a:t>- Aplicar validaciones del registro</a:t>
-            </a:r>
-            <a:endParaRPr b="0" lang="es-ES" sz="1200" strike="noStrike" u="none">
-              <a:solidFill>
-                <a:srgbClr val="000000"/>
-              </a:solidFill>
-              <a:effectLst/>
-              <a:uFillTx/>
-              <a:latin typeface="Arial"/>
-            </a:endParaRPr>
-          </a:p>
-          <a:p>
-            <a:pPr marL="268200" defTabSz="914400">
-              <a:lnSpc>
-                <a:spcPct val="90000"/>
-              </a:lnSpc>
-              <a:spcBef>
-                <a:spcPts val="624"/>
-              </a:spcBef>
-              <a:spcAft>
-                <a:spcPts val="425"/>
-              </a:spcAft>
-              <a:tabLst>
-                <a:tab algn="l" pos="0"/>
-              </a:tabLst>
-            </a:pPr>
-            <a:r>
-              <a:rPr b="0" lang="en-GB" sz="1200" strike="noStrike" u="none">
-                <a:solidFill>
-                  <a:schemeClr val="dk1"/>
-                </a:solidFill>
-                <a:effectLst/>
-                <a:uFillTx/>
-                <a:latin typeface="Calibri"/>
-              </a:rPr>
-              <a:t>- Nickname no editable</a:t>
-            </a:r>
-            <a:endParaRPr b="0" lang="es-ES" sz="1200" strike="noStrike" u="none">
-              <a:solidFill>
-                <a:srgbClr val="000000"/>
-              </a:solidFill>
-              <a:effectLst/>
-              <a:uFillTx/>
-              <a:latin typeface="Arial"/>
-            </a:endParaRPr>
-          </a:p>
-        </p:txBody>
-      </p:sp>
-    </p:spTree>
-  </p:cSld>
-  <mc:AlternateContent>
-    <mc:Choice Requires="p14">
-      <p:transition spd="slow" p14:dur="2000"/>
-    </mc:Choice>
-    <mc:Fallback>
-      <p:transition spd="slow"/>
-    </mc:Fallback>
-  </mc:AlternateContent>
-</p:sld>
-</file>
-
-<file path=ppt/slides/slide2.xml><?xml version="1.0" encoding="utf-8"?>
-<p:sld xmlns:a="http://schemas.openxmlformats.org/drawingml/2006/main" xmlns:p="http://schemas.openxmlformats.org/presentationml/2006/main" xmlns:r="http://schemas.openxmlformats.org/officeDocument/2006/relationships" xmlns:p14="http://schemas.microsoft.com/office/powerpoint/2010/main" xmlns:p15="http://schemas.microsoft.com/office/powerpoint/2012/main" xmlns:mc="http://schemas.openxmlformats.org/markup-compatibility/2006">
-  <p:cSld>
-    <p:spTree>
-      <p:nvGrpSpPr>
-        <p:cNvPr id="1" name=""/>
-        <p:cNvGrpSpPr/>
-        <p:nvPr/>
-      </p:nvGrpSpPr>
-      <p:grpSpPr>
-        <a:xfrm>
-          <a:off x="0" y="0"/>
-          <a:ext cx="0" cy="0"/>
-          <a:chOff x="0" y="0"/>
-          <a:chExt cx="0" cy="0"/>
-        </a:xfrm>
-      </p:grpSpPr>
-      <p:sp>
-        <p:nvSpPr>
-          <p:cNvPr id="63" name="5 Redondear rectángulo de esquina diagonal"/>
-          <p:cNvSpPr/>
-          <p:nvPr/>
-        </p:nvSpPr>
-        <p:spPr>
-          <a:xfrm>
-            <a:off x="4739040" y="3060000"/>
-            <a:ext cx="1560600" cy="645840"/>
-          </a:xfrm>
-          <a:prstGeom prst="round2DiagRect">
-            <a:avLst>
-              <a:gd name="adj1" fmla="val 16667"/>
-              <a:gd name="adj2" fmla="val 0"/>
-            </a:avLst>
-          </a:prstGeom>
-          <a:solidFill>
-            <a:srgbClr val="ffffff"/>
-          </a:solidFill>
-          <a:ln w="28575">
-            <a:solidFill>
-              <a:srgbClr val="000000"/>
-            </a:solidFill>
-          </a:ln>
-        </p:spPr>
-        <p:style>
-          <a:lnRef idx="2">
-            <a:schemeClr val="dk1"/>
-          </a:lnRef>
-          <a:fillRef idx="1">
-            <a:schemeClr val="lt1"/>
-          </a:fillRef>
-          <a:effectRef idx="0">
-            <a:schemeClr val="dk1"/>
-          </a:effectRef>
-          <a:fontRef idx="minor"/>
-        </p:style>
-        <p:txBody>
-          <a:bodyPr lIns="90000" rIns="90000" tIns="45000" bIns="45000" anchor="ctr" anchorCtr="1">
-            <a:noAutofit/>
-          </a:bodyPr>
-          <a:p>
-            <a:pPr algn="ctr" defTabSz="914400">
-              <a:lnSpc>
-                <a:spcPct val="100000"/>
-              </a:lnSpc>
-            </a:pPr>
-            <a:r>
-              <a:rPr b="0" lang="es-ES" sz="1400" strike="noStrike" u="none">
-                <a:solidFill>
-                  <a:srgbClr val="000000"/>
-                </a:solidFill>
-                <a:effectLst/>
-                <a:uFillTx/>
-                <a:latin typeface="Calibri"/>
-              </a:rPr>
-              <a:t>Autenticarse</a:t>
-            </a:r>
-            <a:endParaRPr b="0" lang="es-ES" sz="1400" strike="noStrike" u="none">
-              <a:solidFill>
-                <a:srgbClr val="000000"/>
-              </a:solidFill>
-              <a:effectLst/>
-              <a:uFillTx/>
-              <a:latin typeface="Arial"/>
-            </a:endParaRPr>
-          </a:p>
-        </p:txBody>
-      </p:sp>
-      <p:sp>
-        <p:nvSpPr>
-          <p:cNvPr id="64" name="5 Redondear rectángulo de esquina diagonal 1"/>
-          <p:cNvSpPr/>
-          <p:nvPr/>
-        </p:nvSpPr>
-        <p:spPr>
-          <a:xfrm>
-            <a:off x="6661080" y="1800000"/>
-            <a:ext cx="1560600" cy="645840"/>
-          </a:xfrm>
-          <a:prstGeom prst="round2DiagRect">
-            <a:avLst>
-              <a:gd name="adj1" fmla="val 16667"/>
-              <a:gd name="adj2" fmla="val 0"/>
-            </a:avLst>
-          </a:prstGeom>
-          <a:solidFill>
-            <a:srgbClr val="ffffff"/>
-          </a:solidFill>
-          <a:ln w="28575">
-            <a:solidFill>
-              <a:srgbClr val="000000"/>
-            </a:solidFill>
-          </a:ln>
-        </p:spPr>
-        <p:style>
-          <a:lnRef idx="2">
-            <a:schemeClr val="dk1"/>
-          </a:lnRef>
-          <a:fillRef idx="1">
-            <a:schemeClr val="lt1"/>
-          </a:fillRef>
-          <a:effectRef idx="0">
-            <a:schemeClr val="dk1"/>
-          </a:effectRef>
-          <a:fontRef idx="minor"/>
-        </p:style>
-        <p:txBody>
-          <a:bodyPr lIns="90000" rIns="90000" tIns="45000" bIns="45000" anchor="ctr">
-            <a:noAutofit/>
-          </a:bodyPr>
-          <a:p>
-            <a:pPr algn="ctr" defTabSz="914400">
-              <a:lnSpc>
-                <a:spcPct val="100000"/>
-              </a:lnSpc>
-            </a:pPr>
-            <a:r>
-              <a:rPr b="0" lang="es-ES" sz="1400" strike="noStrike" u="none">
-                <a:solidFill>
-                  <a:srgbClr val="000000"/>
-                </a:solidFill>
-                <a:effectLst/>
-                <a:uFillTx/>
-                <a:latin typeface="Calibri"/>
-              </a:rPr>
-              <a:t>Registrarse</a:t>
-            </a:r>
-            <a:endParaRPr b="0" lang="es-ES" sz="1400" strike="noStrike" u="none">
-              <a:solidFill>
-                <a:srgbClr val="000000"/>
-              </a:solidFill>
-              <a:effectLst/>
-              <a:uFillTx/>
-              <a:latin typeface="Arial"/>
-            </a:endParaRPr>
-          </a:p>
-        </p:txBody>
-      </p:sp>
-      <p:sp>
-        <p:nvSpPr>
-          <p:cNvPr id="65" name="5 Redondear rectángulo de esquina diagonal 3"/>
-          <p:cNvSpPr/>
-          <p:nvPr/>
-        </p:nvSpPr>
-        <p:spPr>
-          <a:xfrm>
-            <a:off x="6661080" y="3780000"/>
-            <a:ext cx="1560600" cy="645840"/>
-          </a:xfrm>
-          <a:prstGeom prst="round2DiagRect">
-            <a:avLst>
-              <a:gd name="adj1" fmla="val 16667"/>
-              <a:gd name="adj2" fmla="val 0"/>
-            </a:avLst>
-          </a:prstGeom>
-          <a:solidFill>
-            <a:srgbClr val="ffffff"/>
-          </a:solidFill>
-          <a:ln w="28575">
-            <a:solidFill>
-              <a:srgbClr val="000000"/>
-            </a:solidFill>
-          </a:ln>
-        </p:spPr>
-        <p:style>
-          <a:lnRef idx="2">
-            <a:schemeClr val="dk1"/>
-          </a:lnRef>
-          <a:fillRef idx="1">
-            <a:schemeClr val="lt1"/>
-          </a:fillRef>
-          <a:effectRef idx="0">
-            <a:schemeClr val="dk1"/>
-          </a:effectRef>
-          <a:fontRef idx="minor"/>
-        </p:style>
-        <p:txBody>
-          <a:bodyPr lIns="90000" rIns="90000" tIns="45000" bIns="45000" anchor="ctr">
-            <a:noAutofit/>
-          </a:bodyPr>
-          <a:p>
-            <a:pPr algn="ctr" defTabSz="914400">
-              <a:lnSpc>
-                <a:spcPct val="100000"/>
-              </a:lnSpc>
-            </a:pPr>
-            <a:r>
-              <a:rPr b="0" lang="es-ES" sz="1400" strike="noStrike" u="none">
-                <a:solidFill>
-                  <a:srgbClr val="000000"/>
-                </a:solidFill>
-                <a:effectLst/>
-                <a:uFillTx/>
-                <a:latin typeface="Calibri"/>
-              </a:rPr>
-              <a:t>Principal</a:t>
-            </a:r>
-            <a:endParaRPr b="0" lang="es-ES" sz="1400" strike="noStrike" u="none">
-              <a:solidFill>
-                <a:srgbClr val="000000"/>
-              </a:solidFill>
-              <a:effectLst/>
-              <a:uFillTx/>
-              <a:latin typeface="Arial"/>
-            </a:endParaRPr>
-          </a:p>
-        </p:txBody>
-      </p:sp>
-      <p:cxnSp>
-        <p:nvCxnSpPr>
-          <p:cNvPr id="66" name="Conector recto de flecha 2"/>
-          <p:cNvCxnSpPr>
-            <a:stCxn id="63" idx="0"/>
-            <a:endCxn id="64" idx="1"/>
-          </p:cNvCxnSpPr>
-          <p:nvPr/>
-        </p:nvCxnSpPr>
-        <p:spPr>
-          <a:xfrm flipV="1">
-            <a:off x="5519160" y="2122920"/>
-            <a:ext cx="1142280" cy="937440"/>
-          </a:xfrm>
-          <a:prstGeom prst="straightConnector1">
-            <a:avLst/>
-          </a:prstGeom>
-          <a:ln w="0">
-            <a:solidFill>
-              <a:srgbClr val="4472c4"/>
-            </a:solidFill>
-            <a:tailEnd len="med" type="triangle" w="med"/>
-          </a:ln>
-        </p:spPr>
-      </p:cxnSp>
-      <p:cxnSp>
-        <p:nvCxnSpPr>
-          <p:cNvPr id="67" name="Conector recto de flecha 4"/>
-          <p:cNvCxnSpPr>
-            <a:stCxn id="65" idx="3"/>
-            <a:endCxn id="68" idx="1"/>
-          </p:cNvCxnSpPr>
-          <p:nvPr/>
-        </p:nvCxnSpPr>
-        <p:spPr>
-          <a:xfrm>
-            <a:off x="8221680" y="4102920"/>
-            <a:ext cx="477720" cy="360"/>
-          </a:xfrm>
-          <a:prstGeom prst="straightConnector1">
-            <a:avLst/>
-          </a:prstGeom>
-          <a:ln w="0">
-            <a:solidFill>
-              <a:srgbClr val="4472c4"/>
-            </a:solidFill>
-            <a:tailEnd len="med" type="triangle" w="med"/>
-          </a:ln>
-        </p:spPr>
-      </p:cxnSp>
-      <p:cxnSp>
-        <p:nvCxnSpPr>
-          <p:cNvPr id="69" name="Conector recto de flecha 6"/>
-          <p:cNvCxnSpPr>
-            <a:stCxn id="63" idx="2"/>
-            <a:endCxn id="65" idx="1"/>
-          </p:cNvCxnSpPr>
-          <p:nvPr/>
-        </p:nvCxnSpPr>
-        <p:spPr>
-          <a:xfrm>
-            <a:off x="5519160" y="3705840"/>
-            <a:ext cx="1142280" cy="397440"/>
-          </a:xfrm>
-          <a:prstGeom prst="straightConnector1">
-            <a:avLst/>
-          </a:prstGeom>
-          <a:ln w="0">
-            <a:solidFill>
-              <a:srgbClr val="4472c4"/>
-            </a:solidFill>
-            <a:tailEnd len="med" type="triangle" w="med"/>
-          </a:ln>
-        </p:spPr>
-      </p:cxnSp>
-      <p:sp>
-        <p:nvSpPr>
-          <p:cNvPr id="68" name="5 Redondear rectángulo de esquina diagonal 4"/>
-          <p:cNvSpPr/>
-          <p:nvPr/>
-        </p:nvSpPr>
-        <p:spPr>
-          <a:xfrm>
-            <a:off x="8699040" y="3780000"/>
-            <a:ext cx="1560600" cy="645840"/>
-          </a:xfrm>
-          <a:prstGeom prst="round2DiagRect">
-            <a:avLst>
-              <a:gd name="adj1" fmla="val 16667"/>
-              <a:gd name="adj2" fmla="val 0"/>
-            </a:avLst>
-          </a:prstGeom>
-          <a:solidFill>
-            <a:srgbClr val="ffffff"/>
-          </a:solidFill>
-          <a:ln w="28575">
-            <a:solidFill>
-              <a:srgbClr val="000000"/>
-            </a:solidFill>
-          </a:ln>
-        </p:spPr>
-        <p:style>
-          <a:lnRef idx="2">
-            <a:schemeClr val="dk1"/>
-          </a:lnRef>
-          <a:fillRef idx="1">
-            <a:schemeClr val="lt1"/>
-          </a:fillRef>
-          <a:effectRef idx="0">
-            <a:schemeClr val="dk1"/>
-          </a:effectRef>
-          <a:fontRef idx="minor"/>
-        </p:style>
-        <p:txBody>
-          <a:bodyPr lIns="90000" rIns="90000" tIns="45000" bIns="45000" anchor="ctr">
-            <a:noAutofit/>
-          </a:bodyPr>
-          <a:p>
-            <a:pPr algn="ctr" defTabSz="914400">
-              <a:lnSpc>
-                <a:spcPct val="100000"/>
-              </a:lnSpc>
-            </a:pPr>
-            <a:r>
-              <a:rPr b="0" lang="es-ES" sz="1400" strike="noStrike" u="none">
-                <a:solidFill>
-                  <a:srgbClr val="000000"/>
-                </a:solidFill>
-                <a:effectLst/>
-                <a:uFillTx/>
-                <a:latin typeface="Calibri"/>
-              </a:rPr>
-              <a:t>Perfil</a:t>
-            </a:r>
-            <a:endParaRPr b="0" lang="es-ES" sz="1400" strike="noStrike" u="none">
-              <a:solidFill>
-                <a:srgbClr val="000000"/>
-              </a:solidFill>
-              <a:effectLst/>
-              <a:uFillTx/>
-              <a:latin typeface="Arial"/>
-            </a:endParaRPr>
-          </a:p>
-        </p:txBody>
-      </p:sp>
-      <p:sp>
-        <p:nvSpPr>
-          <p:cNvPr id="70" name="5 Redondear rectángulo de esquina diagonal 5"/>
-          <p:cNvSpPr/>
-          <p:nvPr/>
-        </p:nvSpPr>
-        <p:spPr>
-          <a:xfrm>
-            <a:off x="6661080" y="2773800"/>
-            <a:ext cx="1560600" cy="645840"/>
-          </a:xfrm>
-          <a:prstGeom prst="round2DiagRect">
-            <a:avLst>
-              <a:gd name="adj1" fmla="val 16667"/>
-              <a:gd name="adj2" fmla="val 0"/>
-            </a:avLst>
-          </a:prstGeom>
-          <a:solidFill>
-            <a:srgbClr val="ffffff"/>
-          </a:solidFill>
-          <a:ln w="28575">
-            <a:solidFill>
-              <a:srgbClr val="000000"/>
-            </a:solidFill>
-          </a:ln>
-        </p:spPr>
-        <p:style>
-          <a:lnRef idx="2">
-            <a:schemeClr val="dk1"/>
-          </a:lnRef>
-          <a:fillRef idx="1">
-            <a:schemeClr val="lt1"/>
-          </a:fillRef>
-          <a:effectRef idx="0">
-            <a:schemeClr val="dk1"/>
-          </a:effectRef>
-          <a:fontRef idx="minor"/>
-        </p:style>
-        <p:txBody>
-          <a:bodyPr lIns="90000" rIns="90000" tIns="45000" bIns="45000" anchor="ctr">
-            <a:noAutofit/>
-          </a:bodyPr>
-          <a:p>
-            <a:pPr algn="ctr" defTabSz="914400">
-              <a:lnSpc>
-                <a:spcPct val="100000"/>
-              </a:lnSpc>
-            </a:pPr>
-            <a:r>
-              <a:rPr b="0" lang="es-ES" sz="1400" strike="noStrike" u="none">
-                <a:solidFill>
-                  <a:srgbClr val="000000"/>
-                </a:solidFill>
-                <a:effectLst/>
-                <a:uFillTx/>
-                <a:latin typeface="Calibri"/>
-              </a:rPr>
-              <a:t>Confirmar registro</a:t>
-            </a:r>
-            <a:endParaRPr b="0" lang="es-ES" sz="1400" strike="noStrike" u="none">
-              <a:solidFill>
-                <a:srgbClr val="000000"/>
-              </a:solidFill>
-              <a:effectLst/>
-              <a:uFillTx/>
-              <a:latin typeface="Arial"/>
-            </a:endParaRPr>
-          </a:p>
-        </p:txBody>
-      </p:sp>
-      <p:cxnSp>
-        <p:nvCxnSpPr>
-          <p:cNvPr id="71" name="Conector recto de flecha 3"/>
-          <p:cNvCxnSpPr>
-            <a:stCxn id="64" idx="2"/>
-            <a:endCxn id="70" idx="0"/>
-          </p:cNvCxnSpPr>
-          <p:nvPr/>
-        </p:nvCxnSpPr>
-        <p:spPr>
-          <a:xfrm>
-            <a:off x="7441200" y="2445840"/>
-            <a:ext cx="360" cy="328320"/>
-          </a:xfrm>
-          <a:prstGeom prst="straightConnector1">
-            <a:avLst/>
-          </a:prstGeom>
-          <a:ln w="0">
-            <a:solidFill>
-              <a:srgbClr val="4472c4"/>
-            </a:solidFill>
-            <a:tailEnd len="med" type="triangle" w="med"/>
-          </a:ln>
-        </p:spPr>
-      </p:cxnSp>
-      <p:cxnSp>
-        <p:nvCxnSpPr>
-          <p:cNvPr id="72" name="Conector recto de flecha 7"/>
-          <p:cNvCxnSpPr>
-            <a:stCxn id="70" idx="1"/>
-            <a:endCxn id="63" idx="3"/>
-          </p:cNvCxnSpPr>
-          <p:nvPr/>
-        </p:nvCxnSpPr>
-        <p:spPr>
-          <a:xfrm flipH="1">
-            <a:off x="6299640" y="3096720"/>
-            <a:ext cx="361800" cy="286560"/>
-          </a:xfrm>
-          <a:prstGeom prst="straightConnector1">
-            <a:avLst/>
-          </a:prstGeom>
-          <a:ln w="0">
-            <a:solidFill>
-              <a:srgbClr val="4472c4"/>
-            </a:solidFill>
-            <a:tailEnd len="med" type="triangle" w="med"/>
-          </a:ln>
-        </p:spPr>
-      </p:cxnSp>
-      <p:sp>
-        <p:nvSpPr>
-          <p:cNvPr id="73" name="2 Marcador de contenido 3"/>
-          <p:cNvSpPr/>
-          <p:nvPr/>
-        </p:nvSpPr>
-        <p:spPr>
-          <a:xfrm>
-            <a:off x="900000" y="720000"/>
-            <a:ext cx="2518560" cy="5399640"/>
-          </a:xfrm>
-          <a:prstGeom prst="rect">
-            <a:avLst/>
-          </a:prstGeom>
-          <a:solidFill>
-            <a:srgbClr val="ffffff"/>
-          </a:solidFill>
-          <a:ln>
-            <a:solidFill>
-              <a:srgbClr val="000000"/>
-            </a:solidFill>
-          </a:ln>
-        </p:spPr>
-        <p:style>
-          <a:lnRef idx="2">
-            <a:schemeClr val="dk1"/>
-          </a:lnRef>
-          <a:fillRef idx="1">
-            <a:schemeClr val="lt1"/>
-          </a:fillRef>
-          <a:effectRef idx="0">
-            <a:schemeClr val="dk1"/>
-          </a:effectRef>
-          <a:fontRef idx="minor"/>
-        </p:style>
-        <p:txBody>
-          <a:bodyPr lIns="90000" rIns="90000" tIns="45000" bIns="45000" anchor="t">
-            <a:noAutofit/>
-          </a:bodyPr>
-          <a:p>
-            <a:pPr defTabSz="914400">
-              <a:lnSpc>
-                <a:spcPct val="90000"/>
-              </a:lnSpc>
-              <a:spcBef>
-                <a:spcPts val="1001"/>
-              </a:spcBef>
-              <a:tabLst>
-                <a:tab algn="l" pos="0"/>
-              </a:tabLst>
-            </a:pPr>
-            <a:r>
-              <a:rPr b="0" i="1" lang="en-GB" sz="1200" strike="noStrike" u="none">
-                <a:solidFill>
-                  <a:schemeClr val="dk1"/>
-                </a:solidFill>
-                <a:effectLst/>
-                <a:uFillTx/>
-                <a:latin typeface="Calibri"/>
-              </a:rPr>
-              <a:t>Nombre</a:t>
-            </a:r>
-            <a:r>
-              <a:rPr b="0" lang="en-GB" sz="1200" strike="noStrike" u="none">
-                <a:solidFill>
-                  <a:schemeClr val="dk1"/>
-                </a:solidFill>
-                <a:effectLst/>
-                <a:uFillTx/>
-                <a:latin typeface="Calibri"/>
-              </a:rPr>
-              <a:t>: </a:t>
-            </a:r>
-            <a:r>
-              <a:rPr b="0" lang="en-GB" sz="1050" strike="noStrike" u="none">
-                <a:solidFill>
-                  <a:schemeClr val="dk1"/>
-                </a:solidFill>
-                <a:effectLst/>
-                <a:uFillTx/>
-                <a:latin typeface="Lucida Handwriting"/>
-              </a:rPr>
-              <a:t>Principal</a:t>
-            </a:r>
-            <a:endParaRPr b="0" lang="es-ES" sz="1050" strike="noStrike" u="none">
-              <a:solidFill>
-                <a:srgbClr val="000000"/>
-              </a:solidFill>
-              <a:effectLst/>
-              <a:uFillTx/>
-              <a:latin typeface="Arial"/>
-            </a:endParaRPr>
-          </a:p>
-          <a:p>
-            <a:pPr defTabSz="914400">
-              <a:lnSpc>
-                <a:spcPct val="90000"/>
-              </a:lnSpc>
-              <a:spcBef>
-                <a:spcPts val="1191"/>
-              </a:spcBef>
-              <a:spcAft>
-                <a:spcPts val="992"/>
-              </a:spcAft>
-              <a:tabLst>
-                <a:tab algn="l" pos="0"/>
-              </a:tabLst>
-            </a:pPr>
-            <a:r>
-              <a:rPr b="0" i="1" lang="en-GB" sz="1200" strike="noStrike" u="none">
-                <a:solidFill>
-                  <a:schemeClr val="dk1"/>
-                </a:solidFill>
-                <a:effectLst/>
-                <a:uFillTx/>
-                <a:latin typeface="Calibri"/>
-              </a:rPr>
-              <a:t>Objetivo</a:t>
-            </a:r>
-            <a:r>
-              <a:rPr b="0" lang="en-GB" sz="1200" strike="noStrike" u="none">
-                <a:solidFill>
-                  <a:schemeClr val="dk1"/>
-                </a:solidFill>
-                <a:effectLst/>
-                <a:uFillTx/>
-                <a:latin typeface="Calibri"/>
-              </a:rPr>
-              <a:t>: Acceder rápidamente a las funciones más importantes</a:t>
-            </a:r>
-            <a:endParaRPr b="0" lang="es-ES" sz="1200" strike="noStrike" u="none">
-              <a:solidFill>
-                <a:srgbClr val="000000"/>
-              </a:solidFill>
-              <a:effectLst/>
-              <a:uFillTx/>
-              <a:latin typeface="Arial"/>
-            </a:endParaRPr>
-          </a:p>
-          <a:p>
-            <a:pPr defTabSz="914400">
-              <a:lnSpc>
-                <a:spcPct val="90000"/>
-              </a:lnSpc>
-              <a:spcBef>
-                <a:spcPts val="1001"/>
-              </a:spcBef>
-              <a:tabLst>
-                <a:tab algn="l" pos="0"/>
-              </a:tabLst>
-            </a:pPr>
-            <a:r>
-              <a:rPr b="0" i="1" lang="en-GB" sz="1200" strike="noStrike" u="none">
-                <a:solidFill>
-                  <a:schemeClr val="dk1"/>
-                </a:solidFill>
-                <a:effectLst/>
-                <a:uFillTx/>
-                <a:latin typeface="Calibri"/>
-              </a:rPr>
-              <a:t>Funciones</a:t>
-            </a:r>
-            <a:r>
-              <a:rPr b="0" lang="en-GB" sz="1200" strike="noStrike" u="none">
-                <a:solidFill>
-                  <a:schemeClr val="dk1"/>
-                </a:solidFill>
-                <a:effectLst/>
-                <a:uFillTx/>
-                <a:latin typeface="Calibri"/>
-              </a:rPr>
-              <a:t>: </a:t>
-            </a:r>
-            <a:endParaRPr b="0" lang="es-ES" sz="1200" strike="noStrike" u="none">
-              <a:solidFill>
-                <a:srgbClr val="000000"/>
-              </a:solidFill>
-              <a:effectLst/>
-              <a:uFillTx/>
-              <a:latin typeface="Arial"/>
-            </a:endParaRPr>
-          </a:p>
-          <a:p>
-            <a:pPr lvl="1" marL="450720" indent="-228600" defTabSz="914400">
-              <a:lnSpc>
-                <a:spcPct val="100000"/>
-              </a:lnSpc>
-              <a:spcBef>
-                <a:spcPts val="340"/>
-              </a:spcBef>
-              <a:spcAft>
-                <a:spcPts val="142"/>
-              </a:spcAft>
-              <a:buClr>
-                <a:srgbClr val="000000"/>
-              </a:buClr>
-              <a:buSzPct val="200000"/>
-              <a:buFont typeface="Arial"/>
-              <a:buChar char="•"/>
-              <a:tabLst>
-                <a:tab algn="l" pos="355680"/>
-              </a:tabLst>
-            </a:pPr>
-            <a:r>
-              <a:rPr b="0" lang="en-GB" sz="1000" strike="noStrike" u="none">
-                <a:solidFill>
-                  <a:schemeClr val="dk1"/>
-                </a:solidFill>
-                <a:effectLst/>
-                <a:uFillTx/>
-                <a:latin typeface="Lucida Handwriting"/>
-              </a:rPr>
-              <a:t>Ir a Actividades</a:t>
+              <a:t>Importar GPX</a:t>
             </a:r>
             <a:endParaRPr b="0" lang="es-ES" sz="1000" strike="noStrike" u="none">
               <a:solidFill>
